--- a/_NOVAS MELHORIAS/DECK-DIRETORIA-SMART-DEALER.pptx
+++ b/_NOVAS MELHORIAS/DECK-DIRETORIA-SMART-DEALER.pptx
@@ -23,10 +23,9 @@
     <p:sldId id="271" r:id="rId17"/>
     <p:sldId id="272" r:id="rId18"/>
     <p:sldId id="273" r:id="rId19"/>
-    <p:sldId id="274" r:id="rId20"/>
   </p:sldIdLst>
   <p:notesMasterIdLst>
-    <p:notesMasterId r:id="rId21"/>
+    <p:notesMasterId r:id="rId20"/>
   </p:notesMasterIdLst>
   <p:sldSz cx="12188952" cy="6858000"/>
   <p:notesSz cx="6858000" cy="12188952"/>
@@ -1336,94 +1335,6 @@
             <a:fld id="{F7021451-1387-4CA6-816F-3879F97B5CBC}" type="slidenum">
               <a:rPr lang="en-US"/>
               <a:t>18</a:t>
-            </a:fld>
-            <a:endParaRPr lang="en-US"/>
-          </a:p>
-        </p:txBody>
-      </p:sp>
-    </p:spTree>
-    <p:extLst>
-      <p:ext uri="{BB962C8B-B14F-4D97-AF65-F5344CB8AC3E}">
-        <p14:creationId xmlns:p14="http://schemas.microsoft.com/office/powerpoint/2010/main" val="1024086991"/>
-      </p:ext>
-    </p:extLst>
-  </p:cSld>
-  <p:clrMapOvr>
-    <a:masterClrMapping/>
-  </p:clrMapOvr>
-</p:notes>
-</file>
-
-<file path=ppt/notesSlides/notesSlide19.xml><?xml version="1.0" encoding="utf-8"?>
-<p:notes xmlns:a="http://schemas.openxmlformats.org/drawingml/2006/main" xmlns:r="http://schemas.openxmlformats.org/officeDocument/2006/relationships" xmlns:p="http://schemas.openxmlformats.org/presentationml/2006/main">
-  <p:cSld>
-    <p:spTree>
-      <p:nvGrpSpPr>
-        <p:cNvPr id="1" name=""/>
-        <p:cNvGrpSpPr/>
-        <p:nvPr/>
-      </p:nvGrpSpPr>
-      <p:grpSpPr>
-        <a:xfrm>
-          <a:off x="0" y="0"/>
-          <a:ext cx="0" cy="0"/>
-          <a:chOff x="0" y="0"/>
-          <a:chExt cx="0" cy="0"/>
-        </a:xfrm>
-      </p:grpSpPr>
-      <p:sp>
-        <p:nvSpPr>
-          <p:cNvPr id="2" name="Slide Image Placeholder 1"/>
-          <p:cNvSpPr>
-            <a:spLocks noGrp="1" noRot="1" noChangeAspect="1"/>
-          </p:cNvSpPr>
-          <p:nvPr>
-            <p:ph type="sldImg"/>
-          </p:nvPr>
-        </p:nvSpPr>
-        <p:spPr/>
-      </p:sp>
-      <p:sp>
-        <p:nvSpPr>
-          <p:cNvPr id="3" name="Notes Placeholder 2"/>
-          <p:cNvSpPr>
-            <a:spLocks noGrp="1"/>
-          </p:cNvSpPr>
-          <p:nvPr>
-            <p:ph type="body" idx="1"/>
-          </p:nvPr>
-        </p:nvSpPr>
-        <p:spPr/>
-        <p:txBody>
-          <a:bodyPr/>
-          <a:lstStyle/>
-          <a:p>
-            <a:r>
-              <a:rPr lang="en-US" dirty="0"/>
-              <a:t/>
-            </a:r>
-            <a:endParaRPr lang="en-US" dirty="0"/>
-          </a:p>
-        </p:txBody>
-      </p:sp>
-      <p:sp>
-        <p:nvSpPr>
-          <p:cNvPr id="4" name="Slide Number Placeholder 3"/>
-          <p:cNvSpPr>
-            <a:spLocks noGrp="1"/>
-          </p:cNvSpPr>
-          <p:nvPr>
-            <p:ph type="sldNum" sz="quarter" idx="10"/>
-          </p:nvPr>
-        </p:nvSpPr>
-        <p:spPr/>
-        <p:txBody>
-          <a:bodyPr/>
-          <a:lstStyle/>
-          <a:p>
-            <a:fld id="{F7021451-1387-4CA6-816F-3879F97B5CBC}" type="slidenum">
-              <a:rPr lang="en-US"/>
-              <a:t>19</a:t>
             </a:fld>
             <a:endParaRPr lang="en-US"/>
           </a:p>
@@ -6451,7 +6362,7 @@
                 <a:ea typeface="Calibri" pitchFamily="34" charset="-122"/>
                 <a:cs typeface="Calibri" pitchFamily="34" charset="-120"/>
               </a:rPr>
-              <a:t>Premya: quanto vale a fidelidade, em reais</a:t>
+              <a:t>Seguros, Consórcio e a voz do cliente</a:t>
             </a:r>
             <a:endParaRPr lang="en-US" sz="3000" dirty="0"/>
           </a:p>
@@ -6492,7 +6403,7 @@
                 <a:ea typeface="Calibri" pitchFamily="34" charset="-122"/>
                 <a:cs typeface="Calibri" pitchFamily="34" charset="-120"/>
               </a:rPr>
-              <a:t>O folder oficial do Banco Yamaha codificado no sistema — o índice acompanhado em curso, não descoberto na apuração.</a:t>
+              <a:t>Receita recorrente que já é da casa — e a pesquisa que diz onde o cliente decide.</a:t>
             </a:r>
             <a:endParaRPr lang="en-US" sz="1350" dirty="0"/>
           </a:p>
@@ -6545,12 +6456,12 @@
         </p:nvSpPr>
         <p:spPr>
           <a:xfrm>
-            <a:off x="777240" y="1920240"/>
-            <a:ext cx="4892040" cy="493776"/>
+            <a:off x="777240" y="1965960"/>
+            <a:ext cx="3410712" cy="2103120"/>
           </a:xfrm>
           <a:prstGeom prst="roundRect">
             <a:avLst>
-              <a:gd name="adj" fmla="val 5556"/>
+              <a:gd name="adj" fmla="val 1304"/>
             </a:avLst>
           </a:prstGeom>
           <a:solidFill>
@@ -6567,24 +6478,67 @@
         </p:nvSpPr>
         <p:spPr>
           <a:xfrm>
-            <a:off x="960120" y="2029968"/>
-            <a:ext cx="1234440" cy="274320"/>
-          </a:xfrm>
-          <a:prstGeom prst="rect">
-            <a:avLst/>
-          </a:prstGeom>
-          <a:noFill/>
-          <a:ln/>
-        </p:spPr>
-        <p:txBody>
-          <a:bodyPr wrap="square" rtlCol="0" anchor="ctr"/>
-          <a:lstStyle/>
-          <a:p>
-            <a:pPr indent="0" marL="0">
-              <a:buNone/>
-            </a:pPr>
-            <a:r>
-              <a:rPr lang="en-US" sz="1150" b="1" dirty="0">
+            <a:off x="996696" y="2167128"/>
+            <a:ext cx="2971800" cy="201168"/>
+          </a:xfrm>
+          <a:prstGeom prst="rect">
+            <a:avLst/>
+          </a:prstGeom>
+          <a:noFill/>
+          <a:ln/>
+        </p:spPr>
+        <p:txBody>
+          <a:bodyPr wrap="square" rtlCol="0" anchor="ctr">
+            <a:normAutofit/>
+          </a:bodyPr>
+          <a:lstStyle/>
+          <a:p>
+            <a:pPr indent="0" marL="0">
+              <a:buNone/>
+            </a:pPr>
+            <a:r>
+              <a:rPr lang="en-US" sz="950" b="1" spc="50" kern="0" dirty="0">
+                <a:solidFill>
+                  <a:srgbClr val="0365FE"/>
+                </a:solidFill>
+                <a:latin typeface="Calibri" pitchFamily="34" charset="0"/>
+                <a:ea typeface="Calibri" pitchFamily="34" charset="-122"/>
+                <a:cs typeface="Calibri" pitchFamily="34" charset="-120"/>
+              </a:rPr>
+              <a:t>YAMAHA SEGUROS</a:t>
+            </a:r>
+            <a:endParaRPr lang="en-US" sz="950" dirty="0"/>
+          </a:p>
+        </p:txBody>
+      </p:sp>
+      <p:sp>
+        <p:nvSpPr>
+          <p:cNvPr id="8" name="Text 6"/>
+          <p:cNvSpPr/>
+          <p:nvPr/>
+        </p:nvSpPr>
+        <p:spPr>
+          <a:xfrm>
+            <a:off x="996696" y="2423160"/>
+            <a:ext cx="2971800" cy="310896"/>
+          </a:xfrm>
+          <a:prstGeom prst="rect">
+            <a:avLst/>
+          </a:prstGeom>
+          <a:noFill/>
+          <a:ln/>
+        </p:spPr>
+        <p:txBody>
+          <a:bodyPr wrap="square" rtlCol="0" anchor="ctr">
+            <a:normAutofit/>
+          </a:bodyPr>
+          <a:lstStyle/>
+          <a:p>
+            <a:pPr indent="0" marL="0">
+              <a:buNone/>
+            </a:pPr>
+            <a:r>
+              <a:rPr lang="en-US" sz="1400" b="1" dirty="0">
                 <a:solidFill>
                   <a:srgbClr val="091426"/>
                 </a:solidFill>
@@ -6592,38 +6546,43 @@
                 <a:ea typeface="Calibri" pitchFamily="34" charset="-122"/>
                 <a:cs typeface="Calibri" pitchFamily="34" charset="-120"/>
               </a:rPr>
-              <a:t>Diamante</a:t>
-            </a:r>
-            <a:endParaRPr lang="en-US" sz="1150" dirty="0"/>
-          </a:p>
-        </p:txBody>
-      </p:sp>
-      <p:sp>
-        <p:nvSpPr>
-          <p:cNvPr id="8" name="Text 6"/>
-          <p:cNvSpPr/>
-          <p:nvPr/>
-        </p:nvSpPr>
-        <p:spPr>
-          <a:xfrm>
-            <a:off x="2240280" y="2039112"/>
-            <a:ext cx="1051560" cy="256032"/>
-          </a:xfrm>
-          <a:prstGeom prst="rect">
-            <a:avLst/>
-          </a:prstGeom>
-          <a:noFill/>
-          <a:ln/>
-        </p:spPr>
-        <p:txBody>
-          <a:bodyPr wrap="square" rtlCol="0" anchor="ctr"/>
-          <a:lstStyle/>
-          <a:p>
-            <a:pPr indent="0" marL="0">
-              <a:buNone/>
-            </a:pPr>
-            <a:r>
-              <a:rPr lang="en-US" sz="1000" dirty="0">
+              <a:t>Frota circulante: 2.840 motos</a:t>
+            </a:r>
+            <a:endParaRPr lang="en-US" sz="1400" dirty="0"/>
+          </a:p>
+        </p:txBody>
+      </p:sp>
+      <p:sp>
+        <p:nvSpPr>
+          <p:cNvPr id="9" name="Text 7"/>
+          <p:cNvSpPr/>
+          <p:nvPr/>
+        </p:nvSpPr>
+        <p:spPr>
+          <a:xfrm>
+            <a:off x="996696" y="2788920"/>
+            <a:ext cx="2971800" cy="1115568"/>
+          </a:xfrm>
+          <a:prstGeom prst="rect">
+            <a:avLst/>
+          </a:prstGeom>
+          <a:noFill/>
+          <a:ln/>
+        </p:spPr>
+        <p:txBody>
+          <a:bodyPr wrap="square" rtlCol="0" anchor="t">
+            <a:normAutofit/>
+          </a:bodyPr>
+          <a:lstStyle/>
+          <a:p>
+            <a:pPr indent="0" marL="0">
+              <a:lnSpc>
+                <a:spcPts val="1500"/>
+              </a:lnSpc>
+              <a:buNone/>
+            </a:pPr>
+            <a:r>
+              <a:rPr lang="en-US" sz="1100" dirty="0">
                 <a:solidFill>
                   <a:srgbClr val="4A5568"/>
                 </a:solidFill>
@@ -6631,48 +6590,9 @@
                 <a:ea typeface="Calibri" pitchFamily="34" charset="-122"/>
                 <a:cs typeface="Calibri" pitchFamily="34" charset="-120"/>
               </a:rPr>
-              <a:t>95–100%</a:t>
-            </a:r>
-            <a:endParaRPr lang="en-US" sz="1000" dirty="0"/>
-          </a:p>
-        </p:txBody>
-      </p:sp>
-      <p:sp>
-        <p:nvSpPr>
-          <p:cNvPr id="9" name="Text 7"/>
-          <p:cNvSpPr/>
-          <p:nvPr/>
-        </p:nvSpPr>
-        <p:spPr>
-          <a:xfrm>
-            <a:off x="3337560" y="2039112"/>
-            <a:ext cx="1463040" cy="256032"/>
-          </a:xfrm>
-          <a:prstGeom prst="rect">
-            <a:avLst/>
-          </a:prstGeom>
-          <a:noFill/>
-          <a:ln/>
-        </p:spPr>
-        <p:txBody>
-          <a:bodyPr wrap="square" rtlCol="0" anchor="ctr"/>
-          <a:lstStyle/>
-          <a:p>
-            <a:pPr indent="0" marL="0">
-              <a:buNone/>
-            </a:pPr>
-            <a:r>
-              <a:rPr lang="en-US" sz="1000" dirty="0">
-                <a:solidFill>
-                  <a:srgbClr val="4A5568"/>
-                </a:solidFill>
-                <a:latin typeface="Calibri" pitchFamily="34" charset="0"/>
-                <a:ea typeface="Calibri" pitchFamily="34" charset="-122"/>
-                <a:cs typeface="Calibri" pitchFamily="34" charset="-120"/>
-              </a:rPr>
-              <a:t>2,00% do liberado</a:t>
-            </a:r>
-            <a:endParaRPr lang="en-US" sz="1000" dirty="0"/>
+              <a:t>Só 618 com apólice ativa · 141 renovações no radar · +R$ 39 mil/ano fechando o gap de penetração (33,6% → 45%).</a:t>
+            </a:r>
+            <a:endParaRPr lang="en-US" sz="1100" dirty="0"/>
           </a:p>
         </p:txBody>
       </p:sp>
@@ -6684,12 +6604,12 @@
         </p:nvSpPr>
         <p:spPr>
           <a:xfrm>
-            <a:off x="777240" y="2487168"/>
-            <a:ext cx="4892040" cy="493776"/>
+            <a:off x="4389120" y="1965960"/>
+            <a:ext cx="3410712" cy="2103120"/>
           </a:xfrm>
           <a:prstGeom prst="roundRect">
             <a:avLst>
-              <a:gd name="adj" fmla="val 5556"/>
+              <a:gd name="adj" fmla="val 1304"/>
             </a:avLst>
           </a:prstGeom>
           <a:solidFill>
@@ -6706,24 +6626,67 @@
         </p:nvSpPr>
         <p:spPr>
           <a:xfrm>
-            <a:off x="960120" y="2596896"/>
-            <a:ext cx="1234440" cy="274320"/>
-          </a:xfrm>
-          <a:prstGeom prst="rect">
-            <a:avLst/>
-          </a:prstGeom>
-          <a:noFill/>
-          <a:ln/>
-        </p:spPr>
-        <p:txBody>
-          <a:bodyPr wrap="square" rtlCol="0" anchor="ctr"/>
-          <a:lstStyle/>
-          <a:p>
-            <a:pPr indent="0" marL="0">
-              <a:buNone/>
-            </a:pPr>
-            <a:r>
-              <a:rPr lang="en-US" sz="1150" b="1" dirty="0">
+            <a:off x="4608576" y="2167128"/>
+            <a:ext cx="2971800" cy="201168"/>
+          </a:xfrm>
+          <a:prstGeom prst="rect">
+            <a:avLst/>
+          </a:prstGeom>
+          <a:noFill/>
+          <a:ln/>
+        </p:spPr>
+        <p:txBody>
+          <a:bodyPr wrap="square" rtlCol="0" anchor="ctr">
+            <a:normAutofit/>
+          </a:bodyPr>
+          <a:lstStyle/>
+          <a:p>
+            <a:pPr indent="0" marL="0">
+              <a:buNone/>
+            </a:pPr>
+            <a:r>
+              <a:rPr lang="en-US" sz="950" b="1" spc="50" kern="0" dirty="0">
+                <a:solidFill>
+                  <a:srgbClr val="0365FE"/>
+                </a:solidFill>
+                <a:latin typeface="Calibri" pitchFamily="34" charset="0"/>
+                <a:ea typeface="Calibri" pitchFamily="34" charset="-122"/>
+                <a:cs typeface="Calibri" pitchFamily="34" charset="-120"/>
+              </a:rPr>
+              <a:t>CONSÓRCIO</a:t>
+            </a:r>
+            <a:endParaRPr lang="en-US" sz="950" dirty="0"/>
+          </a:p>
+        </p:txBody>
+      </p:sp>
+      <p:sp>
+        <p:nvSpPr>
+          <p:cNvPr id="12" name="Text 10"/>
+          <p:cNvSpPr/>
+          <p:nvPr/>
+        </p:nvSpPr>
+        <p:spPr>
+          <a:xfrm>
+            <a:off x="4608576" y="2423160"/>
+            <a:ext cx="2971800" cy="310896"/>
+          </a:xfrm>
+          <a:prstGeom prst="rect">
+            <a:avLst/>
+          </a:prstGeom>
+          <a:noFill/>
+          <a:ln/>
+        </p:spPr>
+        <p:txBody>
+          <a:bodyPr wrap="square" rtlCol="0" anchor="ctr">
+            <a:normAutofit/>
+          </a:bodyPr>
+          <a:lstStyle/>
+          <a:p>
+            <a:pPr indent="0" marL="0">
+              <a:buNone/>
+            </a:pPr>
+            <a:r>
+              <a:rPr lang="en-US" sz="1400" b="1" dirty="0">
                 <a:solidFill>
                   <a:srgbClr val="091426"/>
                 </a:solidFill>
@@ -6731,38 +6694,43 @@
                 <a:ea typeface="Calibri" pitchFamily="34" charset="-122"/>
                 <a:cs typeface="Calibri" pitchFamily="34" charset="-120"/>
               </a:rPr>
-              <a:t>Ouro</a:t>
-            </a:r>
-            <a:endParaRPr lang="en-US" sz="1150" dirty="0"/>
-          </a:p>
-        </p:txBody>
-      </p:sp>
-      <p:sp>
-        <p:nvSpPr>
-          <p:cNvPr id="12" name="Text 10"/>
-          <p:cNvSpPr/>
-          <p:nvPr/>
-        </p:nvSpPr>
-        <p:spPr>
-          <a:xfrm>
-            <a:off x="2240280" y="2606040"/>
-            <a:ext cx="1051560" cy="256032"/>
-          </a:xfrm>
-          <a:prstGeom prst="rect">
-            <a:avLst/>
-          </a:prstGeom>
-          <a:noFill/>
-          <a:ln/>
-        </p:spPr>
-        <p:txBody>
-          <a:bodyPr wrap="square" rtlCol="0" anchor="ctr"/>
-          <a:lstStyle/>
-          <a:p>
-            <a:pPr indent="0" marL="0">
-              <a:buNone/>
-            </a:pPr>
-            <a:r>
-              <a:rPr lang="en-US" sz="1000" dirty="0">
+              <a:t>Bônus Quality garantido</a:t>
+            </a:r>
+            <a:endParaRPr lang="en-US" sz="1400" dirty="0"/>
+          </a:p>
+        </p:txBody>
+      </p:sp>
+      <p:sp>
+        <p:nvSpPr>
+          <p:cNvPr id="13" name="Text 11"/>
+          <p:cNvSpPr/>
+          <p:nvPr/>
+        </p:nvSpPr>
+        <p:spPr>
+          <a:xfrm>
+            <a:off x="4608576" y="2788920"/>
+            <a:ext cx="2971800" cy="1115568"/>
+          </a:xfrm>
+          <a:prstGeom prst="rect">
+            <a:avLst/>
+          </a:prstGeom>
+          <a:noFill/>
+          <a:ln/>
+        </p:spPr>
+        <p:txBody>
+          <a:bodyPr wrap="square" rtlCol="0" anchor="t">
+            <a:normAutofit/>
+          </a:bodyPr>
+          <a:lstStyle/>
+          <a:p>
+            <a:pPr indent="0" marL="0">
+              <a:lnSpc>
+                <a:spcPts val="1500"/>
+              </a:lnSpc>
+              <a:buNone/>
+            </a:pPr>
+            <a:r>
+              <a:rPr lang="en-US" sz="1100" dirty="0">
                 <a:solidFill>
                   <a:srgbClr val="4A5568"/>
                 </a:solidFill>
@@ -6770,48 +6738,9 @@
                 <a:ea typeface="Calibri" pitchFamily="34" charset="-122"/>
                 <a:cs typeface="Calibri" pitchFamily="34" charset="-120"/>
               </a:rPr>
-              <a:t>85–94,9%</a:t>
-            </a:r>
-            <a:endParaRPr lang="en-US" sz="1000" dirty="0"/>
-          </a:p>
-        </p:txBody>
-      </p:sp>
-      <p:sp>
-        <p:nvSpPr>
-          <p:cNvPr id="13" name="Text 11"/>
-          <p:cNvSpPr/>
-          <p:nvPr/>
-        </p:nvSpPr>
-        <p:spPr>
-          <a:xfrm>
-            <a:off x="3337560" y="2606040"/>
-            <a:ext cx="1463040" cy="256032"/>
-          </a:xfrm>
-          <a:prstGeom prst="rect">
-            <a:avLst/>
-          </a:prstGeom>
-          <a:noFill/>
-          <a:ln/>
-        </p:spPr>
-        <p:txBody>
-          <a:bodyPr wrap="square" rtlCol="0" anchor="ctr"/>
-          <a:lstStyle/>
-          <a:p>
-            <a:pPr indent="0" marL="0">
-              <a:buNone/>
-            </a:pPr>
-            <a:r>
-              <a:rPr lang="en-US" sz="1000" dirty="0">
-                <a:solidFill>
-                  <a:srgbClr val="4A5568"/>
-                </a:solidFill>
-                <a:latin typeface="Calibri" pitchFamily="34" charset="0"/>
-                <a:ea typeface="Calibri" pitchFamily="34" charset="-122"/>
-                <a:cs typeface="Calibri" pitchFamily="34" charset="-120"/>
-              </a:rPr>
-              <a:t>1,50% do liberado</a:t>
-            </a:r>
-            <a:endParaRPr lang="en-US" sz="1000" dirty="0"/>
+              <a:t>486 cotas ativas (R$ 10,4 mi) · retenção 94,5% · adimplência 91,4% → R$ 11,8 mil no trimestre · contemplado avisado compra aqui (81%).</a:t>
+            </a:r>
+            <a:endParaRPr lang="en-US" sz="1100" dirty="0"/>
           </a:p>
         </p:txBody>
       </p:sp>
@@ -6823,12 +6752,12 @@
         </p:nvSpPr>
         <p:spPr>
           <a:xfrm>
-            <a:off x="777240" y="3054096"/>
-            <a:ext cx="4892040" cy="493776"/>
+            <a:off x="8001000" y="1965960"/>
+            <a:ext cx="3410712" cy="2103120"/>
           </a:xfrm>
           <a:prstGeom prst="roundRect">
             <a:avLst>
-              <a:gd name="adj" fmla="val 5556"/>
+              <a:gd name="adj" fmla="val 1304"/>
             </a:avLst>
           </a:prstGeom>
           <a:solidFill>
@@ -6845,264 +6774,8 @@
         </p:nvSpPr>
         <p:spPr>
           <a:xfrm>
-            <a:off x="960120" y="3163824"/>
-            <a:ext cx="1234440" cy="274320"/>
-          </a:xfrm>
-          <a:prstGeom prst="rect">
-            <a:avLst/>
-          </a:prstGeom>
-          <a:noFill/>
-          <a:ln/>
-        </p:spPr>
-        <p:txBody>
-          <a:bodyPr wrap="square" rtlCol="0" anchor="ctr"/>
-          <a:lstStyle/>
-          <a:p>
-            <a:pPr indent="0" marL="0">
-              <a:buNone/>
-            </a:pPr>
-            <a:r>
-              <a:rPr lang="en-US" sz="1150" b="1" dirty="0">
-                <a:solidFill>
-                  <a:srgbClr val="091426"/>
-                </a:solidFill>
-                <a:latin typeface="Calibri" pitchFamily="34" charset="0"/>
-                <a:ea typeface="Calibri" pitchFamily="34" charset="-122"/>
-                <a:cs typeface="Calibri" pitchFamily="34" charset="-120"/>
-              </a:rPr>
-              <a:t>Prata</a:t>
-            </a:r>
-            <a:endParaRPr lang="en-US" sz="1150" dirty="0"/>
-          </a:p>
-        </p:txBody>
-      </p:sp>
-      <p:sp>
-        <p:nvSpPr>
-          <p:cNvPr id="16" name="Text 14"/>
-          <p:cNvSpPr/>
-          <p:nvPr/>
-        </p:nvSpPr>
-        <p:spPr>
-          <a:xfrm>
-            <a:off x="2240280" y="3172968"/>
-            <a:ext cx="1051560" cy="256032"/>
-          </a:xfrm>
-          <a:prstGeom prst="rect">
-            <a:avLst/>
-          </a:prstGeom>
-          <a:noFill/>
-          <a:ln/>
-        </p:spPr>
-        <p:txBody>
-          <a:bodyPr wrap="square" rtlCol="0" anchor="ctr"/>
-          <a:lstStyle/>
-          <a:p>
-            <a:pPr indent="0" marL="0">
-              <a:buNone/>
-            </a:pPr>
-            <a:r>
-              <a:rPr lang="en-US" sz="1000" dirty="0">
-                <a:solidFill>
-                  <a:srgbClr val="4A5568"/>
-                </a:solidFill>
-                <a:latin typeface="Calibri" pitchFamily="34" charset="0"/>
-                <a:ea typeface="Calibri" pitchFamily="34" charset="-122"/>
-                <a:cs typeface="Calibri" pitchFamily="34" charset="-120"/>
-              </a:rPr>
-              <a:t>75–84,9%</a:t>
-            </a:r>
-            <a:endParaRPr lang="en-US" sz="1000" dirty="0"/>
-          </a:p>
-        </p:txBody>
-      </p:sp>
-      <p:sp>
-        <p:nvSpPr>
-          <p:cNvPr id="17" name="Text 15"/>
-          <p:cNvSpPr/>
-          <p:nvPr/>
-        </p:nvSpPr>
-        <p:spPr>
-          <a:xfrm>
-            <a:off x="3337560" y="3172968"/>
-            <a:ext cx="1463040" cy="256032"/>
-          </a:xfrm>
-          <a:prstGeom prst="rect">
-            <a:avLst/>
-          </a:prstGeom>
-          <a:noFill/>
-          <a:ln/>
-        </p:spPr>
-        <p:txBody>
-          <a:bodyPr wrap="square" rtlCol="0" anchor="ctr"/>
-          <a:lstStyle/>
-          <a:p>
-            <a:pPr indent="0" marL="0">
-              <a:buNone/>
-            </a:pPr>
-            <a:r>
-              <a:rPr lang="en-US" sz="1000" dirty="0">
-                <a:solidFill>
-                  <a:srgbClr val="4A5568"/>
-                </a:solidFill>
-                <a:latin typeface="Calibri" pitchFamily="34" charset="0"/>
-                <a:ea typeface="Calibri" pitchFamily="34" charset="-122"/>
-                <a:cs typeface="Calibri" pitchFamily="34" charset="-120"/>
-              </a:rPr>
-              <a:t>1,00% do liberado</a:t>
-            </a:r>
-            <a:endParaRPr lang="en-US" sz="1000" dirty="0"/>
-          </a:p>
-        </p:txBody>
-      </p:sp>
-      <p:sp>
-        <p:nvSpPr>
-          <p:cNvPr id="18" name="Shape 16"/>
-          <p:cNvSpPr/>
-          <p:nvPr/>
-        </p:nvSpPr>
-        <p:spPr>
-          <a:xfrm>
-            <a:off x="777240" y="3621024"/>
-            <a:ext cx="4892040" cy="493776"/>
-          </a:xfrm>
-          <a:prstGeom prst="roundRect">
-            <a:avLst>
-              <a:gd name="adj" fmla="val 5556"/>
-            </a:avLst>
-          </a:prstGeom>
-          <a:solidFill>
-            <a:srgbClr val="FCF3E3"/>
-          </a:solidFill>
-          <a:ln/>
-        </p:spPr>
-      </p:sp>
-      <p:sp>
-        <p:nvSpPr>
-          <p:cNvPr id="19" name="Text 17"/>
-          <p:cNvSpPr/>
-          <p:nvPr/>
-        </p:nvSpPr>
-        <p:spPr>
-          <a:xfrm>
-            <a:off x="960120" y="3730752"/>
-            <a:ext cx="1234440" cy="274320"/>
-          </a:xfrm>
-          <a:prstGeom prst="rect">
-            <a:avLst/>
-          </a:prstGeom>
-          <a:noFill/>
-          <a:ln/>
-        </p:spPr>
-        <p:txBody>
-          <a:bodyPr wrap="square" rtlCol="0" anchor="ctr"/>
-          <a:lstStyle/>
-          <a:p>
-            <a:pPr indent="0" marL="0">
-              <a:buNone/>
-            </a:pPr>
-            <a:r>
-              <a:rPr lang="en-US" sz="1150" b="1" dirty="0">
-                <a:solidFill>
-                  <a:srgbClr val="B7791F"/>
-                </a:solidFill>
-                <a:latin typeface="Calibri" pitchFamily="34" charset="0"/>
-                <a:ea typeface="Calibri" pitchFamily="34" charset="-122"/>
-                <a:cs typeface="Calibri" pitchFamily="34" charset="-120"/>
-              </a:rPr>
-              <a:t>Bronze</a:t>
-            </a:r>
-            <a:endParaRPr lang="en-US" sz="1150" dirty="0"/>
-          </a:p>
-        </p:txBody>
-      </p:sp>
-      <p:sp>
-        <p:nvSpPr>
-          <p:cNvPr id="20" name="Text 18"/>
-          <p:cNvSpPr/>
-          <p:nvPr/>
-        </p:nvSpPr>
-        <p:spPr>
-          <a:xfrm>
-            <a:off x="2240280" y="3739896"/>
-            <a:ext cx="1051560" cy="256032"/>
-          </a:xfrm>
-          <a:prstGeom prst="rect">
-            <a:avLst/>
-          </a:prstGeom>
-          <a:noFill/>
-          <a:ln/>
-        </p:spPr>
-        <p:txBody>
-          <a:bodyPr wrap="square" rtlCol="0" anchor="ctr"/>
-          <a:lstStyle/>
-          <a:p>
-            <a:pPr indent="0" marL="0">
-              <a:buNone/>
-            </a:pPr>
-            <a:r>
-              <a:rPr lang="en-US" sz="1000" dirty="0">
-                <a:solidFill>
-                  <a:srgbClr val="4A5568"/>
-                </a:solidFill>
-                <a:latin typeface="Calibri" pitchFamily="34" charset="0"/>
-                <a:ea typeface="Calibri" pitchFamily="34" charset="-122"/>
-                <a:cs typeface="Calibri" pitchFamily="34" charset="-120"/>
-              </a:rPr>
-              <a:t>60–74,9%</a:t>
-            </a:r>
-            <a:endParaRPr lang="en-US" sz="1000" dirty="0"/>
-          </a:p>
-        </p:txBody>
-      </p:sp>
-      <p:sp>
-        <p:nvSpPr>
-          <p:cNvPr id="21" name="Text 19"/>
-          <p:cNvSpPr/>
-          <p:nvPr/>
-        </p:nvSpPr>
-        <p:spPr>
-          <a:xfrm>
-            <a:off x="3337560" y="3739896"/>
-            <a:ext cx="1463040" cy="256032"/>
-          </a:xfrm>
-          <a:prstGeom prst="rect">
-            <a:avLst/>
-          </a:prstGeom>
-          <a:noFill/>
-          <a:ln/>
-        </p:spPr>
-        <p:txBody>
-          <a:bodyPr wrap="square" rtlCol="0" anchor="ctr"/>
-          <a:lstStyle/>
-          <a:p>
-            <a:pPr indent="0" marL="0">
-              <a:buNone/>
-            </a:pPr>
-            <a:r>
-              <a:rPr lang="en-US" sz="1000" dirty="0">
-                <a:solidFill>
-                  <a:srgbClr val="4A5568"/>
-                </a:solidFill>
-                <a:latin typeface="Calibri" pitchFamily="34" charset="0"/>
-                <a:ea typeface="Calibri" pitchFamily="34" charset="-122"/>
-                <a:cs typeface="Calibri" pitchFamily="34" charset="-120"/>
-              </a:rPr>
-              <a:t>0,50% do liberado</a:t>
-            </a:r>
-            <a:endParaRPr lang="en-US" sz="1000" dirty="0"/>
-          </a:p>
-        </p:txBody>
-      </p:sp>
-      <p:sp>
-        <p:nvSpPr>
-          <p:cNvPr id="22" name="Text 20"/>
-          <p:cNvSpPr/>
-          <p:nvPr/>
-        </p:nvSpPr>
-        <p:spPr>
-          <a:xfrm>
-            <a:off x="4480560" y="3739896"/>
-            <a:ext cx="1143000" cy="256032"/>
+            <a:off x="8220456" y="2167128"/>
+            <a:ext cx="2971800" cy="201168"/>
           </a:xfrm>
           <a:prstGeom prst="rect">
             <a:avLst/>
@@ -7120,91 +6793,30 @@
               <a:buNone/>
             </a:pPr>
             <a:r>
-              <a:rPr lang="en-US" sz="850" b="1" dirty="0">
-                <a:solidFill>
-                  <a:srgbClr val="B7791F"/>
-                </a:solidFill>
-                <a:latin typeface="Calibri" pitchFamily="34" charset="0"/>
-                <a:ea typeface="Calibri" pitchFamily="34" charset="-122"/>
-                <a:cs typeface="Calibri" pitchFamily="34" charset="-120"/>
-              </a:rPr>
-              <a:t>← Nippon hoje (71,6%)</a:t>
-            </a:r>
-            <a:endParaRPr lang="en-US" sz="850" dirty="0"/>
-          </a:p>
-        </p:txBody>
-      </p:sp>
-      <p:sp>
-        <p:nvSpPr>
-          <p:cNvPr id="23" name="Shape 21"/>
-          <p:cNvSpPr/>
-          <p:nvPr/>
-        </p:nvSpPr>
-        <p:spPr>
-          <a:xfrm>
-            <a:off x="777240" y="4343400"/>
-            <a:ext cx="4892040" cy="1554480"/>
-          </a:xfrm>
-          <a:prstGeom prst="roundRect">
-            <a:avLst>
-              <a:gd name="adj" fmla="val 1765"/>
-            </a:avLst>
-          </a:prstGeom>
-          <a:solidFill>
-            <a:srgbClr val="E7F6EE"/>
-          </a:solidFill>
-          <a:ln/>
-        </p:spPr>
-      </p:sp>
-      <p:sp>
-        <p:nvSpPr>
-          <p:cNvPr id="24" name="Text 22"/>
-          <p:cNvSpPr/>
-          <p:nvPr/>
-        </p:nvSpPr>
-        <p:spPr>
-          <a:xfrm>
-            <a:off x="978408" y="4498848"/>
-            <a:ext cx="4480560" cy="274320"/>
-          </a:xfrm>
-          <a:prstGeom prst="rect">
-            <a:avLst/>
-          </a:prstGeom>
-          <a:noFill/>
-          <a:ln/>
-        </p:spPr>
-        <p:txBody>
-          <a:bodyPr wrap="square" rtlCol="0" anchor="ctr"/>
-          <a:lstStyle/>
-          <a:p>
-            <a:pPr indent="0" marL="0">
-              <a:buNone/>
-            </a:pPr>
-            <a:r>
-              <a:rPr lang="en-US" sz="1250" b="1" dirty="0">
-                <a:solidFill>
-                  <a:srgbClr val="091426"/>
-                </a:solidFill>
-                <a:latin typeface="Calibri" pitchFamily="34" charset="0"/>
-                <a:ea typeface="Calibri" pitchFamily="34" charset="-122"/>
-                <a:cs typeface="Calibri" pitchFamily="34" charset="-120"/>
-              </a:rPr>
-              <a:t>Subir para Ouro vale ~R$ 148 mil/ano</a:t>
-            </a:r>
-            <a:endParaRPr lang="en-US" sz="1250" dirty="0"/>
-          </a:p>
-        </p:txBody>
-      </p:sp>
-      <p:sp>
-        <p:nvSpPr>
-          <p:cNvPr id="25" name="Text 23"/>
-          <p:cNvSpPr/>
-          <p:nvPr/>
-        </p:nvSpPr>
-        <p:spPr>
-          <a:xfrm>
-            <a:off x="978408" y="4791456"/>
-            <a:ext cx="4480560" cy="1005840"/>
+              <a:rPr lang="en-US" sz="950" b="1" spc="50" kern="0" dirty="0">
+                <a:solidFill>
+                  <a:srgbClr val="0365FE"/>
+                </a:solidFill>
+                <a:latin typeface="Calibri" pitchFamily="34" charset="0"/>
+                <a:ea typeface="Calibri" pitchFamily="34" charset="-122"/>
+                <a:cs typeface="Calibri" pitchFamily="34" charset="-120"/>
+              </a:rPr>
+              <a:t>VOZ DO CLIENTE</a:t>
+            </a:r>
+            <a:endParaRPr lang="en-US" sz="950" dirty="0"/>
+          </a:p>
+        </p:txBody>
+      </p:sp>
+      <p:sp>
+        <p:nvSpPr>
+          <p:cNvPr id="16" name="Text 14"/>
+          <p:cNvSpPr/>
+          <p:nvPr/>
+        </p:nvSpPr>
+        <p:spPr>
+          <a:xfrm>
+            <a:off x="8220456" y="2423160"/>
+            <a:ext cx="2971800" cy="310896"/>
           </a:xfrm>
           <a:prstGeom prst="rect">
             <a:avLst/>
@@ -7219,13 +6831,54 @@
           <a:lstStyle/>
           <a:p>
             <a:pPr indent="0" marL="0">
+              <a:buNone/>
+            </a:pPr>
+            <a:r>
+              <a:rPr lang="en-US" sz="1400" b="1" dirty="0">
+                <a:solidFill>
+                  <a:srgbClr val="091426"/>
+                </a:solidFill>
+                <a:latin typeface="Calibri" pitchFamily="34" charset="0"/>
+                <a:ea typeface="Calibri" pitchFamily="34" charset="-122"/>
+                <a:cs typeface="Calibri" pitchFamily="34" charset="-120"/>
+              </a:rPr>
+              <a:t>Pesquisa: 32 clientes reais</a:t>
+            </a:r>
+            <a:endParaRPr lang="en-US" sz="1400" dirty="0"/>
+          </a:p>
+        </p:txBody>
+      </p:sp>
+      <p:sp>
+        <p:nvSpPr>
+          <p:cNvPr id="17" name="Text 15"/>
+          <p:cNvSpPr/>
+          <p:nvPr/>
+        </p:nvSpPr>
+        <p:spPr>
+          <a:xfrm>
+            <a:off x="8220456" y="2788920"/>
+            <a:ext cx="2971800" cy="1115568"/>
+          </a:xfrm>
+          <a:prstGeom prst="rect">
+            <a:avLst/>
+          </a:prstGeom>
+          <a:noFill/>
+          <a:ln/>
+        </p:spPr>
+        <p:txBody>
+          <a:bodyPr wrap="square" rtlCol="0" anchor="t">
+            <a:normAutofit/>
+          </a:bodyPr>
+          <a:lstStyle/>
+          <a:p>
+            <a:pPr indent="0" marL="0">
               <a:lnSpc>
-                <a:spcPts val="1400"/>
+                <a:spcPts val="1500"/>
               </a:lnSpc>
               <a:buNone/>
             </a:pPr>
             <a:r>
-              <a:rPr lang="en-US" sz="1000" dirty="0">
+              <a:rPr lang="en-US" sz="1100" dirty="0">
                 <a:solidFill>
                   <a:srgbClr val="4A5568"/>
                 </a:solidFill>
@@ -7233,208 +6886,116 @@
                 <a:ea typeface="Calibri" pitchFamily="34" charset="-122"/>
                 <a:cs typeface="Calibri" pitchFamily="34" charset="-120"/>
               </a:rPr>
-              <a:t>Sem vender uma moto a mais: toda venda financiada submetida primeiro ao BYMD e nenhuma proposta aprovada fugindo para outro banco. O sistema alerta cada fuga e simula o ganho.</a:t>
-            </a:r>
-            <a:endParaRPr lang="en-US" sz="1000" dirty="0"/>
-          </a:p>
-        </p:txBody>
-      </p:sp>
-      <p:sp>
-        <p:nvSpPr>
-          <p:cNvPr id="26" name="Shape 24"/>
-          <p:cNvSpPr/>
-          <p:nvPr/>
-        </p:nvSpPr>
-        <p:spPr>
-          <a:xfrm>
-            <a:off x="6035040" y="1965960"/>
-            <a:ext cx="5468112" cy="3521012"/>
+              <a:t>Decide a compra: parcela 72% · rapidez 66% · crédito 56%. Satisfação 3,6 → 4,5 antes × depois do piloto. NPS 72.</a:t>
+            </a:r>
+            <a:endParaRPr lang="en-US" sz="1100" dirty="0"/>
+          </a:p>
+        </p:txBody>
+      </p:sp>
+      <p:sp>
+        <p:nvSpPr>
+          <p:cNvPr id="18" name="Shape 16"/>
+          <p:cNvSpPr/>
+          <p:nvPr/>
+        </p:nvSpPr>
+        <p:spPr>
+          <a:xfrm>
+            <a:off x="777240" y="4434840"/>
+            <a:ext cx="10634472" cy="1097280"/>
           </a:xfrm>
           <a:prstGeom prst="roundRect">
             <a:avLst>
-              <a:gd name="adj" fmla="val 1818"/>
+              <a:gd name="adj" fmla="val 2500"/>
             </a:avLst>
           </a:prstGeom>
           <a:solidFill>
-            <a:srgbClr val="0E1D36"/>
+            <a:srgbClr val="EEF4FF"/>
           </a:solidFill>
-          <a:ln w="9525">
-            <a:solidFill>
-              <a:srgbClr val="22304A"/>
-            </a:solidFill>
-            <a:prstDash val="solid"/>
-          </a:ln>
-          <a:effectLst>
-            <a:outerShdw sx="100000" sy="100000" kx="0" ky="0" algn="bl" rotWithShape="0" blurRad="177800" dist="63500" dir="5400000">
-              <a:srgbClr val="0A1220">
-                <a:alpha val="50000"/>
-              </a:srgbClr>
-            </a:outerShdw>
-          </a:effectLst>
-        </p:spPr>
-      </p:sp>
-      <p:sp>
-        <p:nvSpPr>
-          <p:cNvPr id="27" name="Shape 25"/>
-          <p:cNvSpPr/>
-          <p:nvPr/>
-        </p:nvSpPr>
-        <p:spPr>
-          <a:xfrm>
-            <a:off x="6181344" y="2057400"/>
-            <a:ext cx="91440" cy="91440"/>
-          </a:xfrm>
-          <a:prstGeom prst="ellipse">
-            <a:avLst/>
-          </a:prstGeom>
-          <a:solidFill>
-            <a:srgbClr val="FF5F57"/>
-          </a:solidFill>
-          <a:ln/>
-        </p:spPr>
-      </p:sp>
-      <p:sp>
-        <p:nvSpPr>
-          <p:cNvPr id="28" name="Shape 26"/>
-          <p:cNvSpPr/>
-          <p:nvPr/>
-        </p:nvSpPr>
-        <p:spPr>
-          <a:xfrm>
-            <a:off x="6336792" y="2057400"/>
-            <a:ext cx="91440" cy="91440"/>
-          </a:xfrm>
-          <a:prstGeom prst="ellipse">
-            <a:avLst/>
-          </a:prstGeom>
-          <a:solidFill>
-            <a:srgbClr val="FFBD2E"/>
-          </a:solidFill>
-          <a:ln/>
-        </p:spPr>
-      </p:sp>
-      <p:sp>
-        <p:nvSpPr>
-          <p:cNvPr id="29" name="Shape 27"/>
-          <p:cNvSpPr/>
-          <p:nvPr/>
-        </p:nvSpPr>
-        <p:spPr>
-          <a:xfrm>
-            <a:off x="6492240" y="2057400"/>
-            <a:ext cx="91440" cy="91440"/>
-          </a:xfrm>
-          <a:prstGeom prst="ellipse">
-            <a:avLst/>
-          </a:prstGeom>
-          <a:solidFill>
-            <a:srgbClr val="28C840"/>
-          </a:solidFill>
-          <a:ln/>
-        </p:spPr>
-      </p:sp>
-      <p:sp>
-        <p:nvSpPr>
-          <p:cNvPr id="30" name="Text 28"/>
-          <p:cNvSpPr/>
-          <p:nvPr/>
-        </p:nvSpPr>
-        <p:spPr>
-          <a:xfrm>
-            <a:off x="7397496" y="1993392"/>
-            <a:ext cx="2743200" cy="219456"/>
-          </a:xfrm>
-          <a:prstGeom prst="rect">
-            <a:avLst/>
-          </a:prstGeom>
-          <a:noFill/>
-          <a:ln/>
-        </p:spPr>
-        <p:txBody>
-          <a:bodyPr wrap="square" rtlCol="0" anchor="ctr"/>
-          <a:lstStyle/>
-          <a:p>
-            <a:pPr algn="ctr" indent="0" marL="0">
-              <a:buNone/>
-            </a:pPr>
-            <a:r>
-              <a:rPr lang="en-US" sz="800" dirty="0">
-                <a:solidFill>
-                  <a:srgbClr val="8FA3BD"/>
-                </a:solidFill>
-                <a:latin typeface="Calibri" pitchFamily="34" charset="0"/>
-                <a:ea typeface="Calibri" pitchFamily="34" charset="-122"/>
-                <a:cs typeface="Calibri" pitchFamily="34" charset="-120"/>
-              </a:rPr>
-              <a:t>smart-dealer.vercel.app</a:t>
-            </a:r>
-            <a:endParaRPr lang="en-US" sz="800" dirty="0"/>
-          </a:p>
-        </p:txBody>
-      </p:sp>
-      <p:pic>
-        <p:nvPicPr>
-          <p:cNvPr id="31" name="Image 0" descr="_NOVAS MELHORIAS/deck-assets/premya.png">    </p:cNvPr>
-          <p:cNvPicPr>
-            <a:picLocks noChangeAspect="1"/>
-          </p:cNvPicPr>
-          <p:nvPr/>
-        </p:nvPicPr>
-        <p:blipFill>
-          <a:blip r:embed="rId1"/>
-          <a:stretch>
-            <a:fillRect/>
-          </a:stretch>
-        </p:blipFill>
-        <p:spPr>
-          <a:xfrm>
-            <a:off x="6071616" y="2240280"/>
-            <a:ext cx="5394960" cy="3210116"/>
-          </a:xfrm>
-          <a:prstGeom prst="rect">
-            <a:avLst/>
-          </a:prstGeom>
-        </p:spPr>
-      </p:pic>
-      <p:sp>
-        <p:nvSpPr>
-          <p:cNvPr id="32" name="Text 29"/>
-          <p:cNvSpPr/>
-          <p:nvPr/>
-        </p:nvSpPr>
-        <p:spPr>
-          <a:xfrm>
-            <a:off x="6035040" y="5577840"/>
-            <a:ext cx="5468112" cy="457200"/>
-          </a:xfrm>
-          <a:prstGeom prst="rect">
-            <a:avLst/>
-          </a:prstGeom>
-          <a:noFill/>
-          <a:ln/>
-        </p:spPr>
-        <p:txBody>
-          <a:bodyPr wrap="square" rtlCol="0" anchor="ctr"/>
+          <a:ln/>
+        </p:spPr>
+      </p:sp>
+      <p:sp>
+        <p:nvSpPr>
+          <p:cNvPr id="19" name="Text 17"/>
+          <p:cNvSpPr/>
+          <p:nvPr/>
+        </p:nvSpPr>
+        <p:spPr>
+          <a:xfrm>
+            <a:off x="1051560" y="4581144"/>
+            <a:ext cx="10085832" cy="274320"/>
+          </a:xfrm>
+          <a:prstGeom prst="rect">
+            <a:avLst/>
+          </a:prstGeom>
+          <a:noFill/>
+          <a:ln/>
+        </p:spPr>
+        <p:txBody>
+          <a:bodyPr wrap="square" rtlCol="0" anchor="ctr">
+            <a:normAutofit/>
+          </a:bodyPr>
+          <a:lstStyle/>
+          <a:p>
+            <a:pPr indent="0" marL="0">
+              <a:buNone/>
+            </a:pPr>
+            <a:r>
+              <a:rPr lang="en-US" sz="1350" b="1" dirty="0">
+                <a:solidFill>
+                  <a:srgbClr val="091426"/>
+                </a:solidFill>
+                <a:latin typeface="Calibri" pitchFamily="34" charset="0"/>
+                <a:ea typeface="Calibri" pitchFamily="34" charset="-122"/>
+                <a:cs typeface="Calibri" pitchFamily="34" charset="-120"/>
+              </a:rPr>
+              <a:t>"Meu crédito não passou e ninguém mais me procurou. Se tivessem uma segunda opção eu tinha fechado."</a:t>
+            </a:r>
+            <a:endParaRPr lang="en-US" sz="1350" dirty="0"/>
+          </a:p>
+        </p:txBody>
+      </p:sp>
+      <p:sp>
+        <p:nvSpPr>
+          <p:cNvPr id="20" name="Text 18"/>
+          <p:cNvSpPr/>
+          <p:nvPr/>
+        </p:nvSpPr>
+        <p:spPr>
+          <a:xfrm>
+            <a:off x="1051560" y="4892040"/>
+            <a:ext cx="10085832" cy="530352"/>
+          </a:xfrm>
+          <a:prstGeom prst="rect">
+            <a:avLst/>
+          </a:prstGeom>
+          <a:noFill/>
+          <a:ln/>
+        </p:spPr>
+        <p:txBody>
+          <a:bodyPr wrap="square" rtlCol="0" anchor="t">
+            <a:normAutofit/>
+          </a:bodyPr>
           <a:lstStyle/>
           <a:p>
             <a:pPr indent="0" marL="0">
               <a:lnSpc>
-                <a:spcPts val="1300"/>
+                <a:spcPts val="1600"/>
               </a:lnSpc>
               <a:buNone/>
             </a:pPr>
             <a:r>
-              <a:rPr lang="en-US" sz="950" dirty="0">
-                <a:solidFill>
-                  <a:srgbClr val="8A96A8"/>
-                </a:solidFill>
-                <a:latin typeface="Calibri" pitchFamily="34" charset="0"/>
-                <a:ea typeface="Calibri" pitchFamily="34" charset="-122"/>
-                <a:cs typeface="Calibri" pitchFamily="34" charset="-120"/>
-              </a:rPr>
-              <a:t>Simulador interativo: mexa nos números e veja a categoria — e os reais — mudarem na hora.</a:t>
-            </a:r>
-            <a:endParaRPr lang="en-US" sz="950" dirty="0"/>
+              <a:rPr lang="en-US" sz="1150" dirty="0">
+                <a:solidFill>
+                  <a:srgbClr val="4A5568"/>
+                </a:solidFill>
+                <a:latin typeface="Calibri" pitchFamily="34" charset="0"/>
+                <a:ea typeface="Calibri" pitchFamily="34" charset="-122"/>
+                <a:cs typeface="Calibri" pitchFamily="34" charset="-120"/>
+              </a:rPr>
+              <a:t>J. Vitor, cliente que não comprou — 43% das vendas perdidas travaram no crédito. É exatamente o público que o Liberacred devolve à mesa.</a:t>
+            </a:r>
+            <a:endParaRPr lang="en-US" sz="1150" dirty="0"/>
           </a:p>
         </p:txBody>
       </p:sp>
@@ -7503,7 +7064,7 @@
                 <a:ea typeface="Calibri" pitchFamily="34" charset="-122"/>
                 <a:cs typeface="Calibri" pitchFamily="34" charset="-120"/>
               </a:rPr>
-              <a:t>A INTELIGÊNCIA EM AÇÃO</a:t>
+              <a:t>ARQUITETURA</a:t>
             </a:r>
             <a:endParaRPr lang="en-US" sz="1100" dirty="0"/>
           </a:p>
@@ -7544,7 +7105,7 @@
                 <a:ea typeface="Calibri" pitchFamily="34" charset="-122"/>
                 <a:cs typeface="Calibri" pitchFamily="34" charset="-120"/>
               </a:rPr>
-              <a:t>Seguros, Consórcio e a voz do cliente</a:t>
+              <a:t>Quatro pilares sustentam a plataforma</a:t>
             </a:r>
             <a:endParaRPr lang="en-US" sz="3000" dirty="0"/>
           </a:p>
@@ -7558,8 +7119,69 @@
         </p:nvSpPr>
         <p:spPr>
           <a:xfrm>
-            <a:off x="777240" y="1444752"/>
-            <a:ext cx="10634472" cy="292608"/>
+            <a:off x="10954512" y="6446520"/>
+            <a:ext cx="457200" cy="274320"/>
+          </a:xfrm>
+          <a:prstGeom prst="rect">
+            <a:avLst/>
+          </a:prstGeom>
+          <a:noFill/>
+          <a:ln/>
+        </p:spPr>
+        <p:txBody>
+          <a:bodyPr wrap="square" rtlCol="0" anchor="ctr"/>
+          <a:lstStyle/>
+          <a:p>
+            <a:pPr algn="r" indent="0" marL="0">
+              <a:buNone/>
+            </a:pPr>
+            <a:r>
+              <a:rPr lang="en-US" sz="1000" b="1" dirty="0">
+                <a:solidFill>
+                  <a:srgbClr val="C3D6F0"/>
+                </a:solidFill>
+                <a:latin typeface="Calibri" pitchFamily="34" charset="0"/>
+                <a:ea typeface="Calibri" pitchFamily="34" charset="-122"/>
+                <a:cs typeface="Calibri" pitchFamily="34" charset="-120"/>
+              </a:rPr>
+              <a:t>13</a:t>
+            </a:r>
+            <a:endParaRPr lang="en-US" sz="1000" dirty="0"/>
+          </a:p>
+        </p:txBody>
+      </p:sp>
+      <p:sp>
+        <p:nvSpPr>
+          <p:cNvPr id="5" name="Shape 3"/>
+          <p:cNvSpPr/>
+          <p:nvPr/>
+        </p:nvSpPr>
+        <p:spPr>
+          <a:xfrm>
+            <a:off x="777240" y="1920240"/>
+            <a:ext cx="2507742" cy="1828800"/>
+          </a:xfrm>
+          <a:prstGeom prst="roundRect">
+            <a:avLst>
+              <a:gd name="adj" fmla="val 1500"/>
+            </a:avLst>
+          </a:prstGeom>
+          <a:solidFill>
+            <a:srgbClr val="F7F9FC"/>
+          </a:solidFill>
+          <a:ln/>
+        </p:spPr>
+      </p:sp>
+      <p:sp>
+        <p:nvSpPr>
+          <p:cNvPr id="6" name="Text 4"/>
+          <p:cNvSpPr/>
+          <p:nvPr/>
+        </p:nvSpPr>
+        <p:spPr>
+          <a:xfrm>
+            <a:off x="996696" y="2121408"/>
+            <a:ext cx="2068830" cy="201168"/>
           </a:xfrm>
           <a:prstGeom prst="rect">
             <a:avLst/>
@@ -7577,7 +7199,92 @@
               <a:buNone/>
             </a:pPr>
             <a:r>
-              <a:rPr lang="en-US" sz="1350" dirty="0">
+              <a:rPr lang="en-US" sz="950" b="1" spc="50" kern="0" dirty="0">
+                <a:solidFill>
+                  <a:srgbClr val="0365FE"/>
+                </a:solidFill>
+                <a:latin typeface="Calibri" pitchFamily="34" charset="0"/>
+                <a:ea typeface="Calibri" pitchFamily="34" charset="-122"/>
+                <a:cs typeface="Calibri" pitchFamily="34" charset="-120"/>
+              </a:rPr>
+              <a:t>01</a:t>
+            </a:r>
+            <a:endParaRPr lang="en-US" sz="950" dirty="0"/>
+          </a:p>
+        </p:txBody>
+      </p:sp>
+      <p:sp>
+        <p:nvSpPr>
+          <p:cNvPr id="7" name="Text 5"/>
+          <p:cNvSpPr/>
+          <p:nvPr/>
+        </p:nvSpPr>
+        <p:spPr>
+          <a:xfrm>
+            <a:off x="996696" y="2377440"/>
+            <a:ext cx="2068830" cy="310896"/>
+          </a:xfrm>
+          <a:prstGeom prst="rect">
+            <a:avLst/>
+          </a:prstGeom>
+          <a:noFill/>
+          <a:ln/>
+        </p:spPr>
+        <p:txBody>
+          <a:bodyPr wrap="square" rtlCol="0" anchor="ctr">
+            <a:normAutofit/>
+          </a:bodyPr>
+          <a:lstStyle/>
+          <a:p>
+            <a:pPr indent="0" marL="0">
+              <a:buNone/>
+            </a:pPr>
+            <a:r>
+              <a:rPr lang="en-US" sz="1400" b="1" dirty="0">
+                <a:solidFill>
+                  <a:srgbClr val="091426"/>
+                </a:solidFill>
+                <a:latin typeface="Calibri" pitchFamily="34" charset="0"/>
+                <a:ea typeface="Calibri" pitchFamily="34" charset="-122"/>
+                <a:cs typeface="Calibri" pitchFamily="34" charset="-120"/>
+              </a:rPr>
+              <a:t>Plataforma Inteligente</a:t>
+            </a:r>
+            <a:endParaRPr lang="en-US" sz="1400" dirty="0"/>
+          </a:p>
+        </p:txBody>
+      </p:sp>
+      <p:sp>
+        <p:nvSpPr>
+          <p:cNvPr id="8" name="Text 6"/>
+          <p:cNvSpPr/>
+          <p:nvPr/>
+        </p:nvSpPr>
+        <p:spPr>
+          <a:xfrm>
+            <a:off x="996696" y="2743200"/>
+            <a:ext cx="2068830" cy="841248"/>
+          </a:xfrm>
+          <a:prstGeom prst="rect">
+            <a:avLst/>
+          </a:prstGeom>
+          <a:noFill/>
+          <a:ln/>
+        </p:spPr>
+        <p:txBody>
+          <a:bodyPr wrap="square" rtlCol="0" anchor="t">
+            <a:normAutofit/>
+          </a:bodyPr>
+          <a:lstStyle/>
+          <a:p>
+            <a:pPr indent="0" marL="0">
+              <a:lnSpc>
+                <a:spcPts val="1500"/>
+              </a:lnSpc>
+              <a:buNone/>
+            </a:pPr>
+            <a:r>
+              <a:rPr lang="en-US" sz="1100" dirty="0">
                 <a:solidFill>
                   <a:srgbClr val="4A5568"/>
                 </a:solidFill>
@@ -7585,65 +7292,26 @@
                 <a:ea typeface="Calibri" pitchFamily="34" charset="-122"/>
                 <a:cs typeface="Calibri" pitchFamily="34" charset="-120"/>
               </a:rPr>
-              <a:t>Receita recorrente que já é da casa — e a pesquisa que diz onde o cliente decide.</a:t>
-            </a:r>
-            <a:endParaRPr lang="en-US" sz="1350" dirty="0"/>
-          </a:p>
-        </p:txBody>
-      </p:sp>
-      <p:sp>
-        <p:nvSpPr>
-          <p:cNvPr id="5" name="Text 3"/>
-          <p:cNvSpPr/>
-          <p:nvPr/>
-        </p:nvSpPr>
-        <p:spPr>
-          <a:xfrm>
-            <a:off x="10954512" y="6446520"/>
-            <a:ext cx="457200" cy="274320"/>
-          </a:xfrm>
-          <a:prstGeom prst="rect">
-            <a:avLst/>
-          </a:prstGeom>
-          <a:noFill/>
-          <a:ln/>
-        </p:spPr>
-        <p:txBody>
-          <a:bodyPr wrap="square" rtlCol="0" anchor="ctr"/>
-          <a:lstStyle/>
-          <a:p>
-            <a:pPr algn="r" indent="0" marL="0">
-              <a:buNone/>
-            </a:pPr>
-            <a:r>
-              <a:rPr lang="en-US" sz="1000" b="1" dirty="0">
-                <a:solidFill>
-                  <a:srgbClr val="C3D6F0"/>
-                </a:solidFill>
-                <a:latin typeface="Calibri" pitchFamily="34" charset="0"/>
-                <a:ea typeface="Calibri" pitchFamily="34" charset="-122"/>
-                <a:cs typeface="Calibri" pitchFamily="34" charset="-120"/>
-              </a:rPr>
-              <a:t>13</a:t>
-            </a:r>
-            <a:endParaRPr lang="en-US" sz="1000" dirty="0"/>
-          </a:p>
-        </p:txBody>
-      </p:sp>
-      <p:sp>
-        <p:nvSpPr>
-          <p:cNvPr id="6" name="Shape 4"/>
-          <p:cNvSpPr/>
-          <p:nvPr/>
-        </p:nvSpPr>
-        <p:spPr>
-          <a:xfrm>
-            <a:off x="777240" y="1965960"/>
-            <a:ext cx="3410712" cy="2103120"/>
+              <a:t>Painel unificado integrando todas as áreas da concessionária</a:t>
+            </a:r>
+            <a:endParaRPr lang="en-US" sz="1100" dirty="0"/>
+          </a:p>
+        </p:txBody>
+      </p:sp>
+      <p:sp>
+        <p:nvSpPr>
+          <p:cNvPr id="9" name="Shape 7"/>
+          <p:cNvSpPr/>
+          <p:nvPr/>
+        </p:nvSpPr>
+        <p:spPr>
+          <a:xfrm>
+            <a:off x="3486150" y="1920240"/>
+            <a:ext cx="2507742" cy="1828800"/>
           </a:xfrm>
           <a:prstGeom prst="roundRect">
             <a:avLst>
-              <a:gd name="adj" fmla="val 1304"/>
+              <a:gd name="adj" fmla="val 1500"/>
             </a:avLst>
           </a:prstGeom>
           <a:solidFill>
@@ -7654,14 +7322,14 @@
       </p:sp>
       <p:sp>
         <p:nvSpPr>
-          <p:cNvPr id="7" name="Text 5"/>
-          <p:cNvSpPr/>
-          <p:nvPr/>
-        </p:nvSpPr>
-        <p:spPr>
-          <a:xfrm>
-            <a:off x="996696" y="2167128"/>
-            <a:ext cx="2971800" cy="201168"/>
+          <p:cNvPr id="10" name="Text 8"/>
+          <p:cNvSpPr/>
+          <p:nvPr/>
+        </p:nvSpPr>
+        <p:spPr>
+          <a:xfrm>
+            <a:off x="3705606" y="2121408"/>
+            <a:ext cx="2068830" cy="201168"/>
           </a:xfrm>
           <a:prstGeom prst="rect">
             <a:avLst/>
@@ -7687,7 +7355,7 @@
                 <a:ea typeface="Calibri" pitchFamily="34" charset="-122"/>
                 <a:cs typeface="Calibri" pitchFamily="34" charset="-120"/>
               </a:rPr>
-              <a:t>YAMAHA SEGUROS</a:t>
+              <a:t>02</a:t>
             </a:r>
             <a:endParaRPr lang="en-US" sz="950" dirty="0"/>
           </a:p>
@@ -7695,14 +7363,14 @@
       </p:sp>
       <p:sp>
         <p:nvSpPr>
-          <p:cNvPr id="8" name="Text 6"/>
-          <p:cNvSpPr/>
-          <p:nvPr/>
-        </p:nvSpPr>
-        <p:spPr>
-          <a:xfrm>
-            <a:off x="996696" y="2423160"/>
-            <a:ext cx="2971800" cy="310896"/>
+          <p:cNvPr id="11" name="Text 9"/>
+          <p:cNvSpPr/>
+          <p:nvPr/>
+        </p:nvSpPr>
+        <p:spPr>
+          <a:xfrm>
+            <a:off x="3705606" y="2377440"/>
+            <a:ext cx="2068830" cy="310896"/>
           </a:xfrm>
           <a:prstGeom prst="rect">
             <a:avLst/>
@@ -7728,7 +7396,7 @@
                 <a:ea typeface="Calibri" pitchFamily="34" charset="-122"/>
                 <a:cs typeface="Calibri" pitchFamily="34" charset="-120"/>
               </a:rPr>
-              <a:t>Frota circulante: 2.840 motos</a:t>
+              <a:t>IA Analítica</a:t>
             </a:r>
             <a:endParaRPr lang="en-US" sz="1400" dirty="0"/>
           </a:p>
@@ -7736,14 +7404,14 @@
       </p:sp>
       <p:sp>
         <p:nvSpPr>
-          <p:cNvPr id="9" name="Text 7"/>
-          <p:cNvSpPr/>
-          <p:nvPr/>
-        </p:nvSpPr>
-        <p:spPr>
-          <a:xfrm>
-            <a:off x="996696" y="2788920"/>
-            <a:ext cx="2971800" cy="1115568"/>
+          <p:cNvPr id="12" name="Text 10"/>
+          <p:cNvSpPr/>
+          <p:nvPr/>
+        </p:nvSpPr>
+        <p:spPr>
+          <a:xfrm>
+            <a:off x="3705606" y="2743200"/>
+            <a:ext cx="2068830" cy="841248"/>
           </a:xfrm>
           <a:prstGeom prst="rect">
             <a:avLst/>
@@ -7772,7 +7440,7 @@
                 <a:ea typeface="Calibri" pitchFamily="34" charset="-122"/>
                 <a:cs typeface="Calibri" pitchFamily="34" charset="-120"/>
               </a:rPr>
-              <a:t>Só 618 com apólice ativa · 141 renovações no radar · +R$ 39 mil/ano fechando o gap de penetração (33,6% → 45%).</a:t>
+              <a:t>Insights, recomendações e predições automáticas em tempo real</a:t>
             </a:r>
             <a:endParaRPr lang="en-US" sz="1100" dirty="0"/>
           </a:p>
@@ -7780,18 +7448,18 @@
       </p:sp>
       <p:sp>
         <p:nvSpPr>
-          <p:cNvPr id="10" name="Shape 8"/>
-          <p:cNvSpPr/>
-          <p:nvPr/>
-        </p:nvSpPr>
-        <p:spPr>
-          <a:xfrm>
-            <a:off x="4389120" y="1965960"/>
-            <a:ext cx="3410712" cy="2103120"/>
+          <p:cNvPr id="13" name="Shape 11"/>
+          <p:cNvSpPr/>
+          <p:nvPr/>
+        </p:nvSpPr>
+        <p:spPr>
+          <a:xfrm>
+            <a:off x="6195060" y="1920240"/>
+            <a:ext cx="2507742" cy="1828800"/>
           </a:xfrm>
           <a:prstGeom prst="roundRect">
             <a:avLst>
-              <a:gd name="adj" fmla="val 1304"/>
+              <a:gd name="adj" fmla="val 1500"/>
             </a:avLst>
           </a:prstGeom>
           <a:solidFill>
@@ -7802,14 +7470,14 @@
       </p:sp>
       <p:sp>
         <p:nvSpPr>
-          <p:cNvPr id="11" name="Text 9"/>
-          <p:cNvSpPr/>
-          <p:nvPr/>
-        </p:nvSpPr>
-        <p:spPr>
-          <a:xfrm>
-            <a:off x="4608576" y="2167128"/>
-            <a:ext cx="2971800" cy="201168"/>
+          <p:cNvPr id="14" name="Text 12"/>
+          <p:cNvSpPr/>
+          <p:nvPr/>
+        </p:nvSpPr>
+        <p:spPr>
+          <a:xfrm>
+            <a:off x="6414516" y="2121408"/>
+            <a:ext cx="2068830" cy="201168"/>
           </a:xfrm>
           <a:prstGeom prst="rect">
             <a:avLst/>
@@ -7835,7 +7503,7 @@
                 <a:ea typeface="Calibri" pitchFamily="34" charset="-122"/>
                 <a:cs typeface="Calibri" pitchFamily="34" charset="-120"/>
               </a:rPr>
-              <a:t>CONSÓRCIO</a:t>
+              <a:t>03</a:t>
             </a:r>
             <a:endParaRPr lang="en-US" sz="950" dirty="0"/>
           </a:p>
@@ -7843,14 +7511,14 @@
       </p:sp>
       <p:sp>
         <p:nvSpPr>
-          <p:cNvPr id="12" name="Text 10"/>
-          <p:cNvSpPr/>
-          <p:nvPr/>
-        </p:nvSpPr>
-        <p:spPr>
-          <a:xfrm>
-            <a:off x="4608576" y="2423160"/>
-            <a:ext cx="2971800" cy="310896"/>
+          <p:cNvPr id="15" name="Text 13"/>
+          <p:cNvSpPr/>
+          <p:nvPr/>
+        </p:nvSpPr>
+        <p:spPr>
+          <a:xfrm>
+            <a:off x="6414516" y="2377440"/>
+            <a:ext cx="2068830" cy="310896"/>
           </a:xfrm>
           <a:prstGeom prst="rect">
             <a:avLst/>
@@ -7876,7 +7544,7 @@
                 <a:ea typeface="Calibri" pitchFamily="34" charset="-122"/>
                 <a:cs typeface="Calibri" pitchFamily="34" charset="-120"/>
               </a:rPr>
-              <a:t>Bônus Quality garantido</a:t>
+              <a:t>Dashboard Integrado</a:t>
             </a:r>
             <a:endParaRPr lang="en-US" sz="1400" dirty="0"/>
           </a:p>
@@ -7884,14 +7552,14 @@
       </p:sp>
       <p:sp>
         <p:nvSpPr>
-          <p:cNvPr id="13" name="Text 11"/>
-          <p:cNvSpPr/>
-          <p:nvPr/>
-        </p:nvSpPr>
-        <p:spPr>
-          <a:xfrm>
-            <a:off x="4608576" y="2788920"/>
-            <a:ext cx="2971800" cy="1115568"/>
+          <p:cNvPr id="16" name="Text 14"/>
+          <p:cNvSpPr/>
+          <p:nvPr/>
+        </p:nvSpPr>
+        <p:spPr>
+          <a:xfrm>
+            <a:off x="6414516" y="2743200"/>
+            <a:ext cx="2068830" cy="841248"/>
           </a:xfrm>
           <a:prstGeom prst="rect">
             <a:avLst/>
@@ -7920,7 +7588,7 @@
                 <a:ea typeface="Calibri" pitchFamily="34" charset="-122"/>
                 <a:cs typeface="Calibri" pitchFamily="34" charset="-120"/>
               </a:rPr>
-              <a:t>486 cotas ativas (R$ 10,4 mi) · retenção 94,5% · adimplência 91,4% → R$ 11,8 mil no trimestre · contemplado avisado compra aqui (81%).</a:t>
+              <a:t>KPIs ao vivo para vendedor, gerente e concessionário</a:t>
             </a:r>
             <a:endParaRPr lang="en-US" sz="1100" dirty="0"/>
           </a:p>
@@ -7928,18 +7596,18 @@
       </p:sp>
       <p:sp>
         <p:nvSpPr>
-          <p:cNvPr id="14" name="Shape 12"/>
-          <p:cNvSpPr/>
-          <p:nvPr/>
-        </p:nvSpPr>
-        <p:spPr>
-          <a:xfrm>
-            <a:off x="8001000" y="1965960"/>
-            <a:ext cx="3410712" cy="2103120"/>
+          <p:cNvPr id="17" name="Shape 15"/>
+          <p:cNvSpPr/>
+          <p:nvPr/>
+        </p:nvSpPr>
+        <p:spPr>
+          <a:xfrm>
+            <a:off x="8903970" y="1920240"/>
+            <a:ext cx="2507742" cy="1828800"/>
           </a:xfrm>
           <a:prstGeom prst="roundRect">
             <a:avLst>
-              <a:gd name="adj" fmla="val 1304"/>
+              <a:gd name="adj" fmla="val 1500"/>
             </a:avLst>
           </a:prstGeom>
           <a:solidFill>
@@ -7950,14 +7618,14 @@
       </p:sp>
       <p:sp>
         <p:nvSpPr>
-          <p:cNvPr id="15" name="Text 13"/>
-          <p:cNvSpPr/>
-          <p:nvPr/>
-        </p:nvSpPr>
-        <p:spPr>
-          <a:xfrm>
-            <a:off x="8220456" y="2167128"/>
-            <a:ext cx="2971800" cy="201168"/>
+          <p:cNvPr id="18" name="Text 16"/>
+          <p:cNvSpPr/>
+          <p:nvPr/>
+        </p:nvSpPr>
+        <p:spPr>
+          <a:xfrm>
+            <a:off x="9123426" y="2121408"/>
+            <a:ext cx="2068830" cy="201168"/>
           </a:xfrm>
           <a:prstGeom prst="rect">
             <a:avLst/>
@@ -7983,7 +7651,7 @@
                 <a:ea typeface="Calibri" pitchFamily="34" charset="-122"/>
                 <a:cs typeface="Calibri" pitchFamily="34" charset="-120"/>
               </a:rPr>
-              <a:t>VOZ DO CLIENTE</a:t>
+              <a:t>04</a:t>
             </a:r>
             <a:endParaRPr lang="en-US" sz="950" dirty="0"/>
           </a:p>
@@ -7991,14 +7659,14 @@
       </p:sp>
       <p:sp>
         <p:nvSpPr>
-          <p:cNvPr id="16" name="Text 14"/>
-          <p:cNvSpPr/>
-          <p:nvPr/>
-        </p:nvSpPr>
-        <p:spPr>
-          <a:xfrm>
-            <a:off x="8220456" y="2423160"/>
-            <a:ext cx="2971800" cy="310896"/>
+          <p:cNvPr id="19" name="Text 17"/>
+          <p:cNvSpPr/>
+          <p:nvPr/>
+        </p:nvSpPr>
+        <p:spPr>
+          <a:xfrm>
+            <a:off x="9123426" y="2377440"/>
+            <a:ext cx="2068830" cy="310896"/>
           </a:xfrm>
           <a:prstGeom prst="rect">
             <a:avLst/>
@@ -8024,7 +7692,7 @@
                 <a:ea typeface="Calibri" pitchFamily="34" charset="-122"/>
                 <a:cs typeface="Calibri" pitchFamily="34" charset="-120"/>
               </a:rPr>
-              <a:t>Pesquisa: 32 clientes reais</a:t>
+              <a:t>Gestão da Experiência</a:t>
             </a:r>
             <a:endParaRPr lang="en-US" sz="1400" dirty="0"/>
           </a:p>
@@ -8032,14 +7700,14 @@
       </p:sp>
       <p:sp>
         <p:nvSpPr>
-          <p:cNvPr id="17" name="Text 15"/>
-          <p:cNvSpPr/>
-          <p:nvPr/>
-        </p:nvSpPr>
-        <p:spPr>
-          <a:xfrm>
-            <a:off x="8220456" y="2788920"/>
-            <a:ext cx="2971800" cy="1115568"/>
+          <p:cNvPr id="20" name="Text 18"/>
+          <p:cNvSpPr/>
+          <p:nvPr/>
+        </p:nvSpPr>
+        <p:spPr>
+          <a:xfrm>
+            <a:off x="9123426" y="2743200"/>
+            <a:ext cx="2068830" cy="841248"/>
           </a:xfrm>
           <a:prstGeom prst="rect">
             <a:avLst/>
@@ -8068,7 +7736,7 @@
                 <a:ea typeface="Calibri" pitchFamily="34" charset="-122"/>
                 <a:cs typeface="Calibri" pitchFamily="34" charset="-120"/>
               </a:rPr>
-              <a:t>Decide a compra: parcela 72% · rapidez 66% · crédito 56%. Satisfação 3,6 → 4,5 antes × depois do piloto. NPS 72.</a:t>
+              <a:t>Jornada do cliente centralizada, fluida e sem repetições</a:t>
             </a:r>
             <a:endParaRPr lang="en-US" sz="1100" dirty="0"/>
           </a:p>
@@ -8076,18 +7744,687 @@
       </p:sp>
       <p:sp>
         <p:nvSpPr>
-          <p:cNvPr id="18" name="Shape 16"/>
-          <p:cNvSpPr/>
-          <p:nvPr/>
-        </p:nvSpPr>
-        <p:spPr>
-          <a:xfrm>
-            <a:off x="777240" y="4434840"/>
-            <a:ext cx="10634472" cy="1097280"/>
+          <p:cNvPr id="21" name="Text 19"/>
+          <p:cNvSpPr/>
+          <p:nvPr/>
+        </p:nvSpPr>
+        <p:spPr>
+          <a:xfrm>
+            <a:off x="777240" y="4160520"/>
+            <a:ext cx="10634472" cy="237744"/>
+          </a:xfrm>
+          <a:prstGeom prst="rect">
+            <a:avLst/>
+          </a:prstGeom>
+          <a:noFill/>
+          <a:ln/>
+        </p:spPr>
+        <p:txBody>
+          <a:bodyPr wrap="square" rtlCol="0" anchor="ctr"/>
+          <a:lstStyle/>
+          <a:p>
+            <a:pPr indent="0" marL="0">
+              <a:buNone/>
+            </a:pPr>
+            <a:r>
+              <a:rPr lang="en-US" sz="1000" b="1" spc="150" kern="0" dirty="0">
+                <a:solidFill>
+                  <a:srgbClr val="0365FE"/>
+                </a:solidFill>
+                <a:latin typeface="Calibri" pitchFamily="34" charset="0"/>
+                <a:ea typeface="Calibri" pitchFamily="34" charset="-122"/>
+                <a:cs typeface="Calibri" pitchFamily="34" charset="-120"/>
+              </a:rPr>
+              <a:t>INTEGRAÇÕES</a:t>
+            </a:r>
+            <a:endParaRPr lang="en-US" sz="1000" dirty="0"/>
+          </a:p>
+        </p:txBody>
+      </p:sp>
+      <p:sp>
+        <p:nvSpPr>
+          <p:cNvPr id="22" name="Shape 20"/>
+          <p:cNvSpPr/>
+          <p:nvPr/>
+        </p:nvSpPr>
+        <p:spPr>
+          <a:xfrm>
+            <a:off x="777240" y="4526280"/>
+            <a:ext cx="898855" cy="502920"/>
           </a:xfrm>
           <a:prstGeom prst="roundRect">
             <a:avLst>
-              <a:gd name="adj" fmla="val 2500"/>
+              <a:gd name="adj" fmla="val 49091"/>
+            </a:avLst>
+          </a:prstGeom>
+          <a:solidFill>
+            <a:srgbClr val="F7F9FC"/>
+          </a:solidFill>
+          <a:ln/>
+        </p:spPr>
+      </p:sp>
+      <p:sp>
+        <p:nvSpPr>
+          <p:cNvPr id="23" name="Text 21"/>
+          <p:cNvSpPr/>
+          <p:nvPr/>
+        </p:nvSpPr>
+        <p:spPr>
+          <a:xfrm>
+            <a:off x="722376" y="4526280"/>
+            <a:ext cx="1008583" cy="502920"/>
+          </a:xfrm>
+          <a:prstGeom prst="rect">
+            <a:avLst/>
+          </a:prstGeom>
+          <a:noFill/>
+          <a:ln/>
+        </p:spPr>
+        <p:txBody>
+          <a:bodyPr wrap="square" rtlCol="0" anchor="ctr">
+            <a:normAutofit/>
+          </a:bodyPr>
+          <a:lstStyle/>
+          <a:p>
+            <a:pPr algn="ctr" indent="0" marL="0">
+              <a:buNone/>
+            </a:pPr>
+            <a:r>
+              <a:rPr lang="en-US" sz="850" b="1" dirty="0">
+                <a:solidFill>
+                  <a:srgbClr val="4A5568"/>
+                </a:solidFill>
+                <a:latin typeface="Calibri" pitchFamily="34" charset="0"/>
+                <a:ea typeface="Calibri" pitchFamily="34" charset="-122"/>
+                <a:cs typeface="Calibri" pitchFamily="34" charset="-120"/>
+              </a:rPr>
+              <a:t>CRM</a:t>
+            </a:r>
+            <a:endParaRPr lang="en-US" sz="850" dirty="0"/>
+          </a:p>
+        </p:txBody>
+      </p:sp>
+      <p:sp>
+        <p:nvSpPr>
+          <p:cNvPr id="24" name="Shape 22"/>
+          <p:cNvSpPr/>
+          <p:nvPr/>
+        </p:nvSpPr>
+        <p:spPr>
+          <a:xfrm>
+            <a:off x="1858975" y="4526280"/>
+            <a:ext cx="898855" cy="502920"/>
+          </a:xfrm>
+          <a:prstGeom prst="roundRect">
+            <a:avLst>
+              <a:gd name="adj" fmla="val 49091"/>
+            </a:avLst>
+          </a:prstGeom>
+          <a:solidFill>
+            <a:srgbClr val="F7F9FC"/>
+          </a:solidFill>
+          <a:ln/>
+        </p:spPr>
+      </p:sp>
+      <p:sp>
+        <p:nvSpPr>
+          <p:cNvPr id="25" name="Text 23"/>
+          <p:cNvSpPr/>
+          <p:nvPr/>
+        </p:nvSpPr>
+        <p:spPr>
+          <a:xfrm>
+            <a:off x="1804111" y="4526280"/>
+            <a:ext cx="1008583" cy="502920"/>
+          </a:xfrm>
+          <a:prstGeom prst="rect">
+            <a:avLst/>
+          </a:prstGeom>
+          <a:noFill/>
+          <a:ln/>
+        </p:spPr>
+        <p:txBody>
+          <a:bodyPr wrap="square" rtlCol="0" anchor="ctr">
+            <a:normAutofit/>
+          </a:bodyPr>
+          <a:lstStyle/>
+          <a:p>
+            <a:pPr algn="ctr" indent="0" marL="0">
+              <a:buNone/>
+            </a:pPr>
+            <a:r>
+              <a:rPr lang="en-US" sz="850" b="1" dirty="0">
+                <a:solidFill>
+                  <a:srgbClr val="4A5568"/>
+                </a:solidFill>
+                <a:latin typeface="Calibri" pitchFamily="34" charset="0"/>
+                <a:ea typeface="Calibri" pitchFamily="34" charset="-122"/>
+                <a:cs typeface="Calibri" pitchFamily="34" charset="-120"/>
+              </a:rPr>
+              <a:t>Banco Yamaha</a:t>
+            </a:r>
+            <a:endParaRPr lang="en-US" sz="850" dirty="0"/>
+          </a:p>
+        </p:txBody>
+      </p:sp>
+      <p:sp>
+        <p:nvSpPr>
+          <p:cNvPr id="26" name="Shape 24"/>
+          <p:cNvSpPr/>
+          <p:nvPr/>
+        </p:nvSpPr>
+        <p:spPr>
+          <a:xfrm>
+            <a:off x="2940710" y="4526280"/>
+            <a:ext cx="898855" cy="502920"/>
+          </a:xfrm>
+          <a:prstGeom prst="roundRect">
+            <a:avLst>
+              <a:gd name="adj" fmla="val 49091"/>
+            </a:avLst>
+          </a:prstGeom>
+          <a:solidFill>
+            <a:srgbClr val="F7F9FC"/>
+          </a:solidFill>
+          <a:ln/>
+        </p:spPr>
+      </p:sp>
+      <p:sp>
+        <p:nvSpPr>
+          <p:cNvPr id="27" name="Text 25"/>
+          <p:cNvSpPr/>
+          <p:nvPr/>
+        </p:nvSpPr>
+        <p:spPr>
+          <a:xfrm>
+            <a:off x="2885846" y="4526280"/>
+            <a:ext cx="1008583" cy="502920"/>
+          </a:xfrm>
+          <a:prstGeom prst="rect">
+            <a:avLst/>
+          </a:prstGeom>
+          <a:noFill/>
+          <a:ln/>
+        </p:spPr>
+        <p:txBody>
+          <a:bodyPr wrap="square" rtlCol="0" anchor="ctr">
+            <a:normAutofit/>
+          </a:bodyPr>
+          <a:lstStyle/>
+          <a:p>
+            <a:pPr algn="ctr" indent="0" marL="0">
+              <a:buNone/>
+            </a:pPr>
+            <a:r>
+              <a:rPr lang="en-US" sz="850" b="1" dirty="0">
+                <a:solidFill>
+                  <a:srgbClr val="4A5568"/>
+                </a:solidFill>
+                <a:latin typeface="Calibri" pitchFamily="34" charset="0"/>
+                <a:ea typeface="Calibri" pitchFamily="34" charset="-122"/>
+                <a:cs typeface="Calibri" pitchFamily="34" charset="-120"/>
+              </a:rPr>
+              <a:t>Consórcio</a:t>
+            </a:r>
+            <a:endParaRPr lang="en-US" sz="850" dirty="0"/>
+          </a:p>
+        </p:txBody>
+      </p:sp>
+      <p:sp>
+        <p:nvSpPr>
+          <p:cNvPr id="28" name="Shape 26"/>
+          <p:cNvSpPr/>
+          <p:nvPr/>
+        </p:nvSpPr>
+        <p:spPr>
+          <a:xfrm>
+            <a:off x="4022446" y="4526280"/>
+            <a:ext cx="898855" cy="502920"/>
+          </a:xfrm>
+          <a:prstGeom prst="roundRect">
+            <a:avLst>
+              <a:gd name="adj" fmla="val 49091"/>
+            </a:avLst>
+          </a:prstGeom>
+          <a:solidFill>
+            <a:srgbClr val="F7F9FC"/>
+          </a:solidFill>
+          <a:ln/>
+        </p:spPr>
+      </p:sp>
+      <p:sp>
+        <p:nvSpPr>
+          <p:cNvPr id="29" name="Text 27"/>
+          <p:cNvSpPr/>
+          <p:nvPr/>
+        </p:nvSpPr>
+        <p:spPr>
+          <a:xfrm>
+            <a:off x="3967582" y="4526280"/>
+            <a:ext cx="1008583" cy="502920"/>
+          </a:xfrm>
+          <a:prstGeom prst="rect">
+            <a:avLst/>
+          </a:prstGeom>
+          <a:noFill/>
+          <a:ln/>
+        </p:spPr>
+        <p:txBody>
+          <a:bodyPr wrap="square" rtlCol="0" anchor="ctr">
+            <a:normAutofit/>
+          </a:bodyPr>
+          <a:lstStyle/>
+          <a:p>
+            <a:pPr algn="ctr" indent="0" marL="0">
+              <a:buNone/>
+            </a:pPr>
+            <a:r>
+              <a:rPr lang="en-US" sz="850" b="1" dirty="0">
+                <a:solidFill>
+                  <a:srgbClr val="4A5568"/>
+                </a:solidFill>
+                <a:latin typeface="Calibri" pitchFamily="34" charset="0"/>
+                <a:ea typeface="Calibri" pitchFamily="34" charset="-122"/>
+                <a:cs typeface="Calibri" pitchFamily="34" charset="-120"/>
+              </a:rPr>
+              <a:t>Seguros</a:t>
+            </a:r>
+            <a:endParaRPr lang="en-US" sz="850" dirty="0"/>
+          </a:p>
+        </p:txBody>
+      </p:sp>
+      <p:sp>
+        <p:nvSpPr>
+          <p:cNvPr id="30" name="Shape 28"/>
+          <p:cNvSpPr/>
+          <p:nvPr/>
+        </p:nvSpPr>
+        <p:spPr>
+          <a:xfrm>
+            <a:off x="5104181" y="4526280"/>
+            <a:ext cx="898855" cy="502920"/>
+          </a:xfrm>
+          <a:prstGeom prst="roundRect">
+            <a:avLst>
+              <a:gd name="adj" fmla="val 49091"/>
+            </a:avLst>
+          </a:prstGeom>
+          <a:solidFill>
+            <a:srgbClr val="F7F9FC"/>
+          </a:solidFill>
+          <a:ln/>
+        </p:spPr>
+      </p:sp>
+      <p:sp>
+        <p:nvSpPr>
+          <p:cNvPr id="31" name="Text 29"/>
+          <p:cNvSpPr/>
+          <p:nvPr/>
+        </p:nvSpPr>
+        <p:spPr>
+          <a:xfrm>
+            <a:off x="5049317" y="4526280"/>
+            <a:ext cx="1008583" cy="502920"/>
+          </a:xfrm>
+          <a:prstGeom prst="rect">
+            <a:avLst/>
+          </a:prstGeom>
+          <a:noFill/>
+          <a:ln/>
+        </p:spPr>
+        <p:txBody>
+          <a:bodyPr wrap="square" rtlCol="0" anchor="ctr">
+            <a:normAutofit/>
+          </a:bodyPr>
+          <a:lstStyle/>
+          <a:p>
+            <a:pPr algn="ctr" indent="0" marL="0">
+              <a:buNone/>
+            </a:pPr>
+            <a:r>
+              <a:rPr lang="en-US" sz="850" b="1" dirty="0">
+                <a:solidFill>
+                  <a:srgbClr val="4A5568"/>
+                </a:solidFill>
+                <a:latin typeface="Calibri" pitchFamily="34" charset="0"/>
+                <a:ea typeface="Calibri" pitchFamily="34" charset="-122"/>
+                <a:cs typeface="Calibri" pitchFamily="34" charset="-120"/>
+              </a:rPr>
+              <a:t>Leads</a:t>
+            </a:r>
+            <a:endParaRPr lang="en-US" sz="850" dirty="0"/>
+          </a:p>
+        </p:txBody>
+      </p:sp>
+      <p:sp>
+        <p:nvSpPr>
+          <p:cNvPr id="32" name="Shape 30"/>
+          <p:cNvSpPr/>
+          <p:nvPr/>
+        </p:nvSpPr>
+        <p:spPr>
+          <a:xfrm>
+            <a:off x="6185916" y="4526280"/>
+            <a:ext cx="898855" cy="502920"/>
+          </a:xfrm>
+          <a:prstGeom prst="roundRect">
+            <a:avLst>
+              <a:gd name="adj" fmla="val 49091"/>
+            </a:avLst>
+          </a:prstGeom>
+          <a:solidFill>
+            <a:srgbClr val="F7F9FC"/>
+          </a:solidFill>
+          <a:ln/>
+        </p:spPr>
+      </p:sp>
+      <p:sp>
+        <p:nvSpPr>
+          <p:cNvPr id="33" name="Text 31"/>
+          <p:cNvSpPr/>
+          <p:nvPr/>
+        </p:nvSpPr>
+        <p:spPr>
+          <a:xfrm>
+            <a:off x="6131052" y="4526280"/>
+            <a:ext cx="1008583" cy="502920"/>
+          </a:xfrm>
+          <a:prstGeom prst="rect">
+            <a:avLst/>
+          </a:prstGeom>
+          <a:noFill/>
+          <a:ln/>
+        </p:spPr>
+        <p:txBody>
+          <a:bodyPr wrap="square" rtlCol="0" anchor="ctr">
+            <a:normAutofit/>
+          </a:bodyPr>
+          <a:lstStyle/>
+          <a:p>
+            <a:pPr algn="ctr" indent="0" marL="0">
+              <a:buNone/>
+            </a:pPr>
+            <a:r>
+              <a:rPr lang="en-US" sz="850" b="1" dirty="0">
+                <a:solidFill>
+                  <a:srgbClr val="4A5568"/>
+                </a:solidFill>
+                <a:latin typeface="Calibri" pitchFamily="34" charset="0"/>
+                <a:ea typeface="Calibri" pitchFamily="34" charset="-122"/>
+                <a:cs typeface="Calibri" pitchFamily="34" charset="-120"/>
+              </a:rPr>
+              <a:t>Pós-venda</a:t>
+            </a:r>
+            <a:endParaRPr lang="en-US" sz="850" dirty="0"/>
+          </a:p>
+        </p:txBody>
+      </p:sp>
+      <p:sp>
+        <p:nvSpPr>
+          <p:cNvPr id="34" name="Shape 32"/>
+          <p:cNvSpPr/>
+          <p:nvPr/>
+        </p:nvSpPr>
+        <p:spPr>
+          <a:xfrm>
+            <a:off x="7267651" y="4526280"/>
+            <a:ext cx="898855" cy="502920"/>
+          </a:xfrm>
+          <a:prstGeom prst="roundRect">
+            <a:avLst>
+              <a:gd name="adj" fmla="val 49091"/>
+            </a:avLst>
+          </a:prstGeom>
+          <a:solidFill>
+            <a:srgbClr val="F7F9FC"/>
+          </a:solidFill>
+          <a:ln/>
+        </p:spPr>
+      </p:sp>
+      <p:sp>
+        <p:nvSpPr>
+          <p:cNvPr id="35" name="Text 33"/>
+          <p:cNvSpPr/>
+          <p:nvPr/>
+        </p:nvSpPr>
+        <p:spPr>
+          <a:xfrm>
+            <a:off x="7212787" y="4526280"/>
+            <a:ext cx="1008583" cy="502920"/>
+          </a:xfrm>
+          <a:prstGeom prst="rect">
+            <a:avLst/>
+          </a:prstGeom>
+          <a:noFill/>
+          <a:ln/>
+        </p:spPr>
+        <p:txBody>
+          <a:bodyPr wrap="square" rtlCol="0" anchor="ctr">
+            <a:normAutofit/>
+          </a:bodyPr>
+          <a:lstStyle/>
+          <a:p>
+            <a:pPr algn="ctr" indent="0" marL="0">
+              <a:buNone/>
+            </a:pPr>
+            <a:r>
+              <a:rPr lang="en-US" sz="850" b="1" dirty="0">
+                <a:solidFill>
+                  <a:srgbClr val="4A5568"/>
+                </a:solidFill>
+                <a:latin typeface="Calibri" pitchFamily="34" charset="0"/>
+                <a:ea typeface="Calibri" pitchFamily="34" charset="-122"/>
+                <a:cs typeface="Calibri" pitchFamily="34" charset="-120"/>
+              </a:rPr>
+              <a:t>NPS</a:t>
+            </a:r>
+            <a:endParaRPr lang="en-US" sz="850" dirty="0"/>
+          </a:p>
+        </p:txBody>
+      </p:sp>
+      <p:sp>
+        <p:nvSpPr>
+          <p:cNvPr id="36" name="Shape 34"/>
+          <p:cNvSpPr/>
+          <p:nvPr/>
+        </p:nvSpPr>
+        <p:spPr>
+          <a:xfrm>
+            <a:off x="8349386" y="4526280"/>
+            <a:ext cx="898855" cy="502920"/>
+          </a:xfrm>
+          <a:prstGeom prst="roundRect">
+            <a:avLst>
+              <a:gd name="adj" fmla="val 49091"/>
+            </a:avLst>
+          </a:prstGeom>
+          <a:solidFill>
+            <a:srgbClr val="F7F9FC"/>
+          </a:solidFill>
+          <a:ln/>
+        </p:spPr>
+      </p:sp>
+      <p:sp>
+        <p:nvSpPr>
+          <p:cNvPr id="37" name="Text 35"/>
+          <p:cNvSpPr/>
+          <p:nvPr/>
+        </p:nvSpPr>
+        <p:spPr>
+          <a:xfrm>
+            <a:off x="8294522" y="4526280"/>
+            <a:ext cx="1008583" cy="502920"/>
+          </a:xfrm>
+          <a:prstGeom prst="rect">
+            <a:avLst/>
+          </a:prstGeom>
+          <a:noFill/>
+          <a:ln/>
+        </p:spPr>
+        <p:txBody>
+          <a:bodyPr wrap="square" rtlCol="0" anchor="ctr">
+            <a:normAutofit/>
+          </a:bodyPr>
+          <a:lstStyle/>
+          <a:p>
+            <a:pPr algn="ctr" indent="0" marL="0">
+              <a:buNone/>
+            </a:pPr>
+            <a:r>
+              <a:rPr lang="en-US" sz="850" b="1" dirty="0">
+                <a:solidFill>
+                  <a:srgbClr val="4A5568"/>
+                </a:solidFill>
+                <a:latin typeface="Calibri" pitchFamily="34" charset="0"/>
+                <a:ea typeface="Calibri" pitchFamily="34" charset="-122"/>
+                <a:cs typeface="Calibri" pitchFamily="34" charset="-120"/>
+              </a:rPr>
+              <a:t>Estoque</a:t>
+            </a:r>
+            <a:endParaRPr lang="en-US" sz="850" dirty="0"/>
+          </a:p>
+        </p:txBody>
+      </p:sp>
+      <p:sp>
+        <p:nvSpPr>
+          <p:cNvPr id="38" name="Shape 36"/>
+          <p:cNvSpPr/>
+          <p:nvPr/>
+        </p:nvSpPr>
+        <p:spPr>
+          <a:xfrm>
+            <a:off x="9431122" y="4526280"/>
+            <a:ext cx="898855" cy="502920"/>
+          </a:xfrm>
+          <a:prstGeom prst="roundRect">
+            <a:avLst>
+              <a:gd name="adj" fmla="val 49091"/>
+            </a:avLst>
+          </a:prstGeom>
+          <a:solidFill>
+            <a:srgbClr val="F7F9FC"/>
+          </a:solidFill>
+          <a:ln/>
+        </p:spPr>
+      </p:sp>
+      <p:sp>
+        <p:nvSpPr>
+          <p:cNvPr id="39" name="Text 37"/>
+          <p:cNvSpPr/>
+          <p:nvPr/>
+        </p:nvSpPr>
+        <p:spPr>
+          <a:xfrm>
+            <a:off x="9376258" y="4526280"/>
+            <a:ext cx="1008583" cy="502920"/>
+          </a:xfrm>
+          <a:prstGeom prst="rect">
+            <a:avLst/>
+          </a:prstGeom>
+          <a:noFill/>
+          <a:ln/>
+        </p:spPr>
+        <p:txBody>
+          <a:bodyPr wrap="square" rtlCol="0" anchor="ctr">
+            <a:normAutofit/>
+          </a:bodyPr>
+          <a:lstStyle/>
+          <a:p>
+            <a:pPr algn="ctr" indent="0" marL="0">
+              <a:buNone/>
+            </a:pPr>
+            <a:r>
+              <a:rPr lang="en-US" sz="850" b="1" dirty="0">
+                <a:solidFill>
+                  <a:srgbClr val="4A5568"/>
+                </a:solidFill>
+                <a:latin typeface="Calibri" pitchFamily="34" charset="0"/>
+                <a:ea typeface="Calibri" pitchFamily="34" charset="-122"/>
+                <a:cs typeface="Calibri" pitchFamily="34" charset="-120"/>
+              </a:rPr>
+              <a:t>Emplacamento</a:t>
+            </a:r>
+            <a:endParaRPr lang="en-US" sz="850" dirty="0"/>
+          </a:p>
+        </p:txBody>
+      </p:sp>
+      <p:sp>
+        <p:nvSpPr>
+          <p:cNvPr id="40" name="Shape 38"/>
+          <p:cNvSpPr/>
+          <p:nvPr/>
+        </p:nvSpPr>
+        <p:spPr>
+          <a:xfrm>
+            <a:off x="10512857" y="4526280"/>
+            <a:ext cx="898855" cy="502920"/>
+          </a:xfrm>
+          <a:prstGeom prst="roundRect">
+            <a:avLst>
+              <a:gd name="adj" fmla="val 49091"/>
+            </a:avLst>
+          </a:prstGeom>
+          <a:solidFill>
+            <a:srgbClr val="F7F9FC"/>
+          </a:solidFill>
+          <a:ln/>
+        </p:spPr>
+      </p:sp>
+      <p:sp>
+        <p:nvSpPr>
+          <p:cNvPr id="41" name="Text 39"/>
+          <p:cNvSpPr/>
+          <p:nvPr/>
+        </p:nvSpPr>
+        <p:spPr>
+          <a:xfrm>
+            <a:off x="10457993" y="4526280"/>
+            <a:ext cx="1008583" cy="502920"/>
+          </a:xfrm>
+          <a:prstGeom prst="rect">
+            <a:avLst/>
+          </a:prstGeom>
+          <a:noFill/>
+          <a:ln/>
+        </p:spPr>
+        <p:txBody>
+          <a:bodyPr wrap="square" rtlCol="0" anchor="ctr">
+            <a:normAutofit/>
+          </a:bodyPr>
+          <a:lstStyle/>
+          <a:p>
+            <a:pPr algn="ctr" indent="0" marL="0">
+              <a:buNone/>
+            </a:pPr>
+            <a:r>
+              <a:rPr lang="en-US" sz="850" b="1" dirty="0">
+                <a:solidFill>
+                  <a:srgbClr val="4A5568"/>
+                </a:solidFill>
+                <a:latin typeface="Calibri" pitchFamily="34" charset="0"/>
+                <a:ea typeface="Calibri" pitchFamily="34" charset="-122"/>
+                <a:cs typeface="Calibri" pitchFamily="34" charset="-120"/>
+              </a:rPr>
+              <a:t>WhatsApp</a:t>
+            </a:r>
+            <a:endParaRPr lang="en-US" sz="850" dirty="0"/>
+          </a:p>
+        </p:txBody>
+      </p:sp>
+      <p:sp>
+        <p:nvSpPr>
+          <p:cNvPr id="42" name="Shape 40"/>
+          <p:cNvSpPr/>
+          <p:nvPr/>
+        </p:nvSpPr>
+        <p:spPr>
+          <a:xfrm>
+            <a:off x="777240" y="5349240"/>
+            <a:ext cx="10634472" cy="914400"/>
+          </a:xfrm>
+          <a:prstGeom prst="roundRect">
+            <a:avLst>
+              <a:gd name="adj" fmla="val 3000"/>
             </a:avLst>
           </a:prstGeom>
           <a:solidFill>
@@ -8098,13 +8435,13 @@
       </p:sp>
       <p:sp>
         <p:nvSpPr>
-          <p:cNvPr id="19" name="Text 17"/>
-          <p:cNvSpPr/>
-          <p:nvPr/>
-        </p:nvSpPr>
-        <p:spPr>
-          <a:xfrm>
-            <a:off x="1051560" y="4581144"/>
+          <p:cNvPr id="43" name="Text 41"/>
+          <p:cNvSpPr/>
+          <p:nvPr/>
+        </p:nvSpPr>
+        <p:spPr>
+          <a:xfrm>
+            <a:off x="1051560" y="5495544"/>
             <a:ext cx="10085832" cy="274320"/>
           </a:xfrm>
           <a:prstGeom prst="rect">
@@ -8131,7 +8468,7 @@
                 <a:ea typeface="Calibri" pitchFamily="34" charset="-122"/>
                 <a:cs typeface="Calibri" pitchFamily="34" charset="-120"/>
               </a:rPr>
-              <a:t>"Meu crédito não passou e ninguém mais me procurou. Se tivessem uma segunda opção eu tinha fechado."</a:t>
+              <a:t>SaaS multi-grupo desde o dia 1</a:t>
             </a:r>
             <a:endParaRPr lang="en-US" sz="1350" dirty="0"/>
           </a:p>
@@ -8139,14 +8476,14 @@
       </p:sp>
       <p:sp>
         <p:nvSpPr>
-          <p:cNvPr id="20" name="Text 18"/>
-          <p:cNvSpPr/>
-          <p:nvPr/>
-        </p:nvSpPr>
-        <p:spPr>
-          <a:xfrm>
-            <a:off x="1051560" y="4892040"/>
-            <a:ext cx="10085832" cy="530352"/>
+          <p:cNvPr id="44" name="Text 42"/>
+          <p:cNvSpPr/>
+          <p:nvPr/>
+        </p:nvSpPr>
+        <p:spPr>
+          <a:xfrm>
+            <a:off x="1051560" y="5806440"/>
+            <a:ext cx="10085832" cy="347472"/>
           </a:xfrm>
           <a:prstGeom prst="rect">
             <a:avLst/>
@@ -8175,7 +8512,7 @@
                 <a:ea typeface="Calibri" pitchFamily="34" charset="-122"/>
                 <a:cs typeface="Calibri" pitchFamily="34" charset="-120"/>
               </a:rPr>
-              <a:t>J. Vitor, cliente que não comprou — 43% das vendas perdidas travaram no crédito. É exatamente o público que o Liberacred devolve à mesa.</a:t>
+              <a:t>Sem instalação, sem hardware, sem projeto de TI local — replicar para outra concessionária é configurar, não reprogramar.</a:t>
             </a:r>
             <a:endParaRPr lang="en-US" sz="1150" dirty="0"/>
           </a:p>
@@ -8246,7 +8583,7 @@
                 <a:ea typeface="Calibri" pitchFamily="34" charset="-122"/>
                 <a:cs typeface="Calibri" pitchFamily="34" charset="-120"/>
               </a:rPr>
-              <a:t>ARQUITETURA</a:t>
+              <a:t>CRONOGRAMA</a:t>
             </a:r>
             <a:endParaRPr lang="en-US" sz="1100" dirty="0"/>
           </a:p>
@@ -8287,7 +8624,7 @@
                 <a:ea typeface="Calibri" pitchFamily="34" charset="-122"/>
                 <a:cs typeface="Calibri" pitchFamily="34" charset="-120"/>
               </a:rPr>
-              <a:t>Quatro pilares sustentam a plataforma</a:t>
+              <a:t>De janeiro ao rollout: o projeto no prazo</a:t>
             </a:r>
             <a:endParaRPr lang="en-US" sz="3000" dirty="0"/>
           </a:p>
@@ -8296,6 +8633,47 @@
       <p:sp>
         <p:nvSpPr>
           <p:cNvPr id="4" name="Text 2"/>
+          <p:cNvSpPr/>
+          <p:nvPr/>
+        </p:nvSpPr>
+        <p:spPr>
+          <a:xfrm>
+            <a:off x="777240" y="1444752"/>
+            <a:ext cx="10634472" cy="292608"/>
+          </a:xfrm>
+          <a:prstGeom prst="rect">
+            <a:avLst/>
+          </a:prstGeom>
+          <a:noFill/>
+          <a:ln/>
+        </p:spPr>
+        <p:txBody>
+          <a:bodyPr wrap="square" rtlCol="0" anchor="ctr">
+            <a:normAutofit/>
+          </a:bodyPr>
+          <a:lstStyle/>
+          <a:p>
+            <a:pPr indent="0" marL="0">
+              <a:buNone/>
+            </a:pPr>
+            <a:r>
+              <a:rPr lang="en-US" sz="1350" dirty="0">
+                <a:solidFill>
+                  <a:srgbClr val="4A5568"/>
+                </a:solidFill>
+                <a:latin typeface="Calibri" pitchFamily="34" charset="0"/>
+                <a:ea typeface="Calibri" pitchFamily="34" charset="-122"/>
+                <a:cs typeface="Calibri" pitchFamily="34" charset="-120"/>
+              </a:rPr>
+              <a:t>Metodologia ágil com PDCA — as fases cumpridas em 2026 e a proposta para a rede.</a:t>
+            </a:r>
+            <a:endParaRPr lang="en-US" sz="1350" dirty="0"/>
+          </a:p>
+        </p:txBody>
+      </p:sp>
+      <p:sp>
+        <p:nvSpPr>
+          <p:cNvPr id="5" name="Text 3"/>
           <p:cNvSpPr/>
           <p:nvPr/>
         </p:nvSpPr>
@@ -8334,18 +8712,105 @@
       </p:sp>
       <p:sp>
         <p:nvSpPr>
-          <p:cNvPr id="5" name="Shape 3"/>
-          <p:cNvSpPr/>
-          <p:nvPr/>
-        </p:nvSpPr>
-        <p:spPr>
-          <a:xfrm>
-            <a:off x="777240" y="1920240"/>
-            <a:ext cx="2507742" cy="1828800"/>
+          <p:cNvPr id="6" name="Shape 4"/>
+          <p:cNvSpPr/>
+          <p:nvPr/>
+        </p:nvSpPr>
+        <p:spPr>
+          <a:xfrm>
+            <a:off x="960120" y="2743200"/>
+            <a:ext cx="10268712" cy="0"/>
+          </a:xfrm>
+          <a:prstGeom prst="line">
+            <a:avLst/>
+          </a:prstGeom>
+          <a:noFill/>
+          <a:ln w="19050">
+            <a:solidFill>
+              <a:srgbClr val="E5EAF2"/>
+            </a:solidFill>
+            <a:prstDash val="solid"/>
+          </a:ln>
+        </p:spPr>
+      </p:sp>
+      <p:sp>
+        <p:nvSpPr>
+          <p:cNvPr id="7" name="Shape 5"/>
+          <p:cNvSpPr/>
+          <p:nvPr/>
+        </p:nvSpPr>
+        <p:spPr>
+          <a:xfrm>
+            <a:off x="1393154" y="2670048"/>
+            <a:ext cx="146304" cy="146304"/>
+          </a:xfrm>
+          <a:prstGeom prst="ellipse">
+            <a:avLst/>
+          </a:prstGeom>
+          <a:solidFill>
+            <a:srgbClr val="1E9E5A"/>
+          </a:solidFill>
+          <a:ln w="19050">
+            <a:solidFill>
+              <a:srgbClr val="FFFFFF"/>
+            </a:solidFill>
+            <a:prstDash val="solid"/>
+          </a:ln>
+        </p:spPr>
+      </p:sp>
+      <p:sp>
+        <p:nvSpPr>
+          <p:cNvPr id="8" name="Text 6"/>
+          <p:cNvSpPr/>
+          <p:nvPr/>
+        </p:nvSpPr>
+        <p:spPr>
+          <a:xfrm>
+            <a:off x="777240" y="2148840"/>
+            <a:ext cx="1378131" cy="274320"/>
+          </a:xfrm>
+          <a:prstGeom prst="rect">
+            <a:avLst/>
+          </a:prstGeom>
+          <a:noFill/>
+          <a:ln/>
+        </p:spPr>
+        <p:txBody>
+          <a:bodyPr wrap="square" rtlCol="0" anchor="ctr"/>
+          <a:lstStyle/>
+          <a:p>
+            <a:pPr algn="ctr" indent="0" marL="0">
+              <a:buNone/>
+            </a:pPr>
+            <a:r>
+              <a:rPr lang="en-US" sz="1000" b="1" dirty="0">
+                <a:solidFill>
+                  <a:srgbClr val="4A5568"/>
+                </a:solidFill>
+                <a:latin typeface="Calibri" pitchFamily="34" charset="0"/>
+                <a:ea typeface="Calibri" pitchFamily="34" charset="-122"/>
+                <a:cs typeface="Calibri" pitchFamily="34" charset="-120"/>
+              </a:rPr>
+              <a:t>Jan–Fev</a:t>
+            </a:r>
+            <a:endParaRPr lang="en-US" sz="1000" dirty="0"/>
+          </a:p>
+        </p:txBody>
+      </p:sp>
+      <p:sp>
+        <p:nvSpPr>
+          <p:cNvPr id="9" name="Shape 7"/>
+          <p:cNvSpPr/>
+          <p:nvPr/>
+        </p:nvSpPr>
+        <p:spPr>
+          <a:xfrm>
+            <a:off x="777240" y="3063240"/>
+            <a:ext cx="1378131" cy="1737360"/>
           </a:xfrm>
           <a:prstGeom prst="roundRect">
             <a:avLst>
-              <a:gd name="adj" fmla="val 1500"/>
+              <a:gd name="adj" fmla="val 2654"/>
             </a:avLst>
           </a:prstGeom>
           <a:solidFill>
@@ -8356,14 +8821,14 @@
       </p:sp>
       <p:sp>
         <p:nvSpPr>
-          <p:cNvPr id="6" name="Text 4"/>
-          <p:cNvSpPr/>
-          <p:nvPr/>
-        </p:nvSpPr>
-        <p:spPr>
-          <a:xfrm>
-            <a:off x="996696" y="2121408"/>
-            <a:ext cx="2068830" cy="201168"/>
+          <p:cNvPr id="10" name="Text 8"/>
+          <p:cNvSpPr/>
+          <p:nvPr/>
+        </p:nvSpPr>
+        <p:spPr>
+          <a:xfrm>
+            <a:off x="868680" y="3200400"/>
+            <a:ext cx="1195251" cy="292608"/>
           </a:xfrm>
           <a:prstGeom prst="rect">
             <a:avLst/>
@@ -8377,34 +8842,203 @@
           </a:bodyPr>
           <a:lstStyle/>
           <a:p>
-            <a:pPr indent="0" marL="0">
-              <a:buNone/>
-            </a:pPr>
-            <a:r>
-              <a:rPr lang="en-US" sz="950" b="1" spc="50" kern="0" dirty="0">
-                <a:solidFill>
-                  <a:srgbClr val="0365FE"/>
-                </a:solidFill>
-                <a:latin typeface="Calibri" pitchFamily="34" charset="0"/>
-                <a:ea typeface="Calibri" pitchFamily="34" charset="-122"/>
-                <a:cs typeface="Calibri" pitchFamily="34" charset="-120"/>
-              </a:rPr>
-              <a:t>01</a:t>
-            </a:r>
-            <a:endParaRPr lang="en-US" sz="950" dirty="0"/>
-          </a:p>
-        </p:txBody>
-      </p:sp>
-      <p:sp>
-        <p:nvSpPr>
-          <p:cNvPr id="7" name="Text 5"/>
-          <p:cNvSpPr/>
-          <p:nvPr/>
-        </p:nvSpPr>
-        <p:spPr>
-          <a:xfrm>
-            <a:off x="996696" y="2377440"/>
-            <a:ext cx="2068830" cy="310896"/>
+            <a:pPr algn="ctr" indent="0" marL="0">
+              <a:buNone/>
+            </a:pPr>
+            <a:r>
+              <a:rPr lang="en-US" sz="1150" b="1" dirty="0">
+                <a:solidFill>
+                  <a:srgbClr val="091426"/>
+                </a:solidFill>
+                <a:latin typeface="Calibri" pitchFamily="34" charset="0"/>
+                <a:ea typeface="Calibri" pitchFamily="34" charset="-122"/>
+                <a:cs typeface="Calibri" pitchFamily="34" charset="-120"/>
+              </a:rPr>
+              <a:t>Planejamento</a:t>
+            </a:r>
+            <a:endParaRPr lang="en-US" sz="1150" dirty="0"/>
+          </a:p>
+        </p:txBody>
+      </p:sp>
+      <p:sp>
+        <p:nvSpPr>
+          <p:cNvPr id="11" name="Text 9"/>
+          <p:cNvSpPr/>
+          <p:nvPr/>
+        </p:nvSpPr>
+        <p:spPr>
+          <a:xfrm>
+            <a:off x="868680" y="3547872"/>
+            <a:ext cx="1195251" cy="1097280"/>
+          </a:xfrm>
+          <a:prstGeom prst="rect">
+            <a:avLst/>
+          </a:prstGeom>
+          <a:noFill/>
+          <a:ln/>
+        </p:spPr>
+        <p:txBody>
+          <a:bodyPr wrap="square" rtlCol="0" anchor="t">
+            <a:normAutofit/>
+          </a:bodyPr>
+          <a:lstStyle/>
+          <a:p>
+            <a:pPr algn="ctr" indent="0" marL="0">
+              <a:lnSpc>
+                <a:spcPts val="1250"/>
+              </a:lnSpc>
+              <a:buNone/>
+            </a:pPr>
+            <a:r>
+              <a:rPr lang="en-US" sz="900" dirty="0">
+                <a:solidFill>
+                  <a:srgbClr val="4A5568"/>
+                </a:solidFill>
+                <a:latin typeface="Calibri" pitchFamily="34" charset="0"/>
+                <a:ea typeface="Calibri" pitchFamily="34" charset="-122"/>
+                <a:cs typeface="Calibri" pitchFamily="34" charset="-120"/>
+              </a:rPr>
+              <a:t>requisitos e arquitetura</a:t>
+            </a:r>
+            <a:endParaRPr lang="en-US" sz="900" dirty="0"/>
+          </a:p>
+        </p:txBody>
+      </p:sp>
+      <p:sp>
+        <p:nvSpPr>
+          <p:cNvPr id="12" name="Text 10"/>
+          <p:cNvSpPr/>
+          <p:nvPr/>
+        </p:nvSpPr>
+        <p:spPr>
+          <a:xfrm>
+            <a:off x="777240" y="4434840"/>
+            <a:ext cx="1378131" cy="237744"/>
+          </a:xfrm>
+          <a:prstGeom prst="rect">
+            <a:avLst/>
+          </a:prstGeom>
+          <a:noFill/>
+          <a:ln/>
+        </p:spPr>
+        <p:txBody>
+          <a:bodyPr wrap="square" rtlCol="0" anchor="ctr"/>
+          <a:lstStyle/>
+          <a:p>
+            <a:pPr algn="ctr" indent="0" marL="0">
+              <a:buNone/>
+            </a:pPr>
+            <a:r>
+              <a:rPr lang="en-US" sz="800" b="1" spc="100" kern="0" dirty="0">
+                <a:solidFill>
+                  <a:srgbClr val="1E9E5A"/>
+                </a:solidFill>
+                <a:latin typeface="Calibri" pitchFamily="34" charset="0"/>
+                <a:ea typeface="Calibri" pitchFamily="34" charset="-122"/>
+                <a:cs typeface="Calibri" pitchFamily="34" charset="-120"/>
+              </a:rPr>
+              <a:t>ENTREGUE</a:t>
+            </a:r>
+            <a:endParaRPr lang="en-US" sz="800" dirty="0"/>
+          </a:p>
+        </p:txBody>
+      </p:sp>
+      <p:sp>
+        <p:nvSpPr>
+          <p:cNvPr id="13" name="Shape 11"/>
+          <p:cNvSpPr/>
+          <p:nvPr/>
+        </p:nvSpPr>
+        <p:spPr>
+          <a:xfrm>
+            <a:off x="2935877" y="2670048"/>
+            <a:ext cx="146304" cy="146304"/>
+          </a:xfrm>
+          <a:prstGeom prst="ellipse">
+            <a:avLst/>
+          </a:prstGeom>
+          <a:solidFill>
+            <a:srgbClr val="1E9E5A"/>
+          </a:solidFill>
+          <a:ln w="19050">
+            <a:solidFill>
+              <a:srgbClr val="FFFFFF"/>
+            </a:solidFill>
+            <a:prstDash val="solid"/>
+          </a:ln>
+        </p:spPr>
+      </p:sp>
+      <p:sp>
+        <p:nvSpPr>
+          <p:cNvPr id="14" name="Text 12"/>
+          <p:cNvSpPr/>
+          <p:nvPr/>
+        </p:nvSpPr>
+        <p:spPr>
+          <a:xfrm>
+            <a:off x="2319963" y="2148840"/>
+            <a:ext cx="1378131" cy="274320"/>
+          </a:xfrm>
+          <a:prstGeom prst="rect">
+            <a:avLst/>
+          </a:prstGeom>
+          <a:noFill/>
+          <a:ln/>
+        </p:spPr>
+        <p:txBody>
+          <a:bodyPr wrap="square" rtlCol="0" anchor="ctr"/>
+          <a:lstStyle/>
+          <a:p>
+            <a:pPr algn="ctr" indent="0" marL="0">
+              <a:buNone/>
+            </a:pPr>
+            <a:r>
+              <a:rPr lang="en-US" sz="1000" b="1" dirty="0">
+                <a:solidFill>
+                  <a:srgbClr val="4A5568"/>
+                </a:solidFill>
+                <a:latin typeface="Calibri" pitchFamily="34" charset="0"/>
+                <a:ea typeface="Calibri" pitchFamily="34" charset="-122"/>
+                <a:cs typeface="Calibri" pitchFamily="34" charset="-120"/>
+              </a:rPr>
+              <a:t>Mar</a:t>
+            </a:r>
+            <a:endParaRPr lang="en-US" sz="1000" dirty="0"/>
+          </a:p>
+        </p:txBody>
+      </p:sp>
+      <p:sp>
+        <p:nvSpPr>
+          <p:cNvPr id="15" name="Shape 13"/>
+          <p:cNvSpPr/>
+          <p:nvPr/>
+        </p:nvSpPr>
+        <p:spPr>
+          <a:xfrm>
+            <a:off x="2319963" y="3063240"/>
+            <a:ext cx="1378131" cy="1737360"/>
+          </a:xfrm>
+          <a:prstGeom prst="roundRect">
+            <a:avLst>
+              <a:gd name="adj" fmla="val 2654"/>
+            </a:avLst>
+          </a:prstGeom>
+          <a:solidFill>
+            <a:srgbClr val="F7F9FC"/>
+          </a:solidFill>
+          <a:ln/>
+        </p:spPr>
+      </p:sp>
+      <p:sp>
+        <p:nvSpPr>
+          <p:cNvPr id="16" name="Text 14"/>
+          <p:cNvSpPr/>
+          <p:nvPr/>
+        </p:nvSpPr>
+        <p:spPr>
+          <a:xfrm>
+            <a:off x="2411403" y="3200400"/>
+            <a:ext cx="1195251" cy="292608"/>
           </a:xfrm>
           <a:prstGeom prst="rect">
             <a:avLst/>
@@ -8418,11 +9052,11 @@
           </a:bodyPr>
           <a:lstStyle/>
           <a:p>
-            <a:pPr indent="0" marL="0">
-              <a:buNone/>
-            </a:pPr>
-            <a:r>
-              <a:rPr lang="en-US" sz="1400" b="1" dirty="0">
+            <a:pPr algn="ctr" indent="0" marL="0">
+              <a:buNone/>
+            </a:pPr>
+            <a:r>
+              <a:rPr lang="en-US" sz="1150" b="1" dirty="0">
                 <a:solidFill>
                   <a:srgbClr val="091426"/>
                 </a:solidFill>
@@ -8430,22 +9064,22 @@
                 <a:ea typeface="Calibri" pitchFamily="34" charset="-122"/>
                 <a:cs typeface="Calibri" pitchFamily="34" charset="-120"/>
               </a:rPr>
-              <a:t>Plataforma Inteligente</a:t>
-            </a:r>
-            <a:endParaRPr lang="en-US" sz="1400" dirty="0"/>
-          </a:p>
-        </p:txBody>
-      </p:sp>
-      <p:sp>
-        <p:nvSpPr>
-          <p:cNvPr id="8" name="Text 6"/>
-          <p:cNvSpPr/>
-          <p:nvPr/>
-        </p:nvSpPr>
-        <p:spPr>
-          <a:xfrm>
-            <a:off x="996696" y="2743200"/>
-            <a:ext cx="2068830" cy="841248"/>
+              <a:t>Desenvolvimento</a:t>
+            </a:r>
+            <a:endParaRPr lang="en-US" sz="1150" dirty="0"/>
+          </a:p>
+        </p:txBody>
+      </p:sp>
+      <p:sp>
+        <p:nvSpPr>
+          <p:cNvPr id="17" name="Text 15"/>
+          <p:cNvSpPr/>
+          <p:nvPr/>
+        </p:nvSpPr>
+        <p:spPr>
+          <a:xfrm>
+            <a:off x="2411403" y="3547872"/>
+            <a:ext cx="1195251" cy="1097280"/>
           </a:xfrm>
           <a:prstGeom prst="rect">
             <a:avLst/>
@@ -8459,14 +9093,14 @@
           </a:bodyPr>
           <a:lstStyle/>
           <a:p>
-            <a:pPr indent="0" marL="0">
+            <a:pPr algn="ctr" indent="0" marL="0">
               <a:lnSpc>
-                <a:spcPts val="1500"/>
+                <a:spcPts val="1250"/>
               </a:lnSpc>
               <a:buNone/>
             </a:pPr>
             <a:r>
-              <a:rPr lang="en-US" sz="1100" dirty="0">
+              <a:rPr lang="en-US" sz="900" dirty="0">
                 <a:solidFill>
                   <a:srgbClr val="4A5568"/>
                 </a:solidFill>
@@ -8474,26 +9108,129 @@
                 <a:ea typeface="Calibri" pitchFamily="34" charset="-122"/>
                 <a:cs typeface="Calibri" pitchFamily="34" charset="-120"/>
               </a:rPr>
-              <a:t>Painel unificado integrando todas as áreas da concessionária</a:t>
-            </a:r>
-            <a:endParaRPr lang="en-US" sz="1100" dirty="0"/>
-          </a:p>
-        </p:txBody>
-      </p:sp>
-      <p:sp>
-        <p:nvSpPr>
-          <p:cNvPr id="9" name="Shape 7"/>
-          <p:cNvSpPr/>
-          <p:nvPr/>
-        </p:nvSpPr>
-        <p:spPr>
-          <a:xfrm>
-            <a:off x="3486150" y="1920240"/>
-            <a:ext cx="2507742" cy="1828800"/>
+              <a:t>construção da plataforma</a:t>
+            </a:r>
+            <a:endParaRPr lang="en-US" sz="900" dirty="0"/>
+          </a:p>
+        </p:txBody>
+      </p:sp>
+      <p:sp>
+        <p:nvSpPr>
+          <p:cNvPr id="18" name="Text 16"/>
+          <p:cNvSpPr/>
+          <p:nvPr/>
+        </p:nvSpPr>
+        <p:spPr>
+          <a:xfrm>
+            <a:off x="2319963" y="4434840"/>
+            <a:ext cx="1378131" cy="237744"/>
+          </a:xfrm>
+          <a:prstGeom prst="rect">
+            <a:avLst/>
+          </a:prstGeom>
+          <a:noFill/>
+          <a:ln/>
+        </p:spPr>
+        <p:txBody>
+          <a:bodyPr wrap="square" rtlCol="0" anchor="ctr"/>
+          <a:lstStyle/>
+          <a:p>
+            <a:pPr algn="ctr" indent="0" marL="0">
+              <a:buNone/>
+            </a:pPr>
+            <a:r>
+              <a:rPr lang="en-US" sz="800" b="1" spc="100" kern="0" dirty="0">
+                <a:solidFill>
+                  <a:srgbClr val="1E9E5A"/>
+                </a:solidFill>
+                <a:latin typeface="Calibri" pitchFamily="34" charset="0"/>
+                <a:ea typeface="Calibri" pitchFamily="34" charset="-122"/>
+                <a:cs typeface="Calibri" pitchFamily="34" charset="-120"/>
+              </a:rPr>
+              <a:t>ENTREGUE</a:t>
+            </a:r>
+            <a:endParaRPr lang="en-US" sz="800" dirty="0"/>
+          </a:p>
+        </p:txBody>
+      </p:sp>
+      <p:sp>
+        <p:nvSpPr>
+          <p:cNvPr id="19" name="Shape 17"/>
+          <p:cNvSpPr/>
+          <p:nvPr/>
+        </p:nvSpPr>
+        <p:spPr>
+          <a:xfrm>
+            <a:off x="4478601" y="2670048"/>
+            <a:ext cx="146304" cy="146304"/>
+          </a:xfrm>
+          <a:prstGeom prst="ellipse">
+            <a:avLst/>
+          </a:prstGeom>
+          <a:solidFill>
+            <a:srgbClr val="1E9E5A"/>
+          </a:solidFill>
+          <a:ln w="19050">
+            <a:solidFill>
+              <a:srgbClr val="FFFFFF"/>
+            </a:solidFill>
+            <a:prstDash val="solid"/>
+          </a:ln>
+        </p:spPr>
+      </p:sp>
+      <p:sp>
+        <p:nvSpPr>
+          <p:cNvPr id="20" name="Text 18"/>
+          <p:cNvSpPr/>
+          <p:nvPr/>
+        </p:nvSpPr>
+        <p:spPr>
+          <a:xfrm>
+            <a:off x="3862687" y="2148840"/>
+            <a:ext cx="1378131" cy="274320"/>
+          </a:xfrm>
+          <a:prstGeom prst="rect">
+            <a:avLst/>
+          </a:prstGeom>
+          <a:noFill/>
+          <a:ln/>
+        </p:spPr>
+        <p:txBody>
+          <a:bodyPr wrap="square" rtlCol="0" anchor="ctr"/>
+          <a:lstStyle/>
+          <a:p>
+            <a:pPr algn="ctr" indent="0" marL="0">
+              <a:buNone/>
+            </a:pPr>
+            <a:r>
+              <a:rPr lang="en-US" sz="1000" b="1" dirty="0">
+                <a:solidFill>
+                  <a:srgbClr val="4A5568"/>
+                </a:solidFill>
+                <a:latin typeface="Calibri" pitchFamily="34" charset="0"/>
+                <a:ea typeface="Calibri" pitchFamily="34" charset="-122"/>
+                <a:cs typeface="Calibri" pitchFamily="34" charset="-120"/>
+              </a:rPr>
+              <a:t>Mar–Abr</a:t>
+            </a:r>
+            <a:endParaRPr lang="en-US" sz="1000" dirty="0"/>
+          </a:p>
+        </p:txBody>
+      </p:sp>
+      <p:sp>
+        <p:nvSpPr>
+          <p:cNvPr id="21" name="Shape 19"/>
+          <p:cNvSpPr/>
+          <p:nvPr/>
+        </p:nvSpPr>
+        <p:spPr>
+          <a:xfrm>
+            <a:off x="3862687" y="3063240"/>
+            <a:ext cx="1378131" cy="1737360"/>
           </a:xfrm>
           <a:prstGeom prst="roundRect">
             <a:avLst>
-              <a:gd name="adj" fmla="val 1500"/>
+              <a:gd name="adj" fmla="val 2654"/>
             </a:avLst>
           </a:prstGeom>
           <a:solidFill>
@@ -8504,14 +9241,14 @@
       </p:sp>
       <p:sp>
         <p:nvSpPr>
-          <p:cNvPr id="10" name="Text 8"/>
-          <p:cNvSpPr/>
-          <p:nvPr/>
-        </p:nvSpPr>
-        <p:spPr>
-          <a:xfrm>
-            <a:off x="3705606" y="2121408"/>
-            <a:ext cx="2068830" cy="201168"/>
+          <p:cNvPr id="22" name="Text 20"/>
+          <p:cNvSpPr/>
+          <p:nvPr/>
+        </p:nvSpPr>
+        <p:spPr>
+          <a:xfrm>
+            <a:off x="3954127" y="3200400"/>
+            <a:ext cx="1195251" cy="292608"/>
           </a:xfrm>
           <a:prstGeom prst="rect">
             <a:avLst/>
@@ -8525,34 +9262,203 @@
           </a:bodyPr>
           <a:lstStyle/>
           <a:p>
-            <a:pPr indent="0" marL="0">
-              <a:buNone/>
-            </a:pPr>
-            <a:r>
-              <a:rPr lang="en-US" sz="950" b="1" spc="50" kern="0" dirty="0">
-                <a:solidFill>
-                  <a:srgbClr val="0365FE"/>
-                </a:solidFill>
-                <a:latin typeface="Calibri" pitchFamily="34" charset="0"/>
-                <a:ea typeface="Calibri" pitchFamily="34" charset="-122"/>
-                <a:cs typeface="Calibri" pitchFamily="34" charset="-120"/>
-              </a:rPr>
-              <a:t>02</a:t>
-            </a:r>
-            <a:endParaRPr lang="en-US" sz="950" dirty="0"/>
-          </a:p>
-        </p:txBody>
-      </p:sp>
-      <p:sp>
-        <p:nvSpPr>
-          <p:cNvPr id="11" name="Text 9"/>
-          <p:cNvSpPr/>
-          <p:nvPr/>
-        </p:nvSpPr>
-        <p:spPr>
-          <a:xfrm>
-            <a:off x="3705606" y="2377440"/>
-            <a:ext cx="2068830" cy="310896"/>
+            <a:pPr algn="ctr" indent="0" marL="0">
+              <a:buNone/>
+            </a:pPr>
+            <a:r>
+              <a:rPr lang="en-US" sz="1150" b="1" dirty="0">
+                <a:solidFill>
+                  <a:srgbClr val="091426"/>
+                </a:solidFill>
+                <a:latin typeface="Calibri" pitchFamily="34" charset="0"/>
+                <a:ea typeface="Calibri" pitchFamily="34" charset="-122"/>
+                <a:cs typeface="Calibri" pitchFamily="34" charset="-120"/>
+              </a:rPr>
+              <a:t>Integrações</a:t>
+            </a:r>
+            <a:endParaRPr lang="en-US" sz="1150" dirty="0"/>
+          </a:p>
+        </p:txBody>
+      </p:sp>
+      <p:sp>
+        <p:nvSpPr>
+          <p:cNvPr id="23" name="Text 21"/>
+          <p:cNvSpPr/>
+          <p:nvPr/>
+        </p:nvSpPr>
+        <p:spPr>
+          <a:xfrm>
+            <a:off x="3954127" y="3547872"/>
+            <a:ext cx="1195251" cy="1097280"/>
+          </a:xfrm>
+          <a:prstGeom prst="rect">
+            <a:avLst/>
+          </a:prstGeom>
+          <a:noFill/>
+          <a:ln/>
+        </p:spPr>
+        <p:txBody>
+          <a:bodyPr wrap="square" rtlCol="0" anchor="t">
+            <a:normAutofit/>
+          </a:bodyPr>
+          <a:lstStyle/>
+          <a:p>
+            <a:pPr algn="ctr" indent="0" marL="0">
+              <a:lnSpc>
+                <a:spcPts val="1250"/>
+              </a:lnSpc>
+              <a:buNone/>
+            </a:pPr>
+            <a:r>
+              <a:rPr lang="en-US" sz="900" dirty="0">
+                <a:solidFill>
+                  <a:srgbClr val="4A5568"/>
+                </a:solidFill>
+                <a:latin typeface="Calibri" pitchFamily="34" charset="0"/>
+                <a:ea typeface="Calibri" pitchFamily="34" charset="-122"/>
+                <a:cs typeface="Calibri" pitchFamily="34" charset="-120"/>
+              </a:rPr>
+              <a:t>conexões e testes</a:t>
+            </a:r>
+            <a:endParaRPr lang="en-US" sz="900" dirty="0"/>
+          </a:p>
+        </p:txBody>
+      </p:sp>
+      <p:sp>
+        <p:nvSpPr>
+          <p:cNvPr id="24" name="Text 22"/>
+          <p:cNvSpPr/>
+          <p:nvPr/>
+        </p:nvSpPr>
+        <p:spPr>
+          <a:xfrm>
+            <a:off x="3862687" y="4434840"/>
+            <a:ext cx="1378131" cy="237744"/>
+          </a:xfrm>
+          <a:prstGeom prst="rect">
+            <a:avLst/>
+          </a:prstGeom>
+          <a:noFill/>
+          <a:ln/>
+        </p:spPr>
+        <p:txBody>
+          <a:bodyPr wrap="square" rtlCol="0" anchor="ctr"/>
+          <a:lstStyle/>
+          <a:p>
+            <a:pPr algn="ctr" indent="0" marL="0">
+              <a:buNone/>
+            </a:pPr>
+            <a:r>
+              <a:rPr lang="en-US" sz="800" b="1" spc="100" kern="0" dirty="0">
+                <a:solidFill>
+                  <a:srgbClr val="1E9E5A"/>
+                </a:solidFill>
+                <a:latin typeface="Calibri" pitchFamily="34" charset="0"/>
+                <a:ea typeface="Calibri" pitchFamily="34" charset="-122"/>
+                <a:cs typeface="Calibri" pitchFamily="34" charset="-120"/>
+              </a:rPr>
+              <a:t>ENTREGUE</a:t>
+            </a:r>
+            <a:endParaRPr lang="en-US" sz="800" dirty="0"/>
+          </a:p>
+        </p:txBody>
+      </p:sp>
+      <p:sp>
+        <p:nvSpPr>
+          <p:cNvPr id="25" name="Shape 23"/>
+          <p:cNvSpPr/>
+          <p:nvPr/>
+        </p:nvSpPr>
+        <p:spPr>
+          <a:xfrm>
+            <a:off x="6021324" y="2670048"/>
+            <a:ext cx="146304" cy="146304"/>
+          </a:xfrm>
+          <a:prstGeom prst="ellipse">
+            <a:avLst/>
+          </a:prstGeom>
+          <a:solidFill>
+            <a:srgbClr val="1E9E5A"/>
+          </a:solidFill>
+          <a:ln w="19050">
+            <a:solidFill>
+              <a:srgbClr val="FFFFFF"/>
+            </a:solidFill>
+            <a:prstDash val="solid"/>
+          </a:ln>
+        </p:spPr>
+      </p:sp>
+      <p:sp>
+        <p:nvSpPr>
+          <p:cNvPr id="26" name="Text 24"/>
+          <p:cNvSpPr/>
+          <p:nvPr/>
+        </p:nvSpPr>
+        <p:spPr>
+          <a:xfrm>
+            <a:off x="5405410" y="2148840"/>
+            <a:ext cx="1378131" cy="274320"/>
+          </a:xfrm>
+          <a:prstGeom prst="rect">
+            <a:avLst/>
+          </a:prstGeom>
+          <a:noFill/>
+          <a:ln/>
+        </p:spPr>
+        <p:txBody>
+          <a:bodyPr wrap="square" rtlCol="0" anchor="ctr"/>
+          <a:lstStyle/>
+          <a:p>
+            <a:pPr algn="ctr" indent="0" marL="0">
+              <a:buNone/>
+            </a:pPr>
+            <a:r>
+              <a:rPr lang="en-US" sz="1000" b="1" dirty="0">
+                <a:solidFill>
+                  <a:srgbClr val="4A5568"/>
+                </a:solidFill>
+                <a:latin typeface="Calibri" pitchFamily="34" charset="0"/>
+                <a:ea typeface="Calibri" pitchFamily="34" charset="-122"/>
+                <a:cs typeface="Calibri" pitchFamily="34" charset="-120"/>
+              </a:rPr>
+              <a:t>Abr</a:t>
+            </a:r>
+            <a:endParaRPr lang="en-US" sz="1000" dirty="0"/>
+          </a:p>
+        </p:txBody>
+      </p:sp>
+      <p:sp>
+        <p:nvSpPr>
+          <p:cNvPr id="27" name="Shape 25"/>
+          <p:cNvSpPr/>
+          <p:nvPr/>
+        </p:nvSpPr>
+        <p:spPr>
+          <a:xfrm>
+            <a:off x="5405410" y="3063240"/>
+            <a:ext cx="1378131" cy="1737360"/>
+          </a:xfrm>
+          <a:prstGeom prst="roundRect">
+            <a:avLst>
+              <a:gd name="adj" fmla="val 2654"/>
+            </a:avLst>
+          </a:prstGeom>
+          <a:solidFill>
+            <a:srgbClr val="F7F9FC"/>
+          </a:solidFill>
+          <a:ln/>
+        </p:spPr>
+      </p:sp>
+      <p:sp>
+        <p:nvSpPr>
+          <p:cNvPr id="28" name="Text 26"/>
+          <p:cNvSpPr/>
+          <p:nvPr/>
+        </p:nvSpPr>
+        <p:spPr>
+          <a:xfrm>
+            <a:off x="5496850" y="3200400"/>
+            <a:ext cx="1195251" cy="292608"/>
           </a:xfrm>
           <a:prstGeom prst="rect">
             <a:avLst/>
@@ -8566,11 +9472,11 @@
           </a:bodyPr>
           <a:lstStyle/>
           <a:p>
-            <a:pPr indent="0" marL="0">
-              <a:buNone/>
-            </a:pPr>
-            <a:r>
-              <a:rPr lang="en-US" sz="1400" b="1" dirty="0">
+            <a:pPr algn="ctr" indent="0" marL="0">
+              <a:buNone/>
+            </a:pPr>
+            <a:r>
+              <a:rPr lang="en-US" sz="1150" b="1" dirty="0">
                 <a:solidFill>
                   <a:srgbClr val="091426"/>
                 </a:solidFill>
@@ -8578,22 +9484,22 @@
                 <a:ea typeface="Calibri" pitchFamily="34" charset="-122"/>
                 <a:cs typeface="Calibri" pitchFamily="34" charset="-120"/>
               </a:rPr>
-              <a:t>IA Analítica</a:t>
-            </a:r>
-            <a:endParaRPr lang="en-US" sz="1400" dirty="0"/>
-          </a:p>
-        </p:txBody>
-      </p:sp>
-      <p:sp>
-        <p:nvSpPr>
-          <p:cNvPr id="12" name="Text 10"/>
-          <p:cNvSpPr/>
-          <p:nvPr/>
-        </p:nvSpPr>
-        <p:spPr>
-          <a:xfrm>
-            <a:off x="3705606" y="2743200"/>
-            <a:ext cx="2068830" cy="841248"/>
+              <a:t>Treinamento</a:t>
+            </a:r>
+            <a:endParaRPr lang="en-US" sz="1150" dirty="0"/>
+          </a:p>
+        </p:txBody>
+      </p:sp>
+      <p:sp>
+        <p:nvSpPr>
+          <p:cNvPr id="29" name="Text 27"/>
+          <p:cNvSpPr/>
+          <p:nvPr/>
+        </p:nvSpPr>
+        <p:spPr>
+          <a:xfrm>
+            <a:off x="5496850" y="3547872"/>
+            <a:ext cx="1195251" cy="1097280"/>
           </a:xfrm>
           <a:prstGeom prst="rect">
             <a:avLst/>
@@ -8607,14 +9513,14 @@
           </a:bodyPr>
           <a:lstStyle/>
           <a:p>
-            <a:pPr indent="0" marL="0">
+            <a:pPr algn="ctr" indent="0" marL="0">
               <a:lnSpc>
-                <a:spcPts val="1500"/>
+                <a:spcPts val="1250"/>
               </a:lnSpc>
               <a:buNone/>
             </a:pPr>
             <a:r>
-              <a:rPr lang="en-US" sz="1100" dirty="0">
+              <a:rPr lang="en-US" sz="900" dirty="0">
                 <a:solidFill>
                   <a:srgbClr val="4A5568"/>
                 </a:solidFill>
@@ -8622,26 +9528,129 @@
                 <a:ea typeface="Calibri" pitchFamily="34" charset="-122"/>
                 <a:cs typeface="Calibri" pitchFamily="34" charset="-120"/>
               </a:rPr>
-              <a:t>Insights, recomendações e predições automáticas em tempo real</a:t>
-            </a:r>
-            <a:endParaRPr lang="en-US" sz="1100" dirty="0"/>
-          </a:p>
-        </p:txBody>
-      </p:sp>
-      <p:sp>
-        <p:nvSpPr>
-          <p:cNvPr id="13" name="Shape 11"/>
-          <p:cNvSpPr/>
-          <p:nvPr/>
-        </p:nvSpPr>
-        <p:spPr>
-          <a:xfrm>
-            <a:off x="6195060" y="1920240"/>
-            <a:ext cx="2507742" cy="1828800"/>
+              <a:t>capacitação das equipes</a:t>
+            </a:r>
+            <a:endParaRPr lang="en-US" sz="900" dirty="0"/>
+          </a:p>
+        </p:txBody>
+      </p:sp>
+      <p:sp>
+        <p:nvSpPr>
+          <p:cNvPr id="30" name="Text 28"/>
+          <p:cNvSpPr/>
+          <p:nvPr/>
+        </p:nvSpPr>
+        <p:spPr>
+          <a:xfrm>
+            <a:off x="5405410" y="4434840"/>
+            <a:ext cx="1378131" cy="237744"/>
+          </a:xfrm>
+          <a:prstGeom prst="rect">
+            <a:avLst/>
+          </a:prstGeom>
+          <a:noFill/>
+          <a:ln/>
+        </p:spPr>
+        <p:txBody>
+          <a:bodyPr wrap="square" rtlCol="0" anchor="ctr"/>
+          <a:lstStyle/>
+          <a:p>
+            <a:pPr algn="ctr" indent="0" marL="0">
+              <a:buNone/>
+            </a:pPr>
+            <a:r>
+              <a:rPr lang="en-US" sz="800" b="1" spc="100" kern="0" dirty="0">
+                <a:solidFill>
+                  <a:srgbClr val="1E9E5A"/>
+                </a:solidFill>
+                <a:latin typeface="Calibri" pitchFamily="34" charset="0"/>
+                <a:ea typeface="Calibri" pitchFamily="34" charset="-122"/>
+                <a:cs typeface="Calibri" pitchFamily="34" charset="-120"/>
+              </a:rPr>
+              <a:t>ENTREGUE</a:t>
+            </a:r>
+            <a:endParaRPr lang="en-US" sz="800" dirty="0"/>
+          </a:p>
+        </p:txBody>
+      </p:sp>
+      <p:sp>
+        <p:nvSpPr>
+          <p:cNvPr id="31" name="Shape 29"/>
+          <p:cNvSpPr/>
+          <p:nvPr/>
+        </p:nvSpPr>
+        <p:spPr>
+          <a:xfrm>
+            <a:off x="7564047" y="2670048"/>
+            <a:ext cx="146304" cy="146304"/>
+          </a:xfrm>
+          <a:prstGeom prst="ellipse">
+            <a:avLst/>
+          </a:prstGeom>
+          <a:solidFill>
+            <a:srgbClr val="1E9E5A"/>
+          </a:solidFill>
+          <a:ln w="19050">
+            <a:solidFill>
+              <a:srgbClr val="FFFFFF"/>
+            </a:solidFill>
+            <a:prstDash val="solid"/>
+          </a:ln>
+        </p:spPr>
+      </p:sp>
+      <p:sp>
+        <p:nvSpPr>
+          <p:cNvPr id="32" name="Text 30"/>
+          <p:cNvSpPr/>
+          <p:nvPr/>
+        </p:nvSpPr>
+        <p:spPr>
+          <a:xfrm>
+            <a:off x="6948134" y="2148840"/>
+            <a:ext cx="1378131" cy="274320"/>
+          </a:xfrm>
+          <a:prstGeom prst="rect">
+            <a:avLst/>
+          </a:prstGeom>
+          <a:noFill/>
+          <a:ln/>
+        </p:spPr>
+        <p:txBody>
+          <a:bodyPr wrap="square" rtlCol="0" anchor="ctr"/>
+          <a:lstStyle/>
+          <a:p>
+            <a:pPr algn="ctr" indent="0" marL="0">
+              <a:buNone/>
+            </a:pPr>
+            <a:r>
+              <a:rPr lang="en-US" sz="1000" b="1" dirty="0">
+                <a:solidFill>
+                  <a:srgbClr val="4A5568"/>
+                </a:solidFill>
+                <a:latin typeface="Calibri" pitchFamily="34" charset="0"/>
+                <a:ea typeface="Calibri" pitchFamily="34" charset="-122"/>
+                <a:cs typeface="Calibri" pitchFamily="34" charset="-120"/>
+              </a:rPr>
+              <a:t>Abr–Mai</a:t>
+            </a:r>
+            <a:endParaRPr lang="en-US" sz="1000" dirty="0"/>
+          </a:p>
+        </p:txBody>
+      </p:sp>
+      <p:sp>
+        <p:nvSpPr>
+          <p:cNvPr id="33" name="Shape 31"/>
+          <p:cNvSpPr/>
+          <p:nvPr/>
+        </p:nvSpPr>
+        <p:spPr>
+          <a:xfrm>
+            <a:off x="6948134" y="3063240"/>
+            <a:ext cx="1378131" cy="1737360"/>
           </a:xfrm>
           <a:prstGeom prst="roundRect">
             <a:avLst>
-              <a:gd name="adj" fmla="val 1500"/>
+              <a:gd name="adj" fmla="val 2654"/>
             </a:avLst>
           </a:prstGeom>
           <a:solidFill>
@@ -8652,14 +9661,14 @@
       </p:sp>
       <p:sp>
         <p:nvSpPr>
-          <p:cNvPr id="14" name="Text 12"/>
-          <p:cNvSpPr/>
-          <p:nvPr/>
-        </p:nvSpPr>
-        <p:spPr>
-          <a:xfrm>
-            <a:off x="6414516" y="2121408"/>
-            <a:ext cx="2068830" cy="201168"/>
+          <p:cNvPr id="34" name="Text 32"/>
+          <p:cNvSpPr/>
+          <p:nvPr/>
+        </p:nvSpPr>
+        <p:spPr>
+          <a:xfrm>
+            <a:off x="7039574" y="3200400"/>
+            <a:ext cx="1195251" cy="292608"/>
           </a:xfrm>
           <a:prstGeom prst="rect">
             <a:avLst/>
@@ -8673,34 +9682,203 @@
           </a:bodyPr>
           <a:lstStyle/>
           <a:p>
-            <a:pPr indent="0" marL="0">
-              <a:buNone/>
-            </a:pPr>
-            <a:r>
-              <a:rPr lang="en-US" sz="950" b="1" spc="50" kern="0" dirty="0">
-                <a:solidFill>
-                  <a:srgbClr val="0365FE"/>
-                </a:solidFill>
-                <a:latin typeface="Calibri" pitchFamily="34" charset="0"/>
-                <a:ea typeface="Calibri" pitchFamily="34" charset="-122"/>
-                <a:cs typeface="Calibri" pitchFamily="34" charset="-120"/>
-              </a:rPr>
-              <a:t>03</a:t>
-            </a:r>
-            <a:endParaRPr lang="en-US" sz="950" dirty="0"/>
-          </a:p>
-        </p:txBody>
-      </p:sp>
-      <p:sp>
-        <p:nvSpPr>
-          <p:cNvPr id="15" name="Text 13"/>
-          <p:cNvSpPr/>
-          <p:nvPr/>
-        </p:nvSpPr>
-        <p:spPr>
-          <a:xfrm>
-            <a:off x="6414516" y="2377440"/>
-            <a:ext cx="2068830" cy="310896"/>
+            <a:pPr algn="ctr" indent="0" marL="0">
+              <a:buNone/>
+            </a:pPr>
+            <a:r>
+              <a:rPr lang="en-US" sz="1150" b="1" dirty="0">
+                <a:solidFill>
+                  <a:srgbClr val="091426"/>
+                </a:solidFill>
+                <a:latin typeface="Calibri" pitchFamily="34" charset="0"/>
+                <a:ea typeface="Calibri" pitchFamily="34" charset="-122"/>
+                <a:cs typeface="Calibri" pitchFamily="34" charset="-120"/>
+              </a:rPr>
+              <a:t>Piloto</a:t>
+            </a:r>
+            <a:endParaRPr lang="en-US" sz="1150" dirty="0"/>
+          </a:p>
+        </p:txBody>
+      </p:sp>
+      <p:sp>
+        <p:nvSpPr>
+          <p:cNvPr id="35" name="Text 33"/>
+          <p:cNvSpPr/>
+          <p:nvPr/>
+        </p:nvSpPr>
+        <p:spPr>
+          <a:xfrm>
+            <a:off x="7039574" y="3547872"/>
+            <a:ext cx="1195251" cy="1097280"/>
+          </a:xfrm>
+          <a:prstGeom prst="rect">
+            <a:avLst/>
+          </a:prstGeom>
+          <a:noFill/>
+          <a:ln/>
+        </p:spPr>
+        <p:txBody>
+          <a:bodyPr wrap="square" rtlCol="0" anchor="t">
+            <a:normAutofit/>
+          </a:bodyPr>
+          <a:lstStyle/>
+          <a:p>
+            <a:pPr algn="ctr" indent="0" marL="0">
+              <a:lnSpc>
+                <a:spcPts val="1250"/>
+              </a:lnSpc>
+              <a:buNone/>
+            </a:pPr>
+            <a:r>
+              <a:rPr lang="en-US" sz="900" dirty="0">
+                <a:solidFill>
+                  <a:srgbClr val="4A5568"/>
+                </a:solidFill>
+                <a:latin typeface="Calibri" pitchFamily="34" charset="0"/>
+                <a:ea typeface="Calibri" pitchFamily="34" charset="-122"/>
+                <a:cs typeface="Calibri" pitchFamily="34" charset="-120"/>
+              </a:rPr>
+              <a:t>implantação Nippon Motos</a:t>
+            </a:r>
+            <a:endParaRPr lang="en-US" sz="900" dirty="0"/>
+          </a:p>
+        </p:txBody>
+      </p:sp>
+      <p:sp>
+        <p:nvSpPr>
+          <p:cNvPr id="36" name="Text 34"/>
+          <p:cNvSpPr/>
+          <p:nvPr/>
+        </p:nvSpPr>
+        <p:spPr>
+          <a:xfrm>
+            <a:off x="6948134" y="4434840"/>
+            <a:ext cx="1378131" cy="237744"/>
+          </a:xfrm>
+          <a:prstGeom prst="rect">
+            <a:avLst/>
+          </a:prstGeom>
+          <a:noFill/>
+          <a:ln/>
+        </p:spPr>
+        <p:txBody>
+          <a:bodyPr wrap="square" rtlCol="0" anchor="ctr"/>
+          <a:lstStyle/>
+          <a:p>
+            <a:pPr algn="ctr" indent="0" marL="0">
+              <a:buNone/>
+            </a:pPr>
+            <a:r>
+              <a:rPr lang="en-US" sz="800" b="1" spc="100" kern="0" dirty="0">
+                <a:solidFill>
+                  <a:srgbClr val="1E9E5A"/>
+                </a:solidFill>
+                <a:latin typeface="Calibri" pitchFamily="34" charset="0"/>
+                <a:ea typeface="Calibri" pitchFamily="34" charset="-122"/>
+                <a:cs typeface="Calibri" pitchFamily="34" charset="-120"/>
+              </a:rPr>
+              <a:t>ENTREGUE</a:t>
+            </a:r>
+            <a:endParaRPr lang="en-US" sz="800" dirty="0"/>
+          </a:p>
+        </p:txBody>
+      </p:sp>
+      <p:sp>
+        <p:nvSpPr>
+          <p:cNvPr id="37" name="Shape 35"/>
+          <p:cNvSpPr/>
+          <p:nvPr/>
+        </p:nvSpPr>
+        <p:spPr>
+          <a:xfrm>
+            <a:off x="9106771" y="2670048"/>
+            <a:ext cx="146304" cy="146304"/>
+          </a:xfrm>
+          <a:prstGeom prst="ellipse">
+            <a:avLst/>
+          </a:prstGeom>
+          <a:solidFill>
+            <a:srgbClr val="1E9E5A"/>
+          </a:solidFill>
+          <a:ln w="19050">
+            <a:solidFill>
+              <a:srgbClr val="FFFFFF"/>
+            </a:solidFill>
+            <a:prstDash val="solid"/>
+          </a:ln>
+        </p:spPr>
+      </p:sp>
+      <p:sp>
+        <p:nvSpPr>
+          <p:cNvPr id="38" name="Text 36"/>
+          <p:cNvSpPr/>
+          <p:nvPr/>
+        </p:nvSpPr>
+        <p:spPr>
+          <a:xfrm>
+            <a:off x="8490857" y="2148840"/>
+            <a:ext cx="1378131" cy="274320"/>
+          </a:xfrm>
+          <a:prstGeom prst="rect">
+            <a:avLst/>
+          </a:prstGeom>
+          <a:noFill/>
+          <a:ln/>
+        </p:spPr>
+        <p:txBody>
+          <a:bodyPr wrap="square" rtlCol="0" anchor="ctr"/>
+          <a:lstStyle/>
+          <a:p>
+            <a:pPr algn="ctr" indent="0" marL="0">
+              <a:buNone/>
+            </a:pPr>
+            <a:r>
+              <a:rPr lang="en-US" sz="1000" b="1" dirty="0">
+                <a:solidFill>
+                  <a:srgbClr val="4A5568"/>
+                </a:solidFill>
+                <a:latin typeface="Calibri" pitchFamily="34" charset="0"/>
+                <a:ea typeface="Calibri" pitchFamily="34" charset="-122"/>
+                <a:cs typeface="Calibri" pitchFamily="34" charset="-120"/>
+              </a:rPr>
+              <a:t>Jul–Ago</a:t>
+            </a:r>
+            <a:endParaRPr lang="en-US" sz="1000" dirty="0"/>
+          </a:p>
+        </p:txBody>
+      </p:sp>
+      <p:sp>
+        <p:nvSpPr>
+          <p:cNvPr id="39" name="Shape 37"/>
+          <p:cNvSpPr/>
+          <p:nvPr/>
+        </p:nvSpPr>
+        <p:spPr>
+          <a:xfrm>
+            <a:off x="8490857" y="3063240"/>
+            <a:ext cx="1378131" cy="1737360"/>
+          </a:xfrm>
+          <a:prstGeom prst="roundRect">
+            <a:avLst>
+              <a:gd name="adj" fmla="val 2654"/>
+            </a:avLst>
+          </a:prstGeom>
+          <a:solidFill>
+            <a:srgbClr val="F7F9FC"/>
+          </a:solidFill>
+          <a:ln/>
+        </p:spPr>
+      </p:sp>
+      <p:sp>
+        <p:nvSpPr>
+          <p:cNvPr id="40" name="Text 38"/>
+          <p:cNvSpPr/>
+          <p:nvPr/>
+        </p:nvSpPr>
+        <p:spPr>
+          <a:xfrm>
+            <a:off x="8582297" y="3200400"/>
+            <a:ext cx="1195251" cy="292608"/>
           </a:xfrm>
           <a:prstGeom prst="rect">
             <a:avLst/>
@@ -8714,11 +9892,11 @@
           </a:bodyPr>
           <a:lstStyle/>
           <a:p>
-            <a:pPr indent="0" marL="0">
-              <a:buNone/>
-            </a:pPr>
-            <a:r>
-              <a:rPr lang="en-US" sz="1400" b="1" dirty="0">
+            <a:pPr algn="ctr" indent="0" marL="0">
+              <a:buNone/>
+            </a:pPr>
+            <a:r>
+              <a:rPr lang="en-US" sz="1150" b="1" dirty="0">
                 <a:solidFill>
                   <a:srgbClr val="091426"/>
                 </a:solidFill>
@@ -8726,22 +9904,22 @@
                 <a:ea typeface="Calibri" pitchFamily="34" charset="-122"/>
                 <a:cs typeface="Calibri" pitchFamily="34" charset="-120"/>
               </a:rPr>
-              <a:t>Dashboard Integrado</a:t>
-            </a:r>
-            <a:endParaRPr lang="en-US" sz="1400" dirty="0"/>
-          </a:p>
-        </p:txBody>
-      </p:sp>
-      <p:sp>
-        <p:nvSpPr>
-          <p:cNvPr id="16" name="Text 14"/>
-          <p:cNvSpPr/>
-          <p:nvPr/>
-        </p:nvSpPr>
-        <p:spPr>
-          <a:xfrm>
-            <a:off x="6414516" y="2743200"/>
-            <a:ext cx="2068830" cy="841248"/>
+              <a:t>PDCA</a:t>
+            </a:r>
+            <a:endParaRPr lang="en-US" sz="1150" dirty="0"/>
+          </a:p>
+        </p:txBody>
+      </p:sp>
+      <p:sp>
+        <p:nvSpPr>
+          <p:cNvPr id="41" name="Text 39"/>
+          <p:cNvSpPr/>
+          <p:nvPr/>
+        </p:nvSpPr>
+        <p:spPr>
+          <a:xfrm>
+            <a:off x="8582297" y="3547872"/>
+            <a:ext cx="1195251" cy="1097280"/>
           </a:xfrm>
           <a:prstGeom prst="rect">
             <a:avLst/>
@@ -8755,14 +9933,14 @@
           </a:bodyPr>
           <a:lstStyle/>
           <a:p>
-            <a:pPr indent="0" marL="0">
+            <a:pPr algn="ctr" indent="0" marL="0">
               <a:lnSpc>
-                <a:spcPts val="1500"/>
+                <a:spcPts val="1250"/>
               </a:lnSpc>
               <a:buNone/>
             </a:pPr>
             <a:r>
-              <a:rPr lang="en-US" sz="1100" dirty="0">
+              <a:rPr lang="en-US" sz="900" dirty="0">
                 <a:solidFill>
                   <a:srgbClr val="4A5568"/>
                 </a:solidFill>
@@ -8770,44 +9948,152 @@
                 <a:ea typeface="Calibri" pitchFamily="34" charset="-122"/>
                 <a:cs typeface="Calibri" pitchFamily="34" charset="-120"/>
               </a:rPr>
-              <a:t>KPIs ao vivo para vendedor, gerente e concessionário</a:t>
-            </a:r>
-            <a:endParaRPr lang="en-US" sz="1100" dirty="0"/>
-          </a:p>
-        </p:txBody>
-      </p:sp>
-      <p:sp>
-        <p:nvSpPr>
-          <p:cNvPr id="17" name="Shape 15"/>
-          <p:cNvSpPr/>
-          <p:nvPr/>
-        </p:nvSpPr>
-        <p:spPr>
-          <a:xfrm>
-            <a:off x="8903970" y="1920240"/>
-            <a:ext cx="2507742" cy="1828800"/>
+              <a:t>melhoria contínua + novas frentes</a:t>
+            </a:r>
+            <a:endParaRPr lang="en-US" sz="900" dirty="0"/>
+          </a:p>
+        </p:txBody>
+      </p:sp>
+      <p:sp>
+        <p:nvSpPr>
+          <p:cNvPr id="42" name="Text 40"/>
+          <p:cNvSpPr/>
+          <p:nvPr/>
+        </p:nvSpPr>
+        <p:spPr>
+          <a:xfrm>
+            <a:off x="8490857" y="4434840"/>
+            <a:ext cx="1378131" cy="237744"/>
+          </a:xfrm>
+          <a:prstGeom prst="rect">
+            <a:avLst/>
+          </a:prstGeom>
+          <a:noFill/>
+          <a:ln/>
+        </p:spPr>
+        <p:txBody>
+          <a:bodyPr wrap="square" rtlCol="0" anchor="ctr"/>
+          <a:lstStyle/>
+          <a:p>
+            <a:pPr algn="ctr" indent="0" marL="0">
+              <a:buNone/>
+            </a:pPr>
+            <a:r>
+              <a:rPr lang="en-US" sz="800" b="1" spc="100" kern="0" dirty="0">
+                <a:solidFill>
+                  <a:srgbClr val="1E9E5A"/>
+                </a:solidFill>
+                <a:latin typeface="Calibri" pitchFamily="34" charset="0"/>
+                <a:ea typeface="Calibri" pitchFamily="34" charset="-122"/>
+                <a:cs typeface="Calibri" pitchFamily="34" charset="-120"/>
+              </a:rPr>
+              <a:t>ENTREGUE</a:t>
+            </a:r>
+            <a:endParaRPr lang="en-US" sz="800" dirty="0"/>
+          </a:p>
+        </p:txBody>
+      </p:sp>
+      <p:sp>
+        <p:nvSpPr>
+          <p:cNvPr id="43" name="Shape 41"/>
+          <p:cNvSpPr/>
+          <p:nvPr/>
+        </p:nvSpPr>
+        <p:spPr>
+          <a:xfrm>
+            <a:off x="10649494" y="2670048"/>
+            <a:ext cx="146304" cy="146304"/>
+          </a:xfrm>
+          <a:prstGeom prst="ellipse">
+            <a:avLst/>
+          </a:prstGeom>
+          <a:solidFill>
+            <a:srgbClr val="0365FE"/>
+          </a:solidFill>
+          <a:ln w="19050">
+            <a:solidFill>
+              <a:srgbClr val="FFFFFF"/>
+            </a:solidFill>
+            <a:prstDash val="solid"/>
+          </a:ln>
+        </p:spPr>
+      </p:sp>
+      <p:sp>
+        <p:nvSpPr>
+          <p:cNvPr id="44" name="Text 42"/>
+          <p:cNvSpPr/>
+          <p:nvPr/>
+        </p:nvSpPr>
+        <p:spPr>
+          <a:xfrm>
+            <a:off x="10033581" y="2148840"/>
+            <a:ext cx="1378131" cy="274320"/>
+          </a:xfrm>
+          <a:prstGeom prst="rect">
+            <a:avLst/>
+          </a:prstGeom>
+          <a:noFill/>
+          <a:ln/>
+        </p:spPr>
+        <p:txBody>
+          <a:bodyPr wrap="square" rtlCol="0" anchor="ctr"/>
+          <a:lstStyle/>
+          <a:p>
+            <a:pPr algn="ctr" indent="0" marL="0">
+              <a:buNone/>
+            </a:pPr>
+            <a:r>
+              <a:rPr lang="en-US" sz="1000" b="1" dirty="0">
+                <a:solidFill>
+                  <a:srgbClr val="0365FE"/>
+                </a:solidFill>
+                <a:latin typeface="Calibri" pitchFamily="34" charset="0"/>
+                <a:ea typeface="Calibri" pitchFamily="34" charset="-122"/>
+                <a:cs typeface="Calibri" pitchFamily="34" charset="-120"/>
+              </a:rPr>
+              <a:t>Set–Dez</a:t>
+            </a:r>
+            <a:endParaRPr lang="en-US" sz="1000" dirty="0"/>
+          </a:p>
+        </p:txBody>
+      </p:sp>
+      <p:sp>
+        <p:nvSpPr>
+          <p:cNvPr id="45" name="Shape 43"/>
+          <p:cNvSpPr/>
+          <p:nvPr/>
+        </p:nvSpPr>
+        <p:spPr>
+          <a:xfrm>
+            <a:off x="10033581" y="3063240"/>
+            <a:ext cx="1378131" cy="1737360"/>
           </a:xfrm>
           <a:prstGeom prst="roundRect">
             <a:avLst>
-              <a:gd name="adj" fmla="val 1500"/>
+              <a:gd name="adj" fmla="val 2654"/>
             </a:avLst>
           </a:prstGeom>
           <a:solidFill>
-            <a:srgbClr val="F7F9FC"/>
+            <a:srgbClr val="EEF4FF"/>
           </a:solidFill>
-          <a:ln/>
-        </p:spPr>
-      </p:sp>
-      <p:sp>
-        <p:nvSpPr>
-          <p:cNvPr id="18" name="Text 16"/>
-          <p:cNvSpPr/>
-          <p:nvPr/>
-        </p:nvSpPr>
-        <p:spPr>
-          <a:xfrm>
-            <a:off x="9123426" y="2121408"/>
-            <a:ext cx="2068830" cy="201168"/>
+          <a:ln w="12700">
+            <a:solidFill>
+              <a:srgbClr val="0365FE"/>
+            </a:solidFill>
+            <a:prstDash val="solid"/>
+          </a:ln>
+        </p:spPr>
+      </p:sp>
+      <p:sp>
+        <p:nvSpPr>
+          <p:cNvPr id="46" name="Text 44"/>
+          <p:cNvSpPr/>
+          <p:nvPr/>
+        </p:nvSpPr>
+        <p:spPr>
+          <a:xfrm>
+            <a:off x="10125021" y="3200400"/>
+            <a:ext cx="1195251" cy="292608"/>
           </a:xfrm>
           <a:prstGeom prst="rect">
             <a:avLst/>
@@ -8821,52 +10107,11 @@
           </a:bodyPr>
           <a:lstStyle/>
           <a:p>
-            <a:pPr indent="0" marL="0">
-              <a:buNone/>
-            </a:pPr>
-            <a:r>
-              <a:rPr lang="en-US" sz="950" b="1" spc="50" kern="0" dirty="0">
-                <a:solidFill>
-                  <a:srgbClr val="0365FE"/>
-                </a:solidFill>
-                <a:latin typeface="Calibri" pitchFamily="34" charset="0"/>
-                <a:ea typeface="Calibri" pitchFamily="34" charset="-122"/>
-                <a:cs typeface="Calibri" pitchFamily="34" charset="-120"/>
-              </a:rPr>
-              <a:t>04</a:t>
-            </a:r>
-            <a:endParaRPr lang="en-US" sz="950" dirty="0"/>
-          </a:p>
-        </p:txBody>
-      </p:sp>
-      <p:sp>
-        <p:nvSpPr>
-          <p:cNvPr id="19" name="Text 17"/>
-          <p:cNvSpPr/>
-          <p:nvPr/>
-        </p:nvSpPr>
-        <p:spPr>
-          <a:xfrm>
-            <a:off x="9123426" y="2377440"/>
-            <a:ext cx="2068830" cy="310896"/>
-          </a:xfrm>
-          <a:prstGeom prst="rect">
-            <a:avLst/>
-          </a:prstGeom>
-          <a:noFill/>
-          <a:ln/>
-        </p:spPr>
-        <p:txBody>
-          <a:bodyPr wrap="square" rtlCol="0" anchor="ctr">
-            <a:normAutofit/>
-          </a:bodyPr>
-          <a:lstStyle/>
-          <a:p>
-            <a:pPr indent="0" marL="0">
-              <a:buNone/>
-            </a:pPr>
-            <a:r>
-              <a:rPr lang="en-US" sz="1400" b="1" dirty="0">
+            <a:pPr algn="ctr" indent="0" marL="0">
+              <a:buNone/>
+            </a:pPr>
+            <a:r>
+              <a:rPr lang="en-US" sz="1150" b="1" dirty="0">
                 <a:solidFill>
                   <a:srgbClr val="091426"/>
                 </a:solidFill>
@@ -8874,22 +10119,22 @@
                 <a:ea typeface="Calibri" pitchFamily="34" charset="-122"/>
                 <a:cs typeface="Calibri" pitchFamily="34" charset="-120"/>
               </a:rPr>
-              <a:t>Gestão da Experiência</a:t>
-            </a:r>
-            <a:endParaRPr lang="en-US" sz="1400" dirty="0"/>
-          </a:p>
-        </p:txBody>
-      </p:sp>
-      <p:sp>
-        <p:nvSpPr>
-          <p:cNvPr id="20" name="Text 18"/>
-          <p:cNvSpPr/>
-          <p:nvPr/>
-        </p:nvSpPr>
-        <p:spPr>
-          <a:xfrm>
-            <a:off x="9123426" y="2743200"/>
-            <a:ext cx="2068830" cy="841248"/>
+              <a:t>Fase 2</a:t>
+            </a:r>
+            <a:endParaRPr lang="en-US" sz="1150" dirty="0"/>
+          </a:p>
+        </p:txBody>
+      </p:sp>
+      <p:sp>
+        <p:nvSpPr>
+          <p:cNvPr id="47" name="Text 45"/>
+          <p:cNvSpPr/>
+          <p:nvPr/>
+        </p:nvSpPr>
+        <p:spPr>
+          <a:xfrm>
+            <a:off x="10125021" y="3547872"/>
+            <a:ext cx="1195251" cy="1097280"/>
           </a:xfrm>
           <a:prstGeom prst="rect">
             <a:avLst/>
@@ -8903,14 +10148,14 @@
           </a:bodyPr>
           <a:lstStyle/>
           <a:p>
-            <a:pPr indent="0" marL="0">
+            <a:pPr algn="ctr" indent="0" marL="0">
               <a:lnSpc>
-                <a:spcPts val="1500"/>
+                <a:spcPts val="1250"/>
               </a:lnSpc>
               <a:buNone/>
             </a:pPr>
             <a:r>
-              <a:rPr lang="en-US" sz="1100" dirty="0">
+              <a:rPr lang="en-US" sz="900" dirty="0">
                 <a:solidFill>
                   <a:srgbClr val="4A5568"/>
                 </a:solidFill>
@@ -8918,22 +10163,22 @@
                 <a:ea typeface="Calibri" pitchFamily="34" charset="-122"/>
                 <a:cs typeface="Calibri" pitchFamily="34" charset="-120"/>
               </a:rPr>
-              <a:t>Jornada do cliente centralizada, fluida e sem repetições</a:t>
-            </a:r>
-            <a:endParaRPr lang="en-US" sz="1100" dirty="0"/>
-          </a:p>
-        </p:txBody>
-      </p:sp>
-      <p:sp>
-        <p:nvSpPr>
-          <p:cNvPr id="21" name="Text 19"/>
-          <p:cNvSpPr/>
-          <p:nvPr/>
-        </p:nvSpPr>
-        <p:spPr>
-          <a:xfrm>
-            <a:off x="777240" y="4160520"/>
-            <a:ext cx="10634472" cy="237744"/>
+              <a:t>rollout regional — 9 grupos</a:t>
+            </a:r>
+            <a:endParaRPr lang="en-US" sz="900" dirty="0"/>
+          </a:p>
+        </p:txBody>
+      </p:sp>
+      <p:sp>
+        <p:nvSpPr>
+          <p:cNvPr id="48" name="Text 46"/>
+          <p:cNvSpPr/>
+          <p:nvPr/>
+        </p:nvSpPr>
+        <p:spPr>
+          <a:xfrm>
+            <a:off x="777240" y="5120640"/>
+            <a:ext cx="10634472" cy="292608"/>
           </a:xfrm>
           <a:prstGeom prst="rect">
             <a:avLst/>
@@ -8945,758 +10190,21 @@
           <a:bodyPr wrap="square" rtlCol="0" anchor="ctr"/>
           <a:lstStyle/>
           <a:p>
-            <a:pPr indent="0" marL="0">
-              <a:buNone/>
-            </a:pPr>
-            <a:r>
-              <a:rPr lang="en-US" sz="1000" b="1" spc="150" kern="0" dirty="0">
-                <a:solidFill>
-                  <a:srgbClr val="0365FE"/>
-                </a:solidFill>
-                <a:latin typeface="Calibri" pitchFamily="34" charset="0"/>
-                <a:ea typeface="Calibri" pitchFamily="34" charset="-122"/>
-                <a:cs typeface="Calibri" pitchFamily="34" charset="-120"/>
-              </a:rPr>
-              <a:t>INTEGRAÇÕES</a:t>
-            </a:r>
-            <a:endParaRPr lang="en-US" sz="1000" dirty="0"/>
-          </a:p>
-        </p:txBody>
-      </p:sp>
-      <p:sp>
-        <p:nvSpPr>
-          <p:cNvPr id="22" name="Shape 20"/>
-          <p:cNvSpPr/>
-          <p:nvPr/>
-        </p:nvSpPr>
-        <p:spPr>
-          <a:xfrm>
-            <a:off x="777240" y="4526280"/>
-            <a:ext cx="898855" cy="502920"/>
-          </a:xfrm>
-          <a:prstGeom prst="roundRect">
-            <a:avLst>
-              <a:gd name="adj" fmla="val 49091"/>
-            </a:avLst>
-          </a:prstGeom>
-          <a:solidFill>
-            <a:srgbClr val="F7F9FC"/>
-          </a:solidFill>
-          <a:ln/>
-        </p:spPr>
-      </p:sp>
-      <p:sp>
-        <p:nvSpPr>
-          <p:cNvPr id="23" name="Text 21"/>
-          <p:cNvSpPr/>
-          <p:nvPr/>
-        </p:nvSpPr>
-        <p:spPr>
-          <a:xfrm>
-            <a:off x="722376" y="4526280"/>
-            <a:ext cx="1008583" cy="502920"/>
-          </a:xfrm>
-          <a:prstGeom prst="rect">
-            <a:avLst/>
-          </a:prstGeom>
-          <a:noFill/>
-          <a:ln/>
-        </p:spPr>
-        <p:txBody>
-          <a:bodyPr wrap="square" rtlCol="0" anchor="ctr">
-            <a:normAutofit/>
-          </a:bodyPr>
-          <a:lstStyle/>
-          <a:p>
             <a:pPr algn="ctr" indent="0" marL="0">
               <a:buNone/>
             </a:pPr>
             <a:r>
-              <a:rPr lang="en-US" sz="850" b="1" dirty="0">
-                <a:solidFill>
-                  <a:srgbClr val="4A5568"/>
-                </a:solidFill>
-                <a:latin typeface="Calibri" pitchFamily="34" charset="0"/>
-                <a:ea typeface="Calibri" pitchFamily="34" charset="-122"/>
-                <a:cs typeface="Calibri" pitchFamily="34" charset="-120"/>
-              </a:rPr>
-              <a:t>CRM</a:t>
-            </a:r>
-            <a:endParaRPr lang="en-US" sz="850" dirty="0"/>
-          </a:p>
-        </p:txBody>
-      </p:sp>
-      <p:sp>
-        <p:nvSpPr>
-          <p:cNvPr id="24" name="Shape 22"/>
-          <p:cNvSpPr/>
-          <p:nvPr/>
-        </p:nvSpPr>
-        <p:spPr>
-          <a:xfrm>
-            <a:off x="1858975" y="4526280"/>
-            <a:ext cx="898855" cy="502920"/>
-          </a:xfrm>
-          <a:prstGeom prst="roundRect">
-            <a:avLst>
-              <a:gd name="adj" fmla="val 49091"/>
-            </a:avLst>
-          </a:prstGeom>
-          <a:solidFill>
-            <a:srgbClr val="F7F9FC"/>
-          </a:solidFill>
-          <a:ln/>
-        </p:spPr>
-      </p:sp>
-      <p:sp>
-        <p:nvSpPr>
-          <p:cNvPr id="25" name="Text 23"/>
-          <p:cNvSpPr/>
-          <p:nvPr/>
-        </p:nvSpPr>
-        <p:spPr>
-          <a:xfrm>
-            <a:off x="1804111" y="4526280"/>
-            <a:ext cx="1008583" cy="502920"/>
-          </a:xfrm>
-          <a:prstGeom prst="rect">
-            <a:avLst/>
-          </a:prstGeom>
-          <a:noFill/>
-          <a:ln/>
-        </p:spPr>
-        <p:txBody>
-          <a:bodyPr wrap="square" rtlCol="0" anchor="ctr">
-            <a:normAutofit/>
-          </a:bodyPr>
-          <a:lstStyle/>
-          <a:p>
-            <a:pPr algn="ctr" indent="0" marL="0">
-              <a:buNone/>
-            </a:pPr>
-            <a:r>
-              <a:rPr lang="en-US" sz="850" b="1" dirty="0">
-                <a:solidFill>
-                  <a:srgbClr val="4A5568"/>
-                </a:solidFill>
-                <a:latin typeface="Calibri" pitchFamily="34" charset="0"/>
-                <a:ea typeface="Calibri" pitchFamily="34" charset="-122"/>
-                <a:cs typeface="Calibri" pitchFamily="34" charset="-120"/>
-              </a:rPr>
-              <a:t>Banco Yamaha</a:t>
-            </a:r>
-            <a:endParaRPr lang="en-US" sz="850" dirty="0"/>
-          </a:p>
-        </p:txBody>
-      </p:sp>
-      <p:sp>
-        <p:nvSpPr>
-          <p:cNvPr id="26" name="Shape 24"/>
-          <p:cNvSpPr/>
-          <p:nvPr/>
-        </p:nvSpPr>
-        <p:spPr>
-          <a:xfrm>
-            <a:off x="2940710" y="4526280"/>
-            <a:ext cx="898855" cy="502920"/>
-          </a:xfrm>
-          <a:prstGeom prst="roundRect">
-            <a:avLst>
-              <a:gd name="adj" fmla="val 49091"/>
-            </a:avLst>
-          </a:prstGeom>
-          <a:solidFill>
-            <a:srgbClr val="F7F9FC"/>
-          </a:solidFill>
-          <a:ln/>
-        </p:spPr>
-      </p:sp>
-      <p:sp>
-        <p:nvSpPr>
-          <p:cNvPr id="27" name="Text 25"/>
-          <p:cNvSpPr/>
-          <p:nvPr/>
-        </p:nvSpPr>
-        <p:spPr>
-          <a:xfrm>
-            <a:off x="2885846" y="4526280"/>
-            <a:ext cx="1008583" cy="502920"/>
-          </a:xfrm>
-          <a:prstGeom prst="rect">
-            <a:avLst/>
-          </a:prstGeom>
-          <a:noFill/>
-          <a:ln/>
-        </p:spPr>
-        <p:txBody>
-          <a:bodyPr wrap="square" rtlCol="0" anchor="ctr">
-            <a:normAutofit/>
-          </a:bodyPr>
-          <a:lstStyle/>
-          <a:p>
-            <a:pPr algn="ctr" indent="0" marL="0">
-              <a:buNone/>
-            </a:pPr>
-            <a:r>
-              <a:rPr lang="en-US" sz="850" b="1" dirty="0">
-                <a:solidFill>
-                  <a:srgbClr val="4A5568"/>
-                </a:solidFill>
-                <a:latin typeface="Calibri" pitchFamily="34" charset="0"/>
-                <a:ea typeface="Calibri" pitchFamily="34" charset="-122"/>
-                <a:cs typeface="Calibri" pitchFamily="34" charset="-120"/>
-              </a:rPr>
-              <a:t>Consórcio</a:t>
-            </a:r>
-            <a:endParaRPr lang="en-US" sz="850" dirty="0"/>
-          </a:p>
-        </p:txBody>
-      </p:sp>
-      <p:sp>
-        <p:nvSpPr>
-          <p:cNvPr id="28" name="Shape 26"/>
-          <p:cNvSpPr/>
-          <p:nvPr/>
-        </p:nvSpPr>
-        <p:spPr>
-          <a:xfrm>
-            <a:off x="4022446" y="4526280"/>
-            <a:ext cx="898855" cy="502920"/>
-          </a:xfrm>
-          <a:prstGeom prst="roundRect">
-            <a:avLst>
-              <a:gd name="adj" fmla="val 49091"/>
-            </a:avLst>
-          </a:prstGeom>
-          <a:solidFill>
-            <a:srgbClr val="F7F9FC"/>
-          </a:solidFill>
-          <a:ln/>
-        </p:spPr>
-      </p:sp>
-      <p:sp>
-        <p:nvSpPr>
-          <p:cNvPr id="29" name="Text 27"/>
-          <p:cNvSpPr/>
-          <p:nvPr/>
-        </p:nvSpPr>
-        <p:spPr>
-          <a:xfrm>
-            <a:off x="3967582" y="4526280"/>
-            <a:ext cx="1008583" cy="502920"/>
-          </a:xfrm>
-          <a:prstGeom prst="rect">
-            <a:avLst/>
-          </a:prstGeom>
-          <a:noFill/>
-          <a:ln/>
-        </p:spPr>
-        <p:txBody>
-          <a:bodyPr wrap="square" rtlCol="0" anchor="ctr">
-            <a:normAutofit/>
-          </a:bodyPr>
-          <a:lstStyle/>
-          <a:p>
-            <a:pPr algn="ctr" indent="0" marL="0">
-              <a:buNone/>
-            </a:pPr>
-            <a:r>
-              <a:rPr lang="en-US" sz="850" b="1" dirty="0">
-                <a:solidFill>
-                  <a:srgbClr val="4A5568"/>
-                </a:solidFill>
-                <a:latin typeface="Calibri" pitchFamily="34" charset="0"/>
-                <a:ea typeface="Calibri" pitchFamily="34" charset="-122"/>
-                <a:cs typeface="Calibri" pitchFamily="34" charset="-120"/>
-              </a:rPr>
-              <a:t>Seguros</a:t>
-            </a:r>
-            <a:endParaRPr lang="en-US" sz="850" dirty="0"/>
-          </a:p>
-        </p:txBody>
-      </p:sp>
-      <p:sp>
-        <p:nvSpPr>
-          <p:cNvPr id="30" name="Shape 28"/>
-          <p:cNvSpPr/>
-          <p:nvPr/>
-        </p:nvSpPr>
-        <p:spPr>
-          <a:xfrm>
-            <a:off x="5104181" y="4526280"/>
-            <a:ext cx="898855" cy="502920"/>
-          </a:xfrm>
-          <a:prstGeom prst="roundRect">
-            <a:avLst>
-              <a:gd name="adj" fmla="val 49091"/>
-            </a:avLst>
-          </a:prstGeom>
-          <a:solidFill>
-            <a:srgbClr val="F7F9FC"/>
-          </a:solidFill>
-          <a:ln/>
-        </p:spPr>
-      </p:sp>
-      <p:sp>
-        <p:nvSpPr>
-          <p:cNvPr id="31" name="Text 29"/>
-          <p:cNvSpPr/>
-          <p:nvPr/>
-        </p:nvSpPr>
-        <p:spPr>
-          <a:xfrm>
-            <a:off x="5049317" y="4526280"/>
-            <a:ext cx="1008583" cy="502920"/>
-          </a:xfrm>
-          <a:prstGeom prst="rect">
-            <a:avLst/>
-          </a:prstGeom>
-          <a:noFill/>
-          <a:ln/>
-        </p:spPr>
-        <p:txBody>
-          <a:bodyPr wrap="square" rtlCol="0" anchor="ctr">
-            <a:normAutofit/>
-          </a:bodyPr>
-          <a:lstStyle/>
-          <a:p>
-            <a:pPr algn="ctr" indent="0" marL="0">
-              <a:buNone/>
-            </a:pPr>
-            <a:r>
-              <a:rPr lang="en-US" sz="850" b="1" dirty="0">
-                <a:solidFill>
-                  <a:srgbClr val="4A5568"/>
-                </a:solidFill>
-                <a:latin typeface="Calibri" pitchFamily="34" charset="0"/>
-                <a:ea typeface="Calibri" pitchFamily="34" charset="-122"/>
-                <a:cs typeface="Calibri" pitchFamily="34" charset="-120"/>
-              </a:rPr>
-              <a:t>Leads</a:t>
-            </a:r>
-            <a:endParaRPr lang="en-US" sz="850" dirty="0"/>
-          </a:p>
-        </p:txBody>
-      </p:sp>
-      <p:sp>
-        <p:nvSpPr>
-          <p:cNvPr id="32" name="Shape 30"/>
-          <p:cNvSpPr/>
-          <p:nvPr/>
-        </p:nvSpPr>
-        <p:spPr>
-          <a:xfrm>
-            <a:off x="6185916" y="4526280"/>
-            <a:ext cx="898855" cy="502920"/>
-          </a:xfrm>
-          <a:prstGeom prst="roundRect">
-            <a:avLst>
-              <a:gd name="adj" fmla="val 49091"/>
-            </a:avLst>
-          </a:prstGeom>
-          <a:solidFill>
-            <a:srgbClr val="F7F9FC"/>
-          </a:solidFill>
-          <a:ln/>
-        </p:spPr>
-      </p:sp>
-      <p:sp>
-        <p:nvSpPr>
-          <p:cNvPr id="33" name="Text 31"/>
-          <p:cNvSpPr/>
-          <p:nvPr/>
-        </p:nvSpPr>
-        <p:spPr>
-          <a:xfrm>
-            <a:off x="6131052" y="4526280"/>
-            <a:ext cx="1008583" cy="502920"/>
-          </a:xfrm>
-          <a:prstGeom prst="rect">
-            <a:avLst/>
-          </a:prstGeom>
-          <a:noFill/>
-          <a:ln/>
-        </p:spPr>
-        <p:txBody>
-          <a:bodyPr wrap="square" rtlCol="0" anchor="ctr">
-            <a:normAutofit/>
-          </a:bodyPr>
-          <a:lstStyle/>
-          <a:p>
-            <a:pPr algn="ctr" indent="0" marL="0">
-              <a:buNone/>
-            </a:pPr>
-            <a:r>
-              <a:rPr lang="en-US" sz="850" b="1" dirty="0">
-                <a:solidFill>
-                  <a:srgbClr val="4A5568"/>
-                </a:solidFill>
-                <a:latin typeface="Calibri" pitchFamily="34" charset="0"/>
-                <a:ea typeface="Calibri" pitchFamily="34" charset="-122"/>
-                <a:cs typeface="Calibri" pitchFamily="34" charset="-120"/>
-              </a:rPr>
-              <a:t>Pós-venda</a:t>
-            </a:r>
-            <a:endParaRPr lang="en-US" sz="850" dirty="0"/>
-          </a:p>
-        </p:txBody>
-      </p:sp>
-      <p:sp>
-        <p:nvSpPr>
-          <p:cNvPr id="34" name="Shape 32"/>
-          <p:cNvSpPr/>
-          <p:nvPr/>
-        </p:nvSpPr>
-        <p:spPr>
-          <a:xfrm>
-            <a:off x="7267651" y="4526280"/>
-            <a:ext cx="898855" cy="502920"/>
-          </a:xfrm>
-          <a:prstGeom prst="roundRect">
-            <a:avLst>
-              <a:gd name="adj" fmla="val 49091"/>
-            </a:avLst>
-          </a:prstGeom>
-          <a:solidFill>
-            <a:srgbClr val="F7F9FC"/>
-          </a:solidFill>
-          <a:ln/>
-        </p:spPr>
-      </p:sp>
-      <p:sp>
-        <p:nvSpPr>
-          <p:cNvPr id="35" name="Text 33"/>
-          <p:cNvSpPr/>
-          <p:nvPr/>
-        </p:nvSpPr>
-        <p:spPr>
-          <a:xfrm>
-            <a:off x="7212787" y="4526280"/>
-            <a:ext cx="1008583" cy="502920"/>
-          </a:xfrm>
-          <a:prstGeom prst="rect">
-            <a:avLst/>
-          </a:prstGeom>
-          <a:noFill/>
-          <a:ln/>
-        </p:spPr>
-        <p:txBody>
-          <a:bodyPr wrap="square" rtlCol="0" anchor="ctr">
-            <a:normAutofit/>
-          </a:bodyPr>
-          <a:lstStyle/>
-          <a:p>
-            <a:pPr algn="ctr" indent="0" marL="0">
-              <a:buNone/>
-            </a:pPr>
-            <a:r>
-              <a:rPr lang="en-US" sz="850" b="1" dirty="0">
-                <a:solidFill>
-                  <a:srgbClr val="4A5568"/>
-                </a:solidFill>
-                <a:latin typeface="Calibri" pitchFamily="34" charset="0"/>
-                <a:ea typeface="Calibri" pitchFamily="34" charset="-122"/>
-                <a:cs typeface="Calibri" pitchFamily="34" charset="-120"/>
-              </a:rPr>
-              <a:t>NPS</a:t>
-            </a:r>
-            <a:endParaRPr lang="en-US" sz="850" dirty="0"/>
-          </a:p>
-        </p:txBody>
-      </p:sp>
-      <p:sp>
-        <p:nvSpPr>
-          <p:cNvPr id="36" name="Shape 34"/>
-          <p:cNvSpPr/>
-          <p:nvPr/>
-        </p:nvSpPr>
-        <p:spPr>
-          <a:xfrm>
-            <a:off x="8349386" y="4526280"/>
-            <a:ext cx="898855" cy="502920"/>
-          </a:xfrm>
-          <a:prstGeom prst="roundRect">
-            <a:avLst>
-              <a:gd name="adj" fmla="val 49091"/>
-            </a:avLst>
-          </a:prstGeom>
-          <a:solidFill>
-            <a:srgbClr val="F7F9FC"/>
-          </a:solidFill>
-          <a:ln/>
-        </p:spPr>
-      </p:sp>
-      <p:sp>
-        <p:nvSpPr>
-          <p:cNvPr id="37" name="Text 35"/>
-          <p:cNvSpPr/>
-          <p:nvPr/>
-        </p:nvSpPr>
-        <p:spPr>
-          <a:xfrm>
-            <a:off x="8294522" y="4526280"/>
-            <a:ext cx="1008583" cy="502920"/>
-          </a:xfrm>
-          <a:prstGeom prst="rect">
-            <a:avLst/>
-          </a:prstGeom>
-          <a:noFill/>
-          <a:ln/>
-        </p:spPr>
-        <p:txBody>
-          <a:bodyPr wrap="square" rtlCol="0" anchor="ctr">
-            <a:normAutofit/>
-          </a:bodyPr>
-          <a:lstStyle/>
-          <a:p>
-            <a:pPr algn="ctr" indent="0" marL="0">
-              <a:buNone/>
-            </a:pPr>
-            <a:r>
-              <a:rPr lang="en-US" sz="850" b="1" dirty="0">
-                <a:solidFill>
-                  <a:srgbClr val="4A5568"/>
-                </a:solidFill>
-                <a:latin typeface="Calibri" pitchFamily="34" charset="0"/>
-                <a:ea typeface="Calibri" pitchFamily="34" charset="-122"/>
-                <a:cs typeface="Calibri" pitchFamily="34" charset="-120"/>
-              </a:rPr>
-              <a:t>Estoque</a:t>
-            </a:r>
-            <a:endParaRPr lang="en-US" sz="850" dirty="0"/>
-          </a:p>
-        </p:txBody>
-      </p:sp>
-      <p:sp>
-        <p:nvSpPr>
-          <p:cNvPr id="38" name="Shape 36"/>
-          <p:cNvSpPr/>
-          <p:nvPr/>
-        </p:nvSpPr>
-        <p:spPr>
-          <a:xfrm>
-            <a:off x="9431122" y="4526280"/>
-            <a:ext cx="898855" cy="502920"/>
-          </a:xfrm>
-          <a:prstGeom prst="roundRect">
-            <a:avLst>
-              <a:gd name="adj" fmla="val 49091"/>
-            </a:avLst>
-          </a:prstGeom>
-          <a:solidFill>
-            <a:srgbClr val="F7F9FC"/>
-          </a:solidFill>
-          <a:ln/>
-        </p:spPr>
-      </p:sp>
-      <p:sp>
-        <p:nvSpPr>
-          <p:cNvPr id="39" name="Text 37"/>
-          <p:cNvSpPr/>
-          <p:nvPr/>
-        </p:nvSpPr>
-        <p:spPr>
-          <a:xfrm>
-            <a:off x="9376258" y="4526280"/>
-            <a:ext cx="1008583" cy="502920"/>
-          </a:xfrm>
-          <a:prstGeom prst="rect">
-            <a:avLst/>
-          </a:prstGeom>
-          <a:noFill/>
-          <a:ln/>
-        </p:spPr>
-        <p:txBody>
-          <a:bodyPr wrap="square" rtlCol="0" anchor="ctr">
-            <a:normAutofit/>
-          </a:bodyPr>
-          <a:lstStyle/>
-          <a:p>
-            <a:pPr algn="ctr" indent="0" marL="0">
-              <a:buNone/>
-            </a:pPr>
-            <a:r>
-              <a:rPr lang="en-US" sz="850" b="1" dirty="0">
-                <a:solidFill>
-                  <a:srgbClr val="4A5568"/>
-                </a:solidFill>
-                <a:latin typeface="Calibri" pitchFamily="34" charset="0"/>
-                <a:ea typeface="Calibri" pitchFamily="34" charset="-122"/>
-                <a:cs typeface="Calibri" pitchFamily="34" charset="-120"/>
-              </a:rPr>
-              <a:t>Emplacamento</a:t>
-            </a:r>
-            <a:endParaRPr lang="en-US" sz="850" dirty="0"/>
-          </a:p>
-        </p:txBody>
-      </p:sp>
-      <p:sp>
-        <p:nvSpPr>
-          <p:cNvPr id="40" name="Shape 38"/>
-          <p:cNvSpPr/>
-          <p:nvPr/>
-        </p:nvSpPr>
-        <p:spPr>
-          <a:xfrm>
-            <a:off x="10512857" y="4526280"/>
-            <a:ext cx="898855" cy="502920"/>
-          </a:xfrm>
-          <a:prstGeom prst="roundRect">
-            <a:avLst>
-              <a:gd name="adj" fmla="val 49091"/>
-            </a:avLst>
-          </a:prstGeom>
-          <a:solidFill>
-            <a:srgbClr val="F7F9FC"/>
-          </a:solidFill>
-          <a:ln/>
-        </p:spPr>
-      </p:sp>
-      <p:sp>
-        <p:nvSpPr>
-          <p:cNvPr id="41" name="Text 39"/>
-          <p:cNvSpPr/>
-          <p:nvPr/>
-        </p:nvSpPr>
-        <p:spPr>
-          <a:xfrm>
-            <a:off x="10457993" y="4526280"/>
-            <a:ext cx="1008583" cy="502920"/>
-          </a:xfrm>
-          <a:prstGeom prst="rect">
-            <a:avLst/>
-          </a:prstGeom>
-          <a:noFill/>
-          <a:ln/>
-        </p:spPr>
-        <p:txBody>
-          <a:bodyPr wrap="square" rtlCol="0" anchor="ctr">
-            <a:normAutofit/>
-          </a:bodyPr>
-          <a:lstStyle/>
-          <a:p>
-            <a:pPr algn="ctr" indent="0" marL="0">
-              <a:buNone/>
-            </a:pPr>
-            <a:r>
-              <a:rPr lang="en-US" sz="850" b="1" dirty="0">
-                <a:solidFill>
-                  <a:srgbClr val="4A5568"/>
-                </a:solidFill>
-                <a:latin typeface="Calibri" pitchFamily="34" charset="0"/>
-                <a:ea typeface="Calibri" pitchFamily="34" charset="-122"/>
-                <a:cs typeface="Calibri" pitchFamily="34" charset="-120"/>
-              </a:rPr>
-              <a:t>WhatsApp</a:t>
-            </a:r>
-            <a:endParaRPr lang="en-US" sz="850" dirty="0"/>
-          </a:p>
-        </p:txBody>
-      </p:sp>
-      <p:sp>
-        <p:nvSpPr>
-          <p:cNvPr id="42" name="Shape 40"/>
-          <p:cNvSpPr/>
-          <p:nvPr/>
-        </p:nvSpPr>
-        <p:spPr>
-          <a:xfrm>
-            <a:off x="777240" y="5349240"/>
-            <a:ext cx="10634472" cy="914400"/>
-          </a:xfrm>
-          <a:prstGeom prst="roundRect">
-            <a:avLst>
-              <a:gd name="adj" fmla="val 3000"/>
-            </a:avLst>
-          </a:prstGeom>
-          <a:solidFill>
-            <a:srgbClr val="EEF4FF"/>
-          </a:solidFill>
-          <a:ln/>
-        </p:spPr>
-      </p:sp>
-      <p:sp>
-        <p:nvSpPr>
-          <p:cNvPr id="43" name="Text 41"/>
-          <p:cNvSpPr/>
-          <p:nvPr/>
-        </p:nvSpPr>
-        <p:spPr>
-          <a:xfrm>
-            <a:off x="1051560" y="5495544"/>
-            <a:ext cx="10085832" cy="274320"/>
-          </a:xfrm>
-          <a:prstGeom prst="rect">
-            <a:avLst/>
-          </a:prstGeom>
-          <a:noFill/>
-          <a:ln/>
-        </p:spPr>
-        <p:txBody>
-          <a:bodyPr wrap="square" rtlCol="0" anchor="ctr">
-            <a:normAutofit/>
-          </a:bodyPr>
-          <a:lstStyle/>
-          <a:p>
-            <a:pPr indent="0" marL="0">
-              <a:buNone/>
-            </a:pPr>
-            <a:r>
-              <a:rPr lang="en-US" sz="1350" b="1" dirty="0">
-                <a:solidFill>
-                  <a:srgbClr val="091426"/>
-                </a:solidFill>
-                <a:latin typeface="Calibri" pitchFamily="34" charset="0"/>
-                <a:ea typeface="Calibri" pitchFamily="34" charset="-122"/>
-                <a:cs typeface="Calibri" pitchFamily="34" charset="-120"/>
-              </a:rPr>
-              <a:t>SaaS multi-grupo desde o dia 1</a:t>
-            </a:r>
-            <a:endParaRPr lang="en-US" sz="1350" dirty="0"/>
-          </a:p>
-        </p:txBody>
-      </p:sp>
-      <p:sp>
-        <p:nvSpPr>
-          <p:cNvPr id="44" name="Text 42"/>
-          <p:cNvSpPr/>
-          <p:nvPr/>
-        </p:nvSpPr>
-        <p:spPr>
-          <a:xfrm>
-            <a:off x="1051560" y="5806440"/>
-            <a:ext cx="10085832" cy="347472"/>
-          </a:xfrm>
-          <a:prstGeom prst="rect">
-            <a:avLst/>
-          </a:prstGeom>
-          <a:noFill/>
-          <a:ln/>
-        </p:spPr>
-        <p:txBody>
-          <a:bodyPr wrap="square" rtlCol="0" anchor="t">
-            <a:normAutofit/>
-          </a:bodyPr>
-          <a:lstStyle/>
-          <a:p>
-            <a:pPr indent="0" marL="0">
-              <a:lnSpc>
-                <a:spcPts val="1600"/>
-              </a:lnSpc>
-              <a:buNone/>
-            </a:pPr>
-            <a:r>
-              <a:rPr lang="en-US" sz="1150" dirty="0">
-                <a:solidFill>
-                  <a:srgbClr val="4A5568"/>
-                </a:solidFill>
-                <a:latin typeface="Calibri" pitchFamily="34" charset="0"/>
-                <a:ea typeface="Calibri" pitchFamily="34" charset="-122"/>
-                <a:cs typeface="Calibri" pitchFamily="34" charset="-120"/>
-              </a:rPr>
-              <a:t>Sem instalação, sem hardware, sem projeto de TI local — replicar para outra concessionária é configurar, não reprogramar.</a:t>
-            </a:r>
-            <a:endParaRPr lang="en-US" sz="1150" dirty="0"/>
+              <a:rPr lang="en-US" sz="1250" i="1" dirty="0">
+                <a:solidFill>
+                  <a:srgbClr val="8A96A8"/>
+                </a:solidFill>
+                <a:latin typeface="Calibri" pitchFamily="34" charset="0"/>
+                <a:ea typeface="Calibri" pitchFamily="34" charset="-122"/>
+                <a:cs typeface="Calibri" pitchFamily="34" charset="-120"/>
+              </a:rPr>
+              <a:t>Tudo até aqui foi entregue no prazo — a Fase 2 é a decisão desta reunião.</a:t>
+            </a:r>
+            <a:endParaRPr lang="en-US" sz="1250" dirty="0"/>
           </a:p>
         </p:txBody>
       </p:sp>
@@ -9765,7 +10273,7 @@
                 <a:ea typeface="Calibri" pitchFamily="34" charset="-122"/>
                 <a:cs typeface="Calibri" pitchFamily="34" charset="-120"/>
               </a:rPr>
-              <a:t>CRONOGRAMA</a:t>
+              <a:t>PAYBACK &amp; VIABILIDADE</a:t>
             </a:r>
             <a:endParaRPr lang="en-US" sz="1100" dirty="0"/>
           </a:p>
@@ -9806,7 +10314,7 @@
                 <a:ea typeface="Calibri" pitchFamily="34" charset="-122"/>
                 <a:cs typeface="Calibri" pitchFamily="34" charset="-120"/>
               </a:rPr>
-              <a:t>De janeiro ao rollout: o projeto no prazo</a:t>
+              <a:t>Retorno mensurável para toda a cadeia</a:t>
             </a:r>
             <a:endParaRPr lang="en-US" sz="3000" dirty="0"/>
           </a:p>
@@ -9820,8 +10328,69 @@
         </p:nvSpPr>
         <p:spPr>
           <a:xfrm>
-            <a:off x="777240" y="1444752"/>
-            <a:ext cx="10634472" cy="292608"/>
+            <a:off x="10954512" y="6446520"/>
+            <a:ext cx="457200" cy="274320"/>
+          </a:xfrm>
+          <a:prstGeom prst="rect">
+            <a:avLst/>
+          </a:prstGeom>
+          <a:noFill/>
+          <a:ln/>
+        </p:spPr>
+        <p:txBody>
+          <a:bodyPr wrap="square" rtlCol="0" anchor="ctr"/>
+          <a:lstStyle/>
+          <a:p>
+            <a:pPr algn="r" indent="0" marL="0">
+              <a:buNone/>
+            </a:pPr>
+            <a:r>
+              <a:rPr lang="en-US" sz="1000" b="1" dirty="0">
+                <a:solidFill>
+                  <a:srgbClr val="C3D6F0"/>
+                </a:solidFill>
+                <a:latin typeface="Calibri" pitchFamily="34" charset="0"/>
+                <a:ea typeface="Calibri" pitchFamily="34" charset="-122"/>
+                <a:cs typeface="Calibri" pitchFamily="34" charset="-120"/>
+              </a:rPr>
+              <a:t>15</a:t>
+            </a:r>
+            <a:endParaRPr lang="en-US" sz="1000" dirty="0"/>
+          </a:p>
+        </p:txBody>
+      </p:sp>
+      <p:sp>
+        <p:nvSpPr>
+          <p:cNvPr id="5" name="Shape 3"/>
+          <p:cNvSpPr/>
+          <p:nvPr/>
+        </p:nvSpPr>
+        <p:spPr>
+          <a:xfrm>
+            <a:off x="777240" y="1828800"/>
+            <a:ext cx="3410712" cy="1737360"/>
+          </a:xfrm>
+          <a:prstGeom prst="roundRect">
+            <a:avLst>
+              <a:gd name="adj" fmla="val 1579"/>
+            </a:avLst>
+          </a:prstGeom>
+          <a:solidFill>
+            <a:srgbClr val="F7F9FC"/>
+          </a:solidFill>
+          <a:ln/>
+        </p:spPr>
+      </p:sp>
+      <p:sp>
+        <p:nvSpPr>
+          <p:cNvPr id="6" name="Text 4"/>
+          <p:cNvSpPr/>
+          <p:nvPr/>
+        </p:nvSpPr>
+        <p:spPr>
+          <a:xfrm>
+            <a:off x="996696" y="2029968"/>
+            <a:ext cx="2971800" cy="201168"/>
           </a:xfrm>
           <a:prstGeom prst="rect">
             <a:avLst/>
@@ -9839,7 +10408,92 @@
               <a:buNone/>
             </a:pPr>
             <a:r>
-              <a:rPr lang="en-US" sz="1350" dirty="0">
+              <a:rPr lang="en-US" sz="950" b="1" spc="50" kern="0" dirty="0">
+                <a:solidFill>
+                  <a:srgbClr val="0365FE"/>
+                </a:solidFill>
+                <a:latin typeface="Calibri" pitchFamily="34" charset="0"/>
+                <a:ea typeface="Calibri" pitchFamily="34" charset="-122"/>
+                <a:cs typeface="Calibri" pitchFamily="34" charset="-120"/>
+              </a:rPr>
+              <a:t>INVESTIMENTO</a:t>
+            </a:r>
+            <a:endParaRPr lang="en-US" sz="950" dirty="0"/>
+          </a:p>
+        </p:txBody>
+      </p:sp>
+      <p:sp>
+        <p:nvSpPr>
+          <p:cNvPr id="7" name="Text 5"/>
+          <p:cNvSpPr/>
+          <p:nvPr/>
+        </p:nvSpPr>
+        <p:spPr>
+          <a:xfrm>
+            <a:off x="996696" y="2286000"/>
+            <a:ext cx="2971800" cy="310896"/>
+          </a:xfrm>
+          <a:prstGeom prst="rect">
+            <a:avLst/>
+          </a:prstGeom>
+          <a:noFill/>
+          <a:ln/>
+        </p:spPr>
+        <p:txBody>
+          <a:bodyPr wrap="square" rtlCol="0" anchor="ctr">
+            <a:normAutofit/>
+          </a:bodyPr>
+          <a:lstStyle/>
+          <a:p>
+            <a:pPr indent="0" marL="0">
+              <a:buNone/>
+            </a:pPr>
+            <a:r>
+              <a:rPr lang="en-US" sz="1400" b="1" dirty="0">
+                <a:solidFill>
+                  <a:srgbClr val="091426"/>
+                </a:solidFill>
+                <a:latin typeface="Calibri" pitchFamily="34" charset="0"/>
+                <a:ea typeface="Calibri" pitchFamily="34" charset="-122"/>
+                <a:cs typeface="Calibri" pitchFamily="34" charset="-120"/>
+              </a:rPr>
+              <a:t>R$ 600/mês por CCY</a:t>
+            </a:r>
+            <a:endParaRPr lang="en-US" sz="1400" dirty="0"/>
+          </a:p>
+        </p:txBody>
+      </p:sp>
+      <p:sp>
+        <p:nvSpPr>
+          <p:cNvPr id="8" name="Text 6"/>
+          <p:cNvSpPr/>
+          <p:nvPr/>
+        </p:nvSpPr>
+        <p:spPr>
+          <a:xfrm>
+            <a:off x="996696" y="2651760"/>
+            <a:ext cx="2971800" cy="749808"/>
+          </a:xfrm>
+          <a:prstGeom prst="rect">
+            <a:avLst/>
+          </a:prstGeom>
+          <a:noFill/>
+          <a:ln/>
+        </p:spPr>
+        <p:txBody>
+          <a:bodyPr wrap="square" rtlCol="0" anchor="t">
+            <a:normAutofit/>
+          </a:bodyPr>
+          <a:lstStyle/>
+          <a:p>
+            <a:pPr indent="0" marL="0">
+              <a:lnSpc>
+                <a:spcPts val="1500"/>
+              </a:lnSpc>
+              <a:buNone/>
+            </a:pPr>
+            <a:r>
+              <a:rPr lang="en-US" sz="1100" dirty="0">
                 <a:solidFill>
                   <a:srgbClr val="4A5568"/>
                 </a:solidFill>
@@ -9847,135 +10501,9 @@
                 <a:ea typeface="Calibri" pitchFamily="34" charset="-122"/>
                 <a:cs typeface="Calibri" pitchFamily="34" charset="-120"/>
               </a:rPr>
-              <a:t>Metodologia ágil com PDCA — as fases cumpridas em 2026 e a proposta para a rede.</a:t>
-            </a:r>
-            <a:endParaRPr lang="en-US" sz="1350" dirty="0"/>
-          </a:p>
-        </p:txBody>
-      </p:sp>
-      <p:sp>
-        <p:nvSpPr>
-          <p:cNvPr id="5" name="Text 3"/>
-          <p:cNvSpPr/>
-          <p:nvPr/>
-        </p:nvSpPr>
-        <p:spPr>
-          <a:xfrm>
-            <a:off x="10954512" y="6446520"/>
-            <a:ext cx="457200" cy="274320"/>
-          </a:xfrm>
-          <a:prstGeom prst="rect">
-            <a:avLst/>
-          </a:prstGeom>
-          <a:noFill/>
-          <a:ln/>
-        </p:spPr>
-        <p:txBody>
-          <a:bodyPr wrap="square" rtlCol="0" anchor="ctr"/>
-          <a:lstStyle/>
-          <a:p>
-            <a:pPr algn="r" indent="0" marL="0">
-              <a:buNone/>
-            </a:pPr>
-            <a:r>
-              <a:rPr lang="en-US" sz="1000" b="1" dirty="0">
-                <a:solidFill>
-                  <a:srgbClr val="C3D6F0"/>
-                </a:solidFill>
-                <a:latin typeface="Calibri" pitchFamily="34" charset="0"/>
-                <a:ea typeface="Calibri" pitchFamily="34" charset="-122"/>
-                <a:cs typeface="Calibri" pitchFamily="34" charset="-120"/>
-              </a:rPr>
-              <a:t>15</a:t>
-            </a:r>
-            <a:endParaRPr lang="en-US" sz="1000" dirty="0"/>
-          </a:p>
-        </p:txBody>
-      </p:sp>
-      <p:sp>
-        <p:nvSpPr>
-          <p:cNvPr id="6" name="Shape 4"/>
-          <p:cNvSpPr/>
-          <p:nvPr/>
-        </p:nvSpPr>
-        <p:spPr>
-          <a:xfrm>
-            <a:off x="960120" y="2743200"/>
-            <a:ext cx="10268712" cy="0"/>
-          </a:xfrm>
-          <a:prstGeom prst="line">
-            <a:avLst/>
-          </a:prstGeom>
-          <a:noFill/>
-          <a:ln w="19050">
-            <a:solidFill>
-              <a:srgbClr val="E5EAF2"/>
-            </a:solidFill>
-            <a:prstDash val="solid"/>
-          </a:ln>
-        </p:spPr>
-      </p:sp>
-      <p:sp>
-        <p:nvSpPr>
-          <p:cNvPr id="7" name="Shape 5"/>
-          <p:cNvSpPr/>
-          <p:nvPr/>
-        </p:nvSpPr>
-        <p:spPr>
-          <a:xfrm>
-            <a:off x="1393154" y="2670048"/>
-            <a:ext cx="146304" cy="146304"/>
-          </a:xfrm>
-          <a:prstGeom prst="ellipse">
-            <a:avLst/>
-          </a:prstGeom>
-          <a:solidFill>
-            <a:srgbClr val="1E9E5A"/>
-          </a:solidFill>
-          <a:ln w="19050">
-            <a:solidFill>
-              <a:srgbClr val="FFFFFF"/>
-            </a:solidFill>
-            <a:prstDash val="solid"/>
-          </a:ln>
-        </p:spPr>
-      </p:sp>
-      <p:sp>
-        <p:nvSpPr>
-          <p:cNvPr id="8" name="Text 6"/>
-          <p:cNvSpPr/>
-          <p:nvPr/>
-        </p:nvSpPr>
-        <p:spPr>
-          <a:xfrm>
-            <a:off x="777240" y="2148840"/>
-            <a:ext cx="1378131" cy="274320"/>
-          </a:xfrm>
-          <a:prstGeom prst="rect">
-            <a:avLst/>
-          </a:prstGeom>
-          <a:noFill/>
-          <a:ln/>
-        </p:spPr>
-        <p:txBody>
-          <a:bodyPr wrap="square" rtlCol="0" anchor="ctr"/>
-          <a:lstStyle/>
-          <a:p>
-            <a:pPr algn="ctr" indent="0" marL="0">
-              <a:buNone/>
-            </a:pPr>
-            <a:r>
-              <a:rPr lang="en-US" sz="1000" b="1" dirty="0">
-                <a:solidFill>
-                  <a:srgbClr val="4A5568"/>
-                </a:solidFill>
-                <a:latin typeface="Calibri" pitchFamily="34" charset="0"/>
-                <a:ea typeface="Calibri" pitchFamily="34" charset="-122"/>
-                <a:cs typeface="Calibri" pitchFamily="34" charset="-120"/>
-              </a:rPr>
-              <a:t>Jan–Fev</a:t>
-            </a:r>
-            <a:endParaRPr lang="en-US" sz="1000" dirty="0"/>
+              <a:t>Plataforma, integrações, treinamento e suporte — SaaS sem instalação e sem hardware.</a:t>
+            </a:r>
+            <a:endParaRPr lang="en-US" sz="1100" dirty="0"/>
           </a:p>
         </p:txBody>
       </p:sp>
@@ -9987,12 +10515,12 @@
         </p:nvSpPr>
         <p:spPr>
           <a:xfrm>
-            <a:off x="777240" y="3063240"/>
-            <a:ext cx="1378131" cy="1737360"/>
+            <a:off x="4389120" y="1828800"/>
+            <a:ext cx="3410712" cy="1737360"/>
           </a:xfrm>
           <a:prstGeom prst="roundRect">
             <a:avLst>
-              <a:gd name="adj" fmla="val 2654"/>
+              <a:gd name="adj" fmla="val 1579"/>
             </a:avLst>
           </a:prstGeom>
           <a:solidFill>
@@ -10009,8 +10537,8 @@
         </p:nvSpPr>
         <p:spPr>
           <a:xfrm>
-            <a:off x="868680" y="3200400"/>
-            <a:ext cx="1195251" cy="292608"/>
+            <a:off x="4608576" y="2029968"/>
+            <a:ext cx="2971800" cy="201168"/>
           </a:xfrm>
           <a:prstGeom prst="rect">
             <a:avLst/>
@@ -10024,11 +10552,52 @@
           </a:bodyPr>
           <a:lstStyle/>
           <a:p>
-            <a:pPr algn="ctr" indent="0" marL="0">
-              <a:buNone/>
-            </a:pPr>
-            <a:r>
-              <a:rPr lang="en-US" sz="1150" b="1" dirty="0">
+            <a:pPr indent="0" marL="0">
+              <a:buNone/>
+            </a:pPr>
+            <a:r>
+              <a:rPr lang="en-US" sz="950" b="1" spc="50" kern="0" dirty="0">
+                <a:solidFill>
+                  <a:srgbClr val="0365FE"/>
+                </a:solidFill>
+                <a:latin typeface="Calibri" pitchFamily="34" charset="0"/>
+                <a:ea typeface="Calibri" pitchFamily="34" charset="-122"/>
+                <a:cs typeface="Calibri" pitchFamily="34" charset="-120"/>
+              </a:rPr>
+              <a:t>ECONOMIA GERADA</a:t>
+            </a:r>
+            <a:endParaRPr lang="en-US" sz="950" dirty="0"/>
+          </a:p>
+        </p:txBody>
+      </p:sp>
+      <p:sp>
+        <p:nvSpPr>
+          <p:cNvPr id="11" name="Text 9"/>
+          <p:cNvSpPr/>
+          <p:nvPr/>
+        </p:nvSpPr>
+        <p:spPr>
+          <a:xfrm>
+            <a:off x="4608576" y="2286000"/>
+            <a:ext cx="2971800" cy="310896"/>
+          </a:xfrm>
+          <a:prstGeom prst="rect">
+            <a:avLst/>
+          </a:prstGeom>
+          <a:noFill/>
+          <a:ln/>
+        </p:spPr>
+        <p:txBody>
+          <a:bodyPr wrap="square" rtlCol="0" anchor="ctr">
+            <a:normAutofit/>
+          </a:bodyPr>
+          <a:lstStyle/>
+          <a:p>
+            <a:pPr indent="0" marL="0">
+              <a:buNone/>
+            </a:pPr>
+            <a:r>
+              <a:rPr lang="en-US" sz="1400" b="1" dirty="0">
                 <a:solidFill>
                   <a:srgbClr val="091426"/>
                 </a:solidFill>
@@ -10036,22 +10605,22 @@
                 <a:ea typeface="Calibri" pitchFamily="34" charset="-122"/>
                 <a:cs typeface="Calibri" pitchFamily="34" charset="-120"/>
               </a:rPr>
-              <a:t>Planejamento</a:t>
-            </a:r>
-            <a:endParaRPr lang="en-US" sz="1150" dirty="0"/>
-          </a:p>
-        </p:txBody>
-      </p:sp>
-      <p:sp>
-        <p:nvSpPr>
-          <p:cNvPr id="11" name="Text 9"/>
-          <p:cNvSpPr/>
-          <p:nvPr/>
-        </p:nvSpPr>
-        <p:spPr>
-          <a:xfrm>
-            <a:off x="868680" y="3547872"/>
-            <a:ext cx="1195251" cy="1097280"/>
+              <a:t>Horas viram segundos</a:t>
+            </a:r>
+            <a:endParaRPr lang="en-US" sz="1400" dirty="0"/>
+          </a:p>
+        </p:txBody>
+      </p:sp>
+      <p:sp>
+        <p:nvSpPr>
+          <p:cNvPr id="12" name="Text 10"/>
+          <p:cNvSpPr/>
+          <p:nvPr/>
+        </p:nvSpPr>
+        <p:spPr>
+          <a:xfrm>
+            <a:off x="4608576" y="2651760"/>
+            <a:ext cx="2971800" cy="749808"/>
           </a:xfrm>
           <a:prstGeom prst="rect">
             <a:avLst/>
@@ -10065,14 +10634,14 @@
           </a:bodyPr>
           <a:lstStyle/>
           <a:p>
-            <a:pPr algn="ctr" indent="0" marL="0">
+            <a:pPr indent="0" marL="0">
               <a:lnSpc>
-                <a:spcPts val="1250"/>
+                <a:spcPts val="1500"/>
               </a:lnSpc>
               <a:buNone/>
             </a:pPr>
             <a:r>
-              <a:rPr lang="en-US" sz="900" dirty="0">
+              <a:rPr lang="en-US" sz="1100" dirty="0">
                 <a:solidFill>
                   <a:srgbClr val="4A5568"/>
                 </a:solidFill>
@@ -10080,48 +10649,9 @@
                 <a:ea typeface="Calibri" pitchFamily="34" charset="-122"/>
                 <a:cs typeface="Calibri" pitchFamily="34" charset="-120"/>
               </a:rPr>
-              <a:t>requisitos e arquitetura</a:t>
-            </a:r>
-            <a:endParaRPr lang="en-US" sz="900" dirty="0"/>
-          </a:p>
-        </p:txBody>
-      </p:sp>
-      <p:sp>
-        <p:nvSpPr>
-          <p:cNvPr id="12" name="Text 10"/>
-          <p:cNvSpPr/>
-          <p:nvPr/>
-        </p:nvSpPr>
-        <p:spPr>
-          <a:xfrm>
-            <a:off x="777240" y="4434840"/>
-            <a:ext cx="1378131" cy="237744"/>
-          </a:xfrm>
-          <a:prstGeom prst="rect">
-            <a:avLst/>
-          </a:prstGeom>
-          <a:noFill/>
-          <a:ln/>
-        </p:spPr>
-        <p:txBody>
-          <a:bodyPr wrap="square" rtlCol="0" anchor="ctr"/>
-          <a:lstStyle/>
-          <a:p>
-            <a:pPr algn="ctr" indent="0" marL="0">
-              <a:buNone/>
-            </a:pPr>
-            <a:r>
-              <a:rPr lang="en-US" sz="800" b="1" spc="100" kern="0" dirty="0">
-                <a:solidFill>
-                  <a:srgbClr val="1E9E5A"/>
-                </a:solidFill>
-                <a:latin typeface="Calibri" pitchFamily="34" charset="0"/>
-                <a:ea typeface="Calibri" pitchFamily="34" charset="-122"/>
-                <a:cs typeface="Calibri" pitchFamily="34" charset="-120"/>
-              </a:rPr>
-              <a:t>ENTREGUE</a:t>
-            </a:r>
-            <a:endParaRPr lang="en-US" sz="800" dirty="0"/>
+              <a:t>Menos retrabalho operacional, menor custo de captação, menos perda no funil de vendas.</a:t>
+            </a:r>
+            <a:endParaRPr lang="en-US" sz="1100" dirty="0"/>
           </a:p>
         </p:txBody>
       </p:sp>
@@ -10133,76 +10663,12 @@
         </p:nvSpPr>
         <p:spPr>
           <a:xfrm>
-            <a:off x="2935877" y="2670048"/>
-            <a:ext cx="146304" cy="146304"/>
-          </a:xfrm>
-          <a:prstGeom prst="ellipse">
-            <a:avLst/>
-          </a:prstGeom>
-          <a:solidFill>
-            <a:srgbClr val="1E9E5A"/>
-          </a:solidFill>
-          <a:ln w="19050">
-            <a:solidFill>
-              <a:srgbClr val="FFFFFF"/>
-            </a:solidFill>
-            <a:prstDash val="solid"/>
-          </a:ln>
-        </p:spPr>
-      </p:sp>
-      <p:sp>
-        <p:nvSpPr>
-          <p:cNvPr id="14" name="Text 12"/>
-          <p:cNvSpPr/>
-          <p:nvPr/>
-        </p:nvSpPr>
-        <p:spPr>
-          <a:xfrm>
-            <a:off x="2319963" y="2148840"/>
-            <a:ext cx="1378131" cy="274320"/>
-          </a:xfrm>
-          <a:prstGeom prst="rect">
-            <a:avLst/>
-          </a:prstGeom>
-          <a:noFill/>
-          <a:ln/>
-        </p:spPr>
-        <p:txBody>
-          <a:bodyPr wrap="square" rtlCol="0" anchor="ctr"/>
-          <a:lstStyle/>
-          <a:p>
-            <a:pPr algn="ctr" indent="0" marL="0">
-              <a:buNone/>
-            </a:pPr>
-            <a:r>
-              <a:rPr lang="en-US" sz="1000" b="1" dirty="0">
-                <a:solidFill>
-                  <a:srgbClr val="4A5568"/>
-                </a:solidFill>
-                <a:latin typeface="Calibri" pitchFamily="34" charset="0"/>
-                <a:ea typeface="Calibri" pitchFamily="34" charset="-122"/>
-                <a:cs typeface="Calibri" pitchFamily="34" charset="-120"/>
-              </a:rPr>
-              <a:t>Mar</a:t>
-            </a:r>
-            <a:endParaRPr lang="en-US" sz="1000" dirty="0"/>
-          </a:p>
-        </p:txBody>
-      </p:sp>
-      <p:sp>
-        <p:nvSpPr>
-          <p:cNvPr id="15" name="Shape 13"/>
-          <p:cNvSpPr/>
-          <p:nvPr/>
-        </p:nvSpPr>
-        <p:spPr>
-          <a:xfrm>
-            <a:off x="2319963" y="3063240"/>
-            <a:ext cx="1378131" cy="1737360"/>
+            <a:off x="8001000" y="1828800"/>
+            <a:ext cx="3410712" cy="1737360"/>
           </a:xfrm>
           <a:prstGeom prst="roundRect">
             <a:avLst>
-              <a:gd name="adj" fmla="val 2654"/>
+              <a:gd name="adj" fmla="val 1579"/>
             </a:avLst>
           </a:prstGeom>
           <a:solidFill>
@@ -10213,14 +10679,14 @@
       </p:sp>
       <p:sp>
         <p:nvSpPr>
-          <p:cNvPr id="16" name="Text 14"/>
-          <p:cNvSpPr/>
-          <p:nvPr/>
-        </p:nvSpPr>
-        <p:spPr>
-          <a:xfrm>
-            <a:off x="2411403" y="3200400"/>
-            <a:ext cx="1195251" cy="292608"/>
+          <p:cNvPr id="14" name="Text 12"/>
+          <p:cNvSpPr/>
+          <p:nvPr/>
+        </p:nvSpPr>
+        <p:spPr>
+          <a:xfrm>
+            <a:off x="8220456" y="2029968"/>
+            <a:ext cx="2971800" cy="201168"/>
           </a:xfrm>
           <a:prstGeom prst="rect">
             <a:avLst/>
@@ -10234,11 +10700,52 @@
           </a:bodyPr>
           <a:lstStyle/>
           <a:p>
-            <a:pPr algn="ctr" indent="0" marL="0">
-              <a:buNone/>
-            </a:pPr>
-            <a:r>
-              <a:rPr lang="en-US" sz="1150" b="1" dirty="0">
+            <a:pPr indent="0" marL="0">
+              <a:buNone/>
+            </a:pPr>
+            <a:r>
+              <a:rPr lang="en-US" sz="950" b="1" spc="50" kern="0" dirty="0">
+                <a:solidFill>
+                  <a:srgbClr val="0365FE"/>
+                </a:solidFill>
+                <a:latin typeface="Calibri" pitchFamily="34" charset="0"/>
+                <a:ea typeface="Calibri" pitchFamily="34" charset="-122"/>
+                <a:cs typeface="Calibri" pitchFamily="34" charset="-120"/>
+              </a:rPr>
+              <a:t>GANHOS ESPERADOS</a:t>
+            </a:r>
+            <a:endParaRPr lang="en-US" sz="950" dirty="0"/>
+          </a:p>
+        </p:txBody>
+      </p:sp>
+      <p:sp>
+        <p:nvSpPr>
+          <p:cNvPr id="15" name="Text 13"/>
+          <p:cNvSpPr/>
+          <p:nvPr/>
+        </p:nvSpPr>
+        <p:spPr>
+          <a:xfrm>
+            <a:off x="8220456" y="2286000"/>
+            <a:ext cx="2971800" cy="310896"/>
+          </a:xfrm>
+          <a:prstGeom prst="rect">
+            <a:avLst/>
+          </a:prstGeom>
+          <a:noFill/>
+          <a:ln/>
+        </p:spPr>
+        <p:txBody>
+          <a:bodyPr wrap="square" rtlCol="0" anchor="ctr">
+            <a:normAutofit/>
+          </a:bodyPr>
+          <a:lstStyle/>
+          <a:p>
+            <a:pPr indent="0" marL="0">
+              <a:buNone/>
+            </a:pPr>
+            <a:r>
+              <a:rPr lang="en-US" sz="1400" b="1" dirty="0">
                 <a:solidFill>
                   <a:srgbClr val="091426"/>
                 </a:solidFill>
@@ -10246,22 +10753,22 @@
                 <a:ea typeface="Calibri" pitchFamily="34" charset="-122"/>
                 <a:cs typeface="Calibri" pitchFamily="34" charset="-120"/>
               </a:rPr>
-              <a:t>Desenvolvimento</a:t>
-            </a:r>
-            <a:endParaRPr lang="en-US" sz="1150" dirty="0"/>
-          </a:p>
-        </p:txBody>
-      </p:sp>
-      <p:sp>
-        <p:nvSpPr>
-          <p:cNvPr id="17" name="Text 15"/>
-          <p:cNvSpPr/>
-          <p:nvPr/>
-        </p:nvSpPr>
-        <p:spPr>
-          <a:xfrm>
-            <a:off x="2411403" y="3547872"/>
-            <a:ext cx="1195251" cy="1097280"/>
+              <a:t>+8% varejo · +15% leads</a:t>
+            </a:r>
+            <a:endParaRPr lang="en-US" sz="1400" dirty="0"/>
+          </a:p>
+        </p:txBody>
+      </p:sp>
+      <p:sp>
+        <p:nvSpPr>
+          <p:cNvPr id="16" name="Text 14"/>
+          <p:cNvSpPr/>
+          <p:nvPr/>
+        </p:nvSpPr>
+        <p:spPr>
+          <a:xfrm>
+            <a:off x="8220456" y="2651760"/>
+            <a:ext cx="2971800" cy="749808"/>
           </a:xfrm>
           <a:prstGeom prst="rect">
             <a:avLst/>
@@ -10275,14 +10782,14 @@
           </a:bodyPr>
           <a:lstStyle/>
           <a:p>
-            <a:pPr algn="ctr" indent="0" marL="0">
+            <a:pPr indent="0" marL="0">
               <a:lnSpc>
-                <a:spcPts val="1250"/>
+                <a:spcPts val="1500"/>
               </a:lnSpc>
               <a:buNone/>
             </a:pPr>
             <a:r>
-              <a:rPr lang="en-US" sz="900" dirty="0">
+              <a:rPr lang="en-US" sz="1100" dirty="0">
                 <a:solidFill>
                   <a:srgbClr val="4A5568"/>
                 </a:solidFill>
@@ -10290,147 +10797,44 @@
                 <a:ea typeface="Calibri" pitchFamily="34" charset="-122"/>
                 <a:cs typeface="Calibri" pitchFamily="34" charset="-120"/>
               </a:rPr>
-              <a:t>construção da plataforma</a:t>
-            </a:r>
-            <a:endParaRPr lang="en-US" sz="900" dirty="0"/>
-          </a:p>
-        </p:txBody>
-      </p:sp>
-      <p:sp>
-        <p:nvSpPr>
-          <p:cNvPr id="18" name="Text 16"/>
-          <p:cNvSpPr/>
-          <p:nvPr/>
-        </p:nvSpPr>
-        <p:spPr>
-          <a:xfrm>
-            <a:off x="2319963" y="4434840"/>
-            <a:ext cx="1378131" cy="237744"/>
-          </a:xfrm>
-          <a:prstGeom prst="rect">
-            <a:avLst/>
-          </a:prstGeom>
-          <a:noFill/>
-          <a:ln/>
-        </p:spPr>
-        <p:txBody>
-          <a:bodyPr wrap="square" rtlCol="0" anchor="ctr"/>
-          <a:lstStyle/>
-          <a:p>
-            <a:pPr algn="ctr" indent="0" marL="0">
-              <a:buNone/>
-            </a:pPr>
-            <a:r>
-              <a:rPr lang="en-US" sz="800" b="1" spc="100" kern="0" dirty="0">
-                <a:solidFill>
-                  <a:srgbClr val="1E9E5A"/>
-                </a:solidFill>
-                <a:latin typeface="Calibri" pitchFamily="34" charset="0"/>
-                <a:ea typeface="Calibri" pitchFamily="34" charset="-122"/>
-                <a:cs typeface="Calibri" pitchFamily="34" charset="-120"/>
-              </a:rPr>
-              <a:t>ENTREGUE</a:t>
-            </a:r>
-            <a:endParaRPr lang="en-US" sz="800" dirty="0"/>
-          </a:p>
-        </p:txBody>
-      </p:sp>
-      <p:sp>
-        <p:nvSpPr>
-          <p:cNvPr id="19" name="Shape 17"/>
-          <p:cNvSpPr/>
-          <p:nvPr/>
-        </p:nvSpPr>
-        <p:spPr>
-          <a:xfrm>
-            <a:off x="4478601" y="2670048"/>
-            <a:ext cx="146304" cy="146304"/>
-          </a:xfrm>
-          <a:prstGeom prst="ellipse">
-            <a:avLst/>
-          </a:prstGeom>
-          <a:solidFill>
-            <a:srgbClr val="1E9E5A"/>
-          </a:solidFill>
-          <a:ln w="19050">
-            <a:solidFill>
-              <a:srgbClr val="FFFFFF"/>
-            </a:solidFill>
-            <a:prstDash val="solid"/>
-          </a:ln>
-        </p:spPr>
-      </p:sp>
-      <p:sp>
-        <p:nvSpPr>
-          <p:cNvPr id="20" name="Text 18"/>
-          <p:cNvSpPr/>
-          <p:nvPr/>
-        </p:nvSpPr>
-        <p:spPr>
-          <a:xfrm>
-            <a:off x="3862687" y="2148840"/>
-            <a:ext cx="1378131" cy="274320"/>
-          </a:xfrm>
-          <a:prstGeom prst="rect">
-            <a:avLst/>
-          </a:prstGeom>
-          <a:noFill/>
-          <a:ln/>
-        </p:spPr>
-        <p:txBody>
-          <a:bodyPr wrap="square" rtlCol="0" anchor="ctr"/>
-          <a:lstStyle/>
-          <a:p>
-            <a:pPr algn="ctr" indent="0" marL="0">
-              <a:buNone/>
-            </a:pPr>
-            <a:r>
-              <a:rPr lang="en-US" sz="1000" b="1" dirty="0">
-                <a:solidFill>
-                  <a:srgbClr val="4A5568"/>
-                </a:solidFill>
-                <a:latin typeface="Calibri" pitchFamily="34" charset="0"/>
-                <a:ea typeface="Calibri" pitchFamily="34" charset="-122"/>
-                <a:cs typeface="Calibri" pitchFamily="34" charset="-120"/>
-              </a:rPr>
-              <a:t>Mar–Abr</a:t>
-            </a:r>
-            <a:endParaRPr lang="en-US" sz="1000" dirty="0"/>
-          </a:p>
-        </p:txBody>
-      </p:sp>
-      <p:sp>
-        <p:nvSpPr>
-          <p:cNvPr id="21" name="Shape 19"/>
-          <p:cNvSpPr/>
-          <p:nvPr/>
-        </p:nvSpPr>
-        <p:spPr>
-          <a:xfrm>
-            <a:off x="3862687" y="3063240"/>
-            <a:ext cx="1378131" cy="1737360"/>
+              <a:t>+10% aprovação financeira · +5 pts NPS e fidelização · escalabilidade nacional.</a:t>
+            </a:r>
+            <a:endParaRPr lang="en-US" sz="1100" dirty="0"/>
+          </a:p>
+        </p:txBody>
+      </p:sp>
+      <p:sp>
+        <p:nvSpPr>
+          <p:cNvPr id="17" name="Shape 15"/>
+          <p:cNvSpPr/>
+          <p:nvPr/>
+        </p:nvSpPr>
+        <p:spPr>
+          <a:xfrm>
+            <a:off x="777240" y="3977640"/>
+            <a:ext cx="10634472" cy="1188720"/>
           </a:xfrm>
           <a:prstGeom prst="roundRect">
             <a:avLst>
-              <a:gd name="adj" fmla="val 2654"/>
+              <a:gd name="adj" fmla="val 2308"/>
             </a:avLst>
           </a:prstGeom>
           <a:solidFill>
-            <a:srgbClr val="F7F9FC"/>
+            <a:srgbClr val="E7F6EE"/>
           </a:solidFill>
           <a:ln/>
         </p:spPr>
       </p:sp>
       <p:sp>
         <p:nvSpPr>
-          <p:cNvPr id="22" name="Text 20"/>
-          <p:cNvSpPr/>
-          <p:nvPr/>
-        </p:nvSpPr>
-        <p:spPr>
-          <a:xfrm>
-            <a:off x="3954127" y="3200400"/>
-            <a:ext cx="1195251" cy="292608"/>
+          <p:cNvPr id="18" name="Text 16"/>
+          <p:cNvSpPr/>
+          <p:nvPr/>
+        </p:nvSpPr>
+        <p:spPr>
+          <a:xfrm>
+            <a:off x="1051560" y="4123944"/>
+            <a:ext cx="10085832" cy="274320"/>
           </a:xfrm>
           <a:prstGeom prst="rect">
             <a:avLst/>
@@ -10444,11 +10848,11 @@
           </a:bodyPr>
           <a:lstStyle/>
           <a:p>
-            <a:pPr algn="ctr" indent="0" marL="0">
-              <a:buNone/>
-            </a:pPr>
-            <a:r>
-              <a:rPr lang="en-US" sz="1150" b="1" dirty="0">
+            <a:pPr indent="0" marL="0">
+              <a:buNone/>
+            </a:pPr>
+            <a:r>
+              <a:rPr lang="en-US" sz="1350" b="1" dirty="0">
                 <a:solidFill>
                   <a:srgbClr val="091426"/>
                 </a:solidFill>
@@ -10456,22 +10860,22 @@
                 <a:ea typeface="Calibri" pitchFamily="34" charset="-122"/>
                 <a:cs typeface="Calibri" pitchFamily="34" charset="-120"/>
               </a:rPr>
-              <a:t>Integrações</a:t>
-            </a:r>
-            <a:endParaRPr lang="en-US" sz="1150" dirty="0"/>
-          </a:p>
-        </p:txBody>
-      </p:sp>
-      <p:sp>
-        <p:nvSpPr>
-          <p:cNvPr id="23" name="Text 21"/>
-          <p:cNvSpPr/>
-          <p:nvPr/>
-        </p:nvSpPr>
-        <p:spPr>
-          <a:xfrm>
-            <a:off x="3954127" y="3547872"/>
-            <a:ext cx="1195251" cy="1097280"/>
+              <a:t>O piloto já quantificou: cerca de R$ 940 mil por ano em uma única concessionária</a:t>
+            </a:r>
+            <a:endParaRPr lang="en-US" sz="1350" dirty="0"/>
+          </a:p>
+        </p:txBody>
+      </p:sp>
+      <p:sp>
+        <p:nvSpPr>
+          <p:cNvPr id="19" name="Text 17"/>
+          <p:cNvSpPr/>
+          <p:nvPr/>
+        </p:nvSpPr>
+        <p:spPr>
+          <a:xfrm>
+            <a:off x="1051560" y="4434840"/>
+            <a:ext cx="10085832" cy="621792"/>
           </a:xfrm>
           <a:prstGeom prst="rect">
             <a:avLst/>
@@ -10485,898 +10889,53 @@
           </a:bodyPr>
           <a:lstStyle/>
           <a:p>
+            <a:pPr indent="0" marL="0">
+              <a:lnSpc>
+                <a:spcPts val="1600"/>
+              </a:lnSpc>
+              <a:buNone/>
+            </a:pPr>
+            <a:r>
+              <a:rPr lang="en-US" sz="1150" dirty="0">
+                <a:solidFill>
+                  <a:srgbClr val="4A5568"/>
+                </a:solidFill>
+                <a:latin typeface="Calibri" pitchFamily="34" charset="0"/>
+                <a:ea typeface="Calibri" pitchFamily="34" charset="-122"/>
+                <a:cs typeface="Calibri" pitchFamily="34" charset="-120"/>
+              </a:rPr>
+              <a:t>Prêmios de campanha (~R$ 400 mil) + gap de absorção do K2 (~R$ 490 mil) + Seguros e Consórcio (~R$ 50 mil). Um único prêmio de campanha capturado paga o ano inteiro de plataforma.</a:t>
+            </a:r>
+            <a:endParaRPr lang="en-US" sz="1150" dirty="0"/>
+          </a:p>
+        </p:txBody>
+      </p:sp>
+      <p:sp>
+        <p:nvSpPr>
+          <p:cNvPr id="20" name="Text 18"/>
+          <p:cNvSpPr/>
+          <p:nvPr/>
+        </p:nvSpPr>
+        <p:spPr>
+          <a:xfrm>
+            <a:off x="777240" y="5440680"/>
+            <a:ext cx="10634472" cy="274320"/>
+          </a:xfrm>
+          <a:prstGeom prst="rect">
+            <a:avLst/>
+          </a:prstGeom>
+          <a:noFill/>
+          <a:ln/>
+        </p:spPr>
+        <p:txBody>
+          <a:bodyPr wrap="square" rtlCol="0" anchor="ctr"/>
+          <a:lstStyle/>
+          <a:p>
             <a:pPr algn="ctr" indent="0" marL="0">
-              <a:lnSpc>
-                <a:spcPts val="1250"/>
-              </a:lnSpc>
-              <a:buNone/>
-            </a:pPr>
-            <a:r>
-              <a:rPr lang="en-US" sz="900" dirty="0">
-                <a:solidFill>
-                  <a:srgbClr val="4A5568"/>
-                </a:solidFill>
-                <a:latin typeface="Calibri" pitchFamily="34" charset="0"/>
-                <a:ea typeface="Calibri" pitchFamily="34" charset="-122"/>
-                <a:cs typeface="Calibri" pitchFamily="34" charset="-120"/>
-              </a:rPr>
-              <a:t>conexões e testes</a:t>
-            </a:r>
-            <a:endParaRPr lang="en-US" sz="900" dirty="0"/>
-          </a:p>
-        </p:txBody>
-      </p:sp>
-      <p:sp>
-        <p:nvSpPr>
-          <p:cNvPr id="24" name="Text 22"/>
-          <p:cNvSpPr/>
-          <p:nvPr/>
-        </p:nvSpPr>
-        <p:spPr>
-          <a:xfrm>
-            <a:off x="3862687" y="4434840"/>
-            <a:ext cx="1378131" cy="237744"/>
-          </a:xfrm>
-          <a:prstGeom prst="rect">
-            <a:avLst/>
-          </a:prstGeom>
-          <a:noFill/>
-          <a:ln/>
-        </p:spPr>
-        <p:txBody>
-          <a:bodyPr wrap="square" rtlCol="0" anchor="ctr"/>
-          <a:lstStyle/>
-          <a:p>
-            <a:pPr algn="ctr" indent="0" marL="0">
-              <a:buNone/>
-            </a:pPr>
-            <a:r>
-              <a:rPr lang="en-US" sz="800" b="1" spc="100" kern="0" dirty="0">
-                <a:solidFill>
-                  <a:srgbClr val="1E9E5A"/>
-                </a:solidFill>
-                <a:latin typeface="Calibri" pitchFamily="34" charset="0"/>
-                <a:ea typeface="Calibri" pitchFamily="34" charset="-122"/>
-                <a:cs typeface="Calibri" pitchFamily="34" charset="-120"/>
-              </a:rPr>
-              <a:t>ENTREGUE</a:t>
-            </a:r>
-            <a:endParaRPr lang="en-US" sz="800" dirty="0"/>
-          </a:p>
-        </p:txBody>
-      </p:sp>
-      <p:sp>
-        <p:nvSpPr>
-          <p:cNvPr id="25" name="Shape 23"/>
-          <p:cNvSpPr/>
-          <p:nvPr/>
-        </p:nvSpPr>
-        <p:spPr>
-          <a:xfrm>
-            <a:off x="6021324" y="2670048"/>
-            <a:ext cx="146304" cy="146304"/>
-          </a:xfrm>
-          <a:prstGeom prst="ellipse">
-            <a:avLst/>
-          </a:prstGeom>
-          <a:solidFill>
-            <a:srgbClr val="1E9E5A"/>
-          </a:solidFill>
-          <a:ln w="19050">
-            <a:solidFill>
-              <a:srgbClr val="FFFFFF"/>
-            </a:solidFill>
-            <a:prstDash val="solid"/>
-          </a:ln>
-        </p:spPr>
-      </p:sp>
-      <p:sp>
-        <p:nvSpPr>
-          <p:cNvPr id="26" name="Text 24"/>
-          <p:cNvSpPr/>
-          <p:nvPr/>
-        </p:nvSpPr>
-        <p:spPr>
-          <a:xfrm>
-            <a:off x="5405410" y="2148840"/>
-            <a:ext cx="1378131" cy="274320"/>
-          </a:xfrm>
-          <a:prstGeom prst="rect">
-            <a:avLst/>
-          </a:prstGeom>
-          <a:noFill/>
-          <a:ln/>
-        </p:spPr>
-        <p:txBody>
-          <a:bodyPr wrap="square" rtlCol="0" anchor="ctr"/>
-          <a:lstStyle/>
-          <a:p>
-            <a:pPr algn="ctr" indent="0" marL="0">
-              <a:buNone/>
-            </a:pPr>
-            <a:r>
-              <a:rPr lang="en-US" sz="1000" b="1" dirty="0">
-                <a:solidFill>
-                  <a:srgbClr val="4A5568"/>
-                </a:solidFill>
-                <a:latin typeface="Calibri" pitchFamily="34" charset="0"/>
-                <a:ea typeface="Calibri" pitchFamily="34" charset="-122"/>
-                <a:cs typeface="Calibri" pitchFamily="34" charset="-120"/>
-              </a:rPr>
-              <a:t>Abr</a:t>
-            </a:r>
-            <a:endParaRPr lang="en-US" sz="1000" dirty="0"/>
-          </a:p>
-        </p:txBody>
-      </p:sp>
-      <p:sp>
-        <p:nvSpPr>
-          <p:cNvPr id="27" name="Shape 25"/>
-          <p:cNvSpPr/>
-          <p:nvPr/>
-        </p:nvSpPr>
-        <p:spPr>
-          <a:xfrm>
-            <a:off x="5405410" y="3063240"/>
-            <a:ext cx="1378131" cy="1737360"/>
-          </a:xfrm>
-          <a:prstGeom prst="roundRect">
-            <a:avLst>
-              <a:gd name="adj" fmla="val 2654"/>
-            </a:avLst>
-          </a:prstGeom>
-          <a:solidFill>
-            <a:srgbClr val="F7F9FC"/>
-          </a:solidFill>
-          <a:ln/>
-        </p:spPr>
-      </p:sp>
-      <p:sp>
-        <p:nvSpPr>
-          <p:cNvPr id="28" name="Text 26"/>
-          <p:cNvSpPr/>
-          <p:nvPr/>
-        </p:nvSpPr>
-        <p:spPr>
-          <a:xfrm>
-            <a:off x="5496850" y="3200400"/>
-            <a:ext cx="1195251" cy="292608"/>
-          </a:xfrm>
-          <a:prstGeom prst="rect">
-            <a:avLst/>
-          </a:prstGeom>
-          <a:noFill/>
-          <a:ln/>
-        </p:spPr>
-        <p:txBody>
-          <a:bodyPr wrap="square" rtlCol="0" anchor="ctr">
-            <a:normAutofit/>
-          </a:bodyPr>
-          <a:lstStyle/>
-          <a:p>
-            <a:pPr algn="ctr" indent="0" marL="0">
-              <a:buNone/>
-            </a:pPr>
-            <a:r>
-              <a:rPr lang="en-US" sz="1150" b="1" dirty="0">
-                <a:solidFill>
-                  <a:srgbClr val="091426"/>
-                </a:solidFill>
-                <a:latin typeface="Calibri" pitchFamily="34" charset="0"/>
-                <a:ea typeface="Calibri" pitchFamily="34" charset="-122"/>
-                <a:cs typeface="Calibri" pitchFamily="34" charset="-120"/>
-              </a:rPr>
-              <a:t>Treinamento</a:t>
-            </a:r>
-            <a:endParaRPr lang="en-US" sz="1150" dirty="0"/>
-          </a:p>
-        </p:txBody>
-      </p:sp>
-      <p:sp>
-        <p:nvSpPr>
-          <p:cNvPr id="29" name="Text 27"/>
-          <p:cNvSpPr/>
-          <p:nvPr/>
-        </p:nvSpPr>
-        <p:spPr>
-          <a:xfrm>
-            <a:off x="5496850" y="3547872"/>
-            <a:ext cx="1195251" cy="1097280"/>
-          </a:xfrm>
-          <a:prstGeom prst="rect">
-            <a:avLst/>
-          </a:prstGeom>
-          <a:noFill/>
-          <a:ln/>
-        </p:spPr>
-        <p:txBody>
-          <a:bodyPr wrap="square" rtlCol="0" anchor="t">
-            <a:normAutofit/>
-          </a:bodyPr>
-          <a:lstStyle/>
-          <a:p>
-            <a:pPr algn="ctr" indent="0" marL="0">
-              <a:lnSpc>
-                <a:spcPts val="1250"/>
-              </a:lnSpc>
-              <a:buNone/>
-            </a:pPr>
-            <a:r>
-              <a:rPr lang="en-US" sz="900" dirty="0">
-                <a:solidFill>
-                  <a:srgbClr val="4A5568"/>
-                </a:solidFill>
-                <a:latin typeface="Calibri" pitchFamily="34" charset="0"/>
-                <a:ea typeface="Calibri" pitchFamily="34" charset="-122"/>
-                <a:cs typeface="Calibri" pitchFamily="34" charset="-120"/>
-              </a:rPr>
-              <a:t>capacitação das equipes</a:t>
-            </a:r>
-            <a:endParaRPr lang="en-US" sz="900" dirty="0"/>
-          </a:p>
-        </p:txBody>
-      </p:sp>
-      <p:sp>
-        <p:nvSpPr>
-          <p:cNvPr id="30" name="Text 28"/>
-          <p:cNvSpPr/>
-          <p:nvPr/>
-        </p:nvSpPr>
-        <p:spPr>
-          <a:xfrm>
-            <a:off x="5405410" y="4434840"/>
-            <a:ext cx="1378131" cy="237744"/>
-          </a:xfrm>
-          <a:prstGeom prst="rect">
-            <a:avLst/>
-          </a:prstGeom>
-          <a:noFill/>
-          <a:ln/>
-        </p:spPr>
-        <p:txBody>
-          <a:bodyPr wrap="square" rtlCol="0" anchor="ctr"/>
-          <a:lstStyle/>
-          <a:p>
-            <a:pPr algn="ctr" indent="0" marL="0">
-              <a:buNone/>
-            </a:pPr>
-            <a:r>
-              <a:rPr lang="en-US" sz="800" b="1" spc="100" kern="0" dirty="0">
-                <a:solidFill>
-                  <a:srgbClr val="1E9E5A"/>
-                </a:solidFill>
-                <a:latin typeface="Calibri" pitchFamily="34" charset="0"/>
-                <a:ea typeface="Calibri" pitchFamily="34" charset="-122"/>
-                <a:cs typeface="Calibri" pitchFamily="34" charset="-120"/>
-              </a:rPr>
-              <a:t>ENTREGUE</a:t>
-            </a:r>
-            <a:endParaRPr lang="en-US" sz="800" dirty="0"/>
-          </a:p>
-        </p:txBody>
-      </p:sp>
-      <p:sp>
-        <p:nvSpPr>
-          <p:cNvPr id="31" name="Shape 29"/>
-          <p:cNvSpPr/>
-          <p:nvPr/>
-        </p:nvSpPr>
-        <p:spPr>
-          <a:xfrm>
-            <a:off x="7564047" y="2670048"/>
-            <a:ext cx="146304" cy="146304"/>
-          </a:xfrm>
-          <a:prstGeom prst="ellipse">
-            <a:avLst/>
-          </a:prstGeom>
-          <a:solidFill>
-            <a:srgbClr val="1E9E5A"/>
-          </a:solidFill>
-          <a:ln w="19050">
-            <a:solidFill>
-              <a:srgbClr val="FFFFFF"/>
-            </a:solidFill>
-            <a:prstDash val="solid"/>
-          </a:ln>
-        </p:spPr>
-      </p:sp>
-      <p:sp>
-        <p:nvSpPr>
-          <p:cNvPr id="32" name="Text 30"/>
-          <p:cNvSpPr/>
-          <p:nvPr/>
-        </p:nvSpPr>
-        <p:spPr>
-          <a:xfrm>
-            <a:off x="6948134" y="2148840"/>
-            <a:ext cx="1378131" cy="274320"/>
-          </a:xfrm>
-          <a:prstGeom prst="rect">
-            <a:avLst/>
-          </a:prstGeom>
-          <a:noFill/>
-          <a:ln/>
-        </p:spPr>
-        <p:txBody>
-          <a:bodyPr wrap="square" rtlCol="0" anchor="ctr"/>
-          <a:lstStyle/>
-          <a:p>
-            <a:pPr algn="ctr" indent="0" marL="0">
-              <a:buNone/>
-            </a:pPr>
-            <a:r>
-              <a:rPr lang="en-US" sz="1000" b="1" dirty="0">
-                <a:solidFill>
-                  <a:srgbClr val="4A5568"/>
-                </a:solidFill>
-                <a:latin typeface="Calibri" pitchFamily="34" charset="0"/>
-                <a:ea typeface="Calibri" pitchFamily="34" charset="-122"/>
-                <a:cs typeface="Calibri" pitchFamily="34" charset="-120"/>
-              </a:rPr>
-              <a:t>Abr–Mai</a:t>
-            </a:r>
-            <a:endParaRPr lang="en-US" sz="1000" dirty="0"/>
-          </a:p>
-        </p:txBody>
-      </p:sp>
-      <p:sp>
-        <p:nvSpPr>
-          <p:cNvPr id="33" name="Shape 31"/>
-          <p:cNvSpPr/>
-          <p:nvPr/>
-        </p:nvSpPr>
-        <p:spPr>
-          <a:xfrm>
-            <a:off x="6948134" y="3063240"/>
-            <a:ext cx="1378131" cy="1737360"/>
-          </a:xfrm>
-          <a:prstGeom prst="roundRect">
-            <a:avLst>
-              <a:gd name="adj" fmla="val 2654"/>
-            </a:avLst>
-          </a:prstGeom>
-          <a:solidFill>
-            <a:srgbClr val="F7F9FC"/>
-          </a:solidFill>
-          <a:ln/>
-        </p:spPr>
-      </p:sp>
-      <p:sp>
-        <p:nvSpPr>
-          <p:cNvPr id="34" name="Text 32"/>
-          <p:cNvSpPr/>
-          <p:nvPr/>
-        </p:nvSpPr>
-        <p:spPr>
-          <a:xfrm>
-            <a:off x="7039574" y="3200400"/>
-            <a:ext cx="1195251" cy="292608"/>
-          </a:xfrm>
-          <a:prstGeom prst="rect">
-            <a:avLst/>
-          </a:prstGeom>
-          <a:noFill/>
-          <a:ln/>
-        </p:spPr>
-        <p:txBody>
-          <a:bodyPr wrap="square" rtlCol="0" anchor="ctr">
-            <a:normAutofit/>
-          </a:bodyPr>
-          <a:lstStyle/>
-          <a:p>
-            <a:pPr algn="ctr" indent="0" marL="0">
-              <a:buNone/>
-            </a:pPr>
-            <a:r>
-              <a:rPr lang="en-US" sz="1150" b="1" dirty="0">
-                <a:solidFill>
-                  <a:srgbClr val="091426"/>
-                </a:solidFill>
-                <a:latin typeface="Calibri" pitchFamily="34" charset="0"/>
-                <a:ea typeface="Calibri" pitchFamily="34" charset="-122"/>
-                <a:cs typeface="Calibri" pitchFamily="34" charset="-120"/>
-              </a:rPr>
-              <a:t>Piloto</a:t>
-            </a:r>
-            <a:endParaRPr lang="en-US" sz="1150" dirty="0"/>
-          </a:p>
-        </p:txBody>
-      </p:sp>
-      <p:sp>
-        <p:nvSpPr>
-          <p:cNvPr id="35" name="Text 33"/>
-          <p:cNvSpPr/>
-          <p:nvPr/>
-        </p:nvSpPr>
-        <p:spPr>
-          <a:xfrm>
-            <a:off x="7039574" y="3547872"/>
-            <a:ext cx="1195251" cy="1097280"/>
-          </a:xfrm>
-          <a:prstGeom prst="rect">
-            <a:avLst/>
-          </a:prstGeom>
-          <a:noFill/>
-          <a:ln/>
-        </p:spPr>
-        <p:txBody>
-          <a:bodyPr wrap="square" rtlCol="0" anchor="t">
-            <a:normAutofit/>
-          </a:bodyPr>
-          <a:lstStyle/>
-          <a:p>
-            <a:pPr algn="ctr" indent="0" marL="0">
-              <a:lnSpc>
-                <a:spcPts val="1250"/>
-              </a:lnSpc>
-              <a:buNone/>
-            </a:pPr>
-            <a:r>
-              <a:rPr lang="en-US" sz="900" dirty="0">
-                <a:solidFill>
-                  <a:srgbClr val="4A5568"/>
-                </a:solidFill>
-                <a:latin typeface="Calibri" pitchFamily="34" charset="0"/>
-                <a:ea typeface="Calibri" pitchFamily="34" charset="-122"/>
-                <a:cs typeface="Calibri" pitchFamily="34" charset="-120"/>
-              </a:rPr>
-              <a:t>implantação Nippon Motos</a:t>
-            </a:r>
-            <a:endParaRPr lang="en-US" sz="900" dirty="0"/>
-          </a:p>
-        </p:txBody>
-      </p:sp>
-      <p:sp>
-        <p:nvSpPr>
-          <p:cNvPr id="36" name="Text 34"/>
-          <p:cNvSpPr/>
-          <p:nvPr/>
-        </p:nvSpPr>
-        <p:spPr>
-          <a:xfrm>
-            <a:off x="6948134" y="4434840"/>
-            <a:ext cx="1378131" cy="237744"/>
-          </a:xfrm>
-          <a:prstGeom prst="rect">
-            <a:avLst/>
-          </a:prstGeom>
-          <a:noFill/>
-          <a:ln/>
-        </p:spPr>
-        <p:txBody>
-          <a:bodyPr wrap="square" rtlCol="0" anchor="ctr"/>
-          <a:lstStyle/>
-          <a:p>
-            <a:pPr algn="ctr" indent="0" marL="0">
-              <a:buNone/>
-            </a:pPr>
-            <a:r>
-              <a:rPr lang="en-US" sz="800" b="1" spc="100" kern="0" dirty="0">
-                <a:solidFill>
-                  <a:srgbClr val="1E9E5A"/>
-                </a:solidFill>
-                <a:latin typeface="Calibri" pitchFamily="34" charset="0"/>
-                <a:ea typeface="Calibri" pitchFamily="34" charset="-122"/>
-                <a:cs typeface="Calibri" pitchFamily="34" charset="-120"/>
-              </a:rPr>
-              <a:t>ENTREGUE</a:t>
-            </a:r>
-            <a:endParaRPr lang="en-US" sz="800" dirty="0"/>
-          </a:p>
-        </p:txBody>
-      </p:sp>
-      <p:sp>
-        <p:nvSpPr>
-          <p:cNvPr id="37" name="Shape 35"/>
-          <p:cNvSpPr/>
-          <p:nvPr/>
-        </p:nvSpPr>
-        <p:spPr>
-          <a:xfrm>
-            <a:off x="9106771" y="2670048"/>
-            <a:ext cx="146304" cy="146304"/>
-          </a:xfrm>
-          <a:prstGeom prst="ellipse">
-            <a:avLst/>
-          </a:prstGeom>
-          <a:solidFill>
-            <a:srgbClr val="1E9E5A"/>
-          </a:solidFill>
-          <a:ln w="19050">
-            <a:solidFill>
-              <a:srgbClr val="FFFFFF"/>
-            </a:solidFill>
-            <a:prstDash val="solid"/>
-          </a:ln>
-        </p:spPr>
-      </p:sp>
-      <p:sp>
-        <p:nvSpPr>
-          <p:cNvPr id="38" name="Text 36"/>
-          <p:cNvSpPr/>
-          <p:nvPr/>
-        </p:nvSpPr>
-        <p:spPr>
-          <a:xfrm>
-            <a:off x="8490857" y="2148840"/>
-            <a:ext cx="1378131" cy="274320"/>
-          </a:xfrm>
-          <a:prstGeom prst="rect">
-            <a:avLst/>
-          </a:prstGeom>
-          <a:noFill/>
-          <a:ln/>
-        </p:spPr>
-        <p:txBody>
-          <a:bodyPr wrap="square" rtlCol="0" anchor="ctr"/>
-          <a:lstStyle/>
-          <a:p>
-            <a:pPr algn="ctr" indent="0" marL="0">
-              <a:buNone/>
-            </a:pPr>
-            <a:r>
-              <a:rPr lang="en-US" sz="1000" b="1" dirty="0">
-                <a:solidFill>
-                  <a:srgbClr val="4A5568"/>
-                </a:solidFill>
-                <a:latin typeface="Calibri" pitchFamily="34" charset="0"/>
-                <a:ea typeface="Calibri" pitchFamily="34" charset="-122"/>
-                <a:cs typeface="Calibri" pitchFamily="34" charset="-120"/>
-              </a:rPr>
-              <a:t>Jul–Ago</a:t>
-            </a:r>
-            <a:endParaRPr lang="en-US" sz="1000" dirty="0"/>
-          </a:p>
-        </p:txBody>
-      </p:sp>
-      <p:sp>
-        <p:nvSpPr>
-          <p:cNvPr id="39" name="Shape 37"/>
-          <p:cNvSpPr/>
-          <p:nvPr/>
-        </p:nvSpPr>
-        <p:spPr>
-          <a:xfrm>
-            <a:off x="8490857" y="3063240"/>
-            <a:ext cx="1378131" cy="1737360"/>
-          </a:xfrm>
-          <a:prstGeom prst="roundRect">
-            <a:avLst>
-              <a:gd name="adj" fmla="val 2654"/>
-            </a:avLst>
-          </a:prstGeom>
-          <a:solidFill>
-            <a:srgbClr val="F7F9FC"/>
-          </a:solidFill>
-          <a:ln/>
-        </p:spPr>
-      </p:sp>
-      <p:sp>
-        <p:nvSpPr>
-          <p:cNvPr id="40" name="Text 38"/>
-          <p:cNvSpPr/>
-          <p:nvPr/>
-        </p:nvSpPr>
-        <p:spPr>
-          <a:xfrm>
-            <a:off x="8582297" y="3200400"/>
-            <a:ext cx="1195251" cy="292608"/>
-          </a:xfrm>
-          <a:prstGeom prst="rect">
-            <a:avLst/>
-          </a:prstGeom>
-          <a:noFill/>
-          <a:ln/>
-        </p:spPr>
-        <p:txBody>
-          <a:bodyPr wrap="square" rtlCol="0" anchor="ctr">
-            <a:normAutofit/>
-          </a:bodyPr>
-          <a:lstStyle/>
-          <a:p>
-            <a:pPr algn="ctr" indent="0" marL="0">
-              <a:buNone/>
-            </a:pPr>
-            <a:r>
-              <a:rPr lang="en-US" sz="1150" b="1" dirty="0">
-                <a:solidFill>
-                  <a:srgbClr val="091426"/>
-                </a:solidFill>
-                <a:latin typeface="Calibri" pitchFamily="34" charset="0"/>
-                <a:ea typeface="Calibri" pitchFamily="34" charset="-122"/>
-                <a:cs typeface="Calibri" pitchFamily="34" charset="-120"/>
-              </a:rPr>
-              <a:t>PDCA</a:t>
-            </a:r>
-            <a:endParaRPr lang="en-US" sz="1150" dirty="0"/>
-          </a:p>
-        </p:txBody>
-      </p:sp>
-      <p:sp>
-        <p:nvSpPr>
-          <p:cNvPr id="41" name="Text 39"/>
-          <p:cNvSpPr/>
-          <p:nvPr/>
-        </p:nvSpPr>
-        <p:spPr>
-          <a:xfrm>
-            <a:off x="8582297" y="3547872"/>
-            <a:ext cx="1195251" cy="1097280"/>
-          </a:xfrm>
-          <a:prstGeom prst="rect">
-            <a:avLst/>
-          </a:prstGeom>
-          <a:noFill/>
-          <a:ln/>
-        </p:spPr>
-        <p:txBody>
-          <a:bodyPr wrap="square" rtlCol="0" anchor="t">
-            <a:normAutofit/>
-          </a:bodyPr>
-          <a:lstStyle/>
-          <a:p>
-            <a:pPr algn="ctr" indent="0" marL="0">
-              <a:lnSpc>
-                <a:spcPts val="1250"/>
-              </a:lnSpc>
-              <a:buNone/>
-            </a:pPr>
-            <a:r>
-              <a:rPr lang="en-US" sz="900" dirty="0">
-                <a:solidFill>
-                  <a:srgbClr val="4A5568"/>
-                </a:solidFill>
-                <a:latin typeface="Calibri" pitchFamily="34" charset="0"/>
-                <a:ea typeface="Calibri" pitchFamily="34" charset="-122"/>
-                <a:cs typeface="Calibri" pitchFamily="34" charset="-120"/>
-              </a:rPr>
-              <a:t>melhoria contínua + novas frentes</a:t>
-            </a:r>
-            <a:endParaRPr lang="en-US" sz="900" dirty="0"/>
-          </a:p>
-        </p:txBody>
-      </p:sp>
-      <p:sp>
-        <p:nvSpPr>
-          <p:cNvPr id="42" name="Text 40"/>
-          <p:cNvSpPr/>
-          <p:nvPr/>
-        </p:nvSpPr>
-        <p:spPr>
-          <a:xfrm>
-            <a:off x="8490857" y="4434840"/>
-            <a:ext cx="1378131" cy="237744"/>
-          </a:xfrm>
-          <a:prstGeom prst="rect">
-            <a:avLst/>
-          </a:prstGeom>
-          <a:noFill/>
-          <a:ln/>
-        </p:spPr>
-        <p:txBody>
-          <a:bodyPr wrap="square" rtlCol="0" anchor="ctr"/>
-          <a:lstStyle/>
-          <a:p>
-            <a:pPr algn="ctr" indent="0" marL="0">
-              <a:buNone/>
-            </a:pPr>
-            <a:r>
-              <a:rPr lang="en-US" sz="800" b="1" spc="100" kern="0" dirty="0">
-                <a:solidFill>
-                  <a:srgbClr val="1E9E5A"/>
-                </a:solidFill>
-                <a:latin typeface="Calibri" pitchFamily="34" charset="0"/>
-                <a:ea typeface="Calibri" pitchFamily="34" charset="-122"/>
-                <a:cs typeface="Calibri" pitchFamily="34" charset="-120"/>
-              </a:rPr>
-              <a:t>ENTREGUE</a:t>
-            </a:r>
-            <a:endParaRPr lang="en-US" sz="800" dirty="0"/>
-          </a:p>
-        </p:txBody>
-      </p:sp>
-      <p:sp>
-        <p:nvSpPr>
-          <p:cNvPr id="43" name="Shape 41"/>
-          <p:cNvSpPr/>
-          <p:nvPr/>
-        </p:nvSpPr>
-        <p:spPr>
-          <a:xfrm>
-            <a:off x="10649494" y="2670048"/>
-            <a:ext cx="146304" cy="146304"/>
-          </a:xfrm>
-          <a:prstGeom prst="ellipse">
-            <a:avLst/>
-          </a:prstGeom>
-          <a:solidFill>
-            <a:srgbClr val="0365FE"/>
-          </a:solidFill>
-          <a:ln w="19050">
-            <a:solidFill>
-              <a:srgbClr val="FFFFFF"/>
-            </a:solidFill>
-            <a:prstDash val="solid"/>
-          </a:ln>
-        </p:spPr>
-      </p:sp>
-      <p:sp>
-        <p:nvSpPr>
-          <p:cNvPr id="44" name="Text 42"/>
-          <p:cNvSpPr/>
-          <p:nvPr/>
-        </p:nvSpPr>
-        <p:spPr>
-          <a:xfrm>
-            <a:off x="10033581" y="2148840"/>
-            <a:ext cx="1378131" cy="274320"/>
-          </a:xfrm>
-          <a:prstGeom prst="rect">
-            <a:avLst/>
-          </a:prstGeom>
-          <a:noFill/>
-          <a:ln/>
-        </p:spPr>
-        <p:txBody>
-          <a:bodyPr wrap="square" rtlCol="0" anchor="ctr"/>
-          <a:lstStyle/>
-          <a:p>
-            <a:pPr algn="ctr" indent="0" marL="0">
-              <a:buNone/>
-            </a:pPr>
-            <a:r>
-              <a:rPr lang="en-US" sz="1000" b="1" dirty="0">
-                <a:solidFill>
-                  <a:srgbClr val="0365FE"/>
-                </a:solidFill>
-                <a:latin typeface="Calibri" pitchFamily="34" charset="0"/>
-                <a:ea typeface="Calibri" pitchFamily="34" charset="-122"/>
-                <a:cs typeface="Calibri" pitchFamily="34" charset="-120"/>
-              </a:rPr>
-              <a:t>Set–Dez</a:t>
-            </a:r>
-            <a:endParaRPr lang="en-US" sz="1000" dirty="0"/>
-          </a:p>
-        </p:txBody>
-      </p:sp>
-      <p:sp>
-        <p:nvSpPr>
-          <p:cNvPr id="45" name="Shape 43"/>
-          <p:cNvSpPr/>
-          <p:nvPr/>
-        </p:nvSpPr>
-        <p:spPr>
-          <a:xfrm>
-            <a:off x="10033581" y="3063240"/>
-            <a:ext cx="1378131" cy="1737360"/>
-          </a:xfrm>
-          <a:prstGeom prst="roundRect">
-            <a:avLst>
-              <a:gd name="adj" fmla="val 2654"/>
-            </a:avLst>
-          </a:prstGeom>
-          <a:solidFill>
-            <a:srgbClr val="EEF4FF"/>
-          </a:solidFill>
-          <a:ln w="12700">
-            <a:solidFill>
-              <a:srgbClr val="0365FE"/>
-            </a:solidFill>
-            <a:prstDash val="solid"/>
-          </a:ln>
-        </p:spPr>
-      </p:sp>
-      <p:sp>
-        <p:nvSpPr>
-          <p:cNvPr id="46" name="Text 44"/>
-          <p:cNvSpPr/>
-          <p:nvPr/>
-        </p:nvSpPr>
-        <p:spPr>
-          <a:xfrm>
-            <a:off x="10125021" y="3200400"/>
-            <a:ext cx="1195251" cy="292608"/>
-          </a:xfrm>
-          <a:prstGeom prst="rect">
-            <a:avLst/>
-          </a:prstGeom>
-          <a:noFill/>
-          <a:ln/>
-        </p:spPr>
-        <p:txBody>
-          <a:bodyPr wrap="square" rtlCol="0" anchor="ctr">
-            <a:normAutofit/>
-          </a:bodyPr>
-          <a:lstStyle/>
-          <a:p>
-            <a:pPr algn="ctr" indent="0" marL="0">
-              <a:buNone/>
-            </a:pPr>
-            <a:r>
-              <a:rPr lang="en-US" sz="1150" b="1" dirty="0">
-                <a:solidFill>
-                  <a:srgbClr val="091426"/>
-                </a:solidFill>
-                <a:latin typeface="Calibri" pitchFamily="34" charset="0"/>
-                <a:ea typeface="Calibri" pitchFamily="34" charset="-122"/>
-                <a:cs typeface="Calibri" pitchFamily="34" charset="-120"/>
-              </a:rPr>
-              <a:t>Fase 2</a:t>
-            </a:r>
-            <a:endParaRPr lang="en-US" sz="1150" dirty="0"/>
-          </a:p>
-        </p:txBody>
-      </p:sp>
-      <p:sp>
-        <p:nvSpPr>
-          <p:cNvPr id="47" name="Text 45"/>
-          <p:cNvSpPr/>
-          <p:nvPr/>
-        </p:nvSpPr>
-        <p:spPr>
-          <a:xfrm>
-            <a:off x="10125021" y="3547872"/>
-            <a:ext cx="1195251" cy="1097280"/>
-          </a:xfrm>
-          <a:prstGeom prst="rect">
-            <a:avLst/>
-          </a:prstGeom>
-          <a:noFill/>
-          <a:ln/>
-        </p:spPr>
-        <p:txBody>
-          <a:bodyPr wrap="square" rtlCol="0" anchor="t">
-            <a:normAutofit/>
-          </a:bodyPr>
-          <a:lstStyle/>
-          <a:p>
-            <a:pPr algn="ctr" indent="0" marL="0">
-              <a:lnSpc>
-                <a:spcPts val="1250"/>
-              </a:lnSpc>
-              <a:buNone/>
-            </a:pPr>
-            <a:r>
-              <a:rPr lang="en-US" sz="900" dirty="0">
-                <a:solidFill>
-                  <a:srgbClr val="4A5568"/>
-                </a:solidFill>
-                <a:latin typeface="Calibri" pitchFamily="34" charset="0"/>
-                <a:ea typeface="Calibri" pitchFamily="34" charset="-122"/>
-                <a:cs typeface="Calibri" pitchFamily="34" charset="-120"/>
-              </a:rPr>
-              <a:t>rollout regional — 9 grupos</a:t>
-            </a:r>
-            <a:endParaRPr lang="en-US" sz="900" dirty="0"/>
-          </a:p>
-        </p:txBody>
-      </p:sp>
-      <p:sp>
-        <p:nvSpPr>
-          <p:cNvPr id="48" name="Text 46"/>
-          <p:cNvSpPr/>
-          <p:nvPr/>
-        </p:nvSpPr>
-        <p:spPr>
-          <a:xfrm>
-            <a:off x="777240" y="5120640"/>
-            <a:ext cx="10634472" cy="292608"/>
-          </a:xfrm>
-          <a:prstGeom prst="rect">
-            <a:avLst/>
-          </a:prstGeom>
-          <a:noFill/>
-          <a:ln/>
-        </p:spPr>
-        <p:txBody>
-          <a:bodyPr wrap="square" rtlCol="0" anchor="ctr"/>
-          <a:lstStyle/>
-          <a:p>
-            <a:pPr algn="ctr" indent="0" marL="0">
-              <a:buNone/>
-            </a:pPr>
-            <a:r>
-              <a:rPr lang="en-US" sz="1250" i="1" dirty="0">
+              <a:buNone/>
+            </a:pPr>
+            <a:r>
+              <a:rPr lang="en-US" sz="1200" i="1" dirty="0">
                 <a:solidFill>
                   <a:srgbClr val="8A96A8"/>
                 </a:solidFill>
@@ -11384,9 +10943,9 @@
                 <a:ea typeface="Calibri" pitchFamily="34" charset="-122"/>
                 <a:cs typeface="Calibri" pitchFamily="34" charset="-120"/>
               </a:rPr>
-              <a:t>Tudo até aqui foi entregue no prazo — a Fase 2 é a decisão desta reunião.</a:t>
-            </a:r>
-            <a:endParaRPr lang="en-US" sz="1250" dirty="0"/>
+              <a:t>Modelo com retorno comprovável e escalável para toda a rede Yamaha.</a:t>
+            </a:r>
+            <a:endParaRPr lang="en-US" sz="1200" dirty="0"/>
           </a:p>
         </p:txBody>
       </p:sp>
@@ -11401,747 +10960,6 @@
 <file path=ppt/slides/slide18.xml><?xml version="1.0" encoding="utf-8"?>
 <p:sld xmlns:a="http://schemas.openxmlformats.org/drawingml/2006/main" xmlns:r="http://schemas.openxmlformats.org/officeDocument/2006/relationships" xmlns:p="http://schemas.openxmlformats.org/presentationml/2006/main">
   <p:cSld name="Slide 18">
-    <p:bg>
-      <p:bgPr>
-        <a:solidFill>
-          <a:srgbClr val="FFFFFF"/>
-        </a:solidFill>
-      </p:bgPr>
-    </p:bg>
-    <p:spTree>
-      <p:nvGrpSpPr>
-        <p:cNvPr id="1" name=""/>
-        <p:cNvGrpSpPr/>
-        <p:nvPr/>
-      </p:nvGrpSpPr>
-      <p:grpSpPr>
-        <a:xfrm>
-          <a:off x="0" y="0"/>
-          <a:ext cx="0" cy="0"/>
-          <a:chOff x="0" y="0"/>
-          <a:chExt cx="0" cy="0"/>
-        </a:xfrm>
-      </p:grpSpPr>
-      <p:sp>
-        <p:nvSpPr>
-          <p:cNvPr id="2" name="Text 0"/>
-          <p:cNvSpPr/>
-          <p:nvPr/>
-        </p:nvSpPr>
-        <p:spPr>
-          <a:xfrm>
-            <a:off x="777240" y="502920"/>
-            <a:ext cx="10634472" cy="237744"/>
-          </a:xfrm>
-          <a:prstGeom prst="rect">
-            <a:avLst/>
-          </a:prstGeom>
-          <a:noFill/>
-          <a:ln/>
-        </p:spPr>
-        <p:txBody>
-          <a:bodyPr wrap="square" rtlCol="0" anchor="ctr"/>
-          <a:lstStyle/>
-          <a:p>
-            <a:pPr indent="0" marL="0">
-              <a:buNone/>
-            </a:pPr>
-            <a:r>
-              <a:rPr lang="en-US" sz="1100" b="1" spc="150" kern="0" dirty="0">
-                <a:solidFill>
-                  <a:srgbClr val="0365FE"/>
-                </a:solidFill>
-                <a:latin typeface="Calibri" pitchFamily="34" charset="0"/>
-                <a:ea typeface="Calibri" pitchFamily="34" charset="-122"/>
-                <a:cs typeface="Calibri" pitchFamily="34" charset="-120"/>
-              </a:rPr>
-              <a:t>PAYBACK &amp; VIABILIDADE</a:t>
-            </a:r>
-            <a:endParaRPr lang="en-US" sz="1100" dirty="0"/>
-          </a:p>
-        </p:txBody>
-      </p:sp>
-      <p:sp>
-        <p:nvSpPr>
-          <p:cNvPr id="3" name="Text 1"/>
-          <p:cNvSpPr/>
-          <p:nvPr/>
-        </p:nvSpPr>
-        <p:spPr>
-          <a:xfrm>
-            <a:off x="777240" y="777240"/>
-            <a:ext cx="10634472" cy="566928"/>
-          </a:xfrm>
-          <a:prstGeom prst="rect">
-            <a:avLst/>
-          </a:prstGeom>
-          <a:noFill/>
-          <a:ln/>
-        </p:spPr>
-        <p:txBody>
-          <a:bodyPr wrap="square" rtlCol="0" anchor="ctr">
-            <a:normAutofit/>
-          </a:bodyPr>
-          <a:lstStyle/>
-          <a:p>
-            <a:pPr indent="0" marL="0">
-              <a:buNone/>
-            </a:pPr>
-            <a:r>
-              <a:rPr lang="en-US" sz="3000" b="1" dirty="0">
-                <a:solidFill>
-                  <a:srgbClr val="091426"/>
-                </a:solidFill>
-                <a:latin typeface="Calibri" pitchFamily="34" charset="0"/>
-                <a:ea typeface="Calibri" pitchFamily="34" charset="-122"/>
-                <a:cs typeface="Calibri" pitchFamily="34" charset="-120"/>
-              </a:rPr>
-              <a:t>Retorno mensurável para toda a cadeia</a:t>
-            </a:r>
-            <a:endParaRPr lang="en-US" sz="3000" dirty="0"/>
-          </a:p>
-        </p:txBody>
-      </p:sp>
-      <p:sp>
-        <p:nvSpPr>
-          <p:cNvPr id="4" name="Text 2"/>
-          <p:cNvSpPr/>
-          <p:nvPr/>
-        </p:nvSpPr>
-        <p:spPr>
-          <a:xfrm>
-            <a:off x="10954512" y="6446520"/>
-            <a:ext cx="457200" cy="274320"/>
-          </a:xfrm>
-          <a:prstGeom prst="rect">
-            <a:avLst/>
-          </a:prstGeom>
-          <a:noFill/>
-          <a:ln/>
-        </p:spPr>
-        <p:txBody>
-          <a:bodyPr wrap="square" rtlCol="0" anchor="ctr"/>
-          <a:lstStyle/>
-          <a:p>
-            <a:pPr algn="r" indent="0" marL="0">
-              <a:buNone/>
-            </a:pPr>
-            <a:r>
-              <a:rPr lang="en-US" sz="1000" b="1" dirty="0">
-                <a:solidFill>
-                  <a:srgbClr val="C3D6F0"/>
-                </a:solidFill>
-                <a:latin typeface="Calibri" pitchFamily="34" charset="0"/>
-                <a:ea typeface="Calibri" pitchFamily="34" charset="-122"/>
-                <a:cs typeface="Calibri" pitchFamily="34" charset="-120"/>
-              </a:rPr>
-              <a:t>16</a:t>
-            </a:r>
-            <a:endParaRPr lang="en-US" sz="1000" dirty="0"/>
-          </a:p>
-        </p:txBody>
-      </p:sp>
-      <p:sp>
-        <p:nvSpPr>
-          <p:cNvPr id="5" name="Shape 3"/>
-          <p:cNvSpPr/>
-          <p:nvPr/>
-        </p:nvSpPr>
-        <p:spPr>
-          <a:xfrm>
-            <a:off x="777240" y="1828800"/>
-            <a:ext cx="3410712" cy="1737360"/>
-          </a:xfrm>
-          <a:prstGeom prst="roundRect">
-            <a:avLst>
-              <a:gd name="adj" fmla="val 1579"/>
-            </a:avLst>
-          </a:prstGeom>
-          <a:solidFill>
-            <a:srgbClr val="F7F9FC"/>
-          </a:solidFill>
-          <a:ln/>
-        </p:spPr>
-      </p:sp>
-      <p:sp>
-        <p:nvSpPr>
-          <p:cNvPr id="6" name="Text 4"/>
-          <p:cNvSpPr/>
-          <p:nvPr/>
-        </p:nvSpPr>
-        <p:spPr>
-          <a:xfrm>
-            <a:off x="996696" y="2029968"/>
-            <a:ext cx="2971800" cy="201168"/>
-          </a:xfrm>
-          <a:prstGeom prst="rect">
-            <a:avLst/>
-          </a:prstGeom>
-          <a:noFill/>
-          <a:ln/>
-        </p:spPr>
-        <p:txBody>
-          <a:bodyPr wrap="square" rtlCol="0" anchor="ctr">
-            <a:normAutofit/>
-          </a:bodyPr>
-          <a:lstStyle/>
-          <a:p>
-            <a:pPr indent="0" marL="0">
-              <a:buNone/>
-            </a:pPr>
-            <a:r>
-              <a:rPr lang="en-US" sz="950" b="1" spc="50" kern="0" dirty="0">
-                <a:solidFill>
-                  <a:srgbClr val="0365FE"/>
-                </a:solidFill>
-                <a:latin typeface="Calibri" pitchFamily="34" charset="0"/>
-                <a:ea typeface="Calibri" pitchFamily="34" charset="-122"/>
-                <a:cs typeface="Calibri" pitchFamily="34" charset="-120"/>
-              </a:rPr>
-              <a:t>INVESTIMENTO</a:t>
-            </a:r>
-            <a:endParaRPr lang="en-US" sz="950" dirty="0"/>
-          </a:p>
-        </p:txBody>
-      </p:sp>
-      <p:sp>
-        <p:nvSpPr>
-          <p:cNvPr id="7" name="Text 5"/>
-          <p:cNvSpPr/>
-          <p:nvPr/>
-        </p:nvSpPr>
-        <p:spPr>
-          <a:xfrm>
-            <a:off x="996696" y="2286000"/>
-            <a:ext cx="2971800" cy="310896"/>
-          </a:xfrm>
-          <a:prstGeom prst="rect">
-            <a:avLst/>
-          </a:prstGeom>
-          <a:noFill/>
-          <a:ln/>
-        </p:spPr>
-        <p:txBody>
-          <a:bodyPr wrap="square" rtlCol="0" anchor="ctr">
-            <a:normAutofit/>
-          </a:bodyPr>
-          <a:lstStyle/>
-          <a:p>
-            <a:pPr indent="0" marL="0">
-              <a:buNone/>
-            </a:pPr>
-            <a:r>
-              <a:rPr lang="en-US" sz="1400" b="1" dirty="0">
-                <a:solidFill>
-                  <a:srgbClr val="091426"/>
-                </a:solidFill>
-                <a:latin typeface="Calibri" pitchFamily="34" charset="0"/>
-                <a:ea typeface="Calibri" pitchFamily="34" charset="-122"/>
-                <a:cs typeface="Calibri" pitchFamily="34" charset="-120"/>
-              </a:rPr>
-              <a:t>R$ 600/mês por CCY</a:t>
-            </a:r>
-            <a:endParaRPr lang="en-US" sz="1400" dirty="0"/>
-          </a:p>
-        </p:txBody>
-      </p:sp>
-      <p:sp>
-        <p:nvSpPr>
-          <p:cNvPr id="8" name="Text 6"/>
-          <p:cNvSpPr/>
-          <p:nvPr/>
-        </p:nvSpPr>
-        <p:spPr>
-          <a:xfrm>
-            <a:off x="996696" y="2651760"/>
-            <a:ext cx="2971800" cy="749808"/>
-          </a:xfrm>
-          <a:prstGeom prst="rect">
-            <a:avLst/>
-          </a:prstGeom>
-          <a:noFill/>
-          <a:ln/>
-        </p:spPr>
-        <p:txBody>
-          <a:bodyPr wrap="square" rtlCol="0" anchor="t">
-            <a:normAutofit/>
-          </a:bodyPr>
-          <a:lstStyle/>
-          <a:p>
-            <a:pPr indent="0" marL="0">
-              <a:lnSpc>
-                <a:spcPts val="1500"/>
-              </a:lnSpc>
-              <a:buNone/>
-            </a:pPr>
-            <a:r>
-              <a:rPr lang="en-US" sz="1100" dirty="0">
-                <a:solidFill>
-                  <a:srgbClr val="4A5568"/>
-                </a:solidFill>
-                <a:latin typeface="Calibri" pitchFamily="34" charset="0"/>
-                <a:ea typeface="Calibri" pitchFamily="34" charset="-122"/>
-                <a:cs typeface="Calibri" pitchFamily="34" charset="-120"/>
-              </a:rPr>
-              <a:t>Plataforma, integrações, treinamento e suporte — SaaS sem instalação e sem hardware.</a:t>
-            </a:r>
-            <a:endParaRPr lang="en-US" sz="1100" dirty="0"/>
-          </a:p>
-        </p:txBody>
-      </p:sp>
-      <p:sp>
-        <p:nvSpPr>
-          <p:cNvPr id="9" name="Shape 7"/>
-          <p:cNvSpPr/>
-          <p:nvPr/>
-        </p:nvSpPr>
-        <p:spPr>
-          <a:xfrm>
-            <a:off x="4389120" y="1828800"/>
-            <a:ext cx="3410712" cy="1737360"/>
-          </a:xfrm>
-          <a:prstGeom prst="roundRect">
-            <a:avLst>
-              <a:gd name="adj" fmla="val 1579"/>
-            </a:avLst>
-          </a:prstGeom>
-          <a:solidFill>
-            <a:srgbClr val="F7F9FC"/>
-          </a:solidFill>
-          <a:ln/>
-        </p:spPr>
-      </p:sp>
-      <p:sp>
-        <p:nvSpPr>
-          <p:cNvPr id="10" name="Text 8"/>
-          <p:cNvSpPr/>
-          <p:nvPr/>
-        </p:nvSpPr>
-        <p:spPr>
-          <a:xfrm>
-            <a:off x="4608576" y="2029968"/>
-            <a:ext cx="2971800" cy="201168"/>
-          </a:xfrm>
-          <a:prstGeom prst="rect">
-            <a:avLst/>
-          </a:prstGeom>
-          <a:noFill/>
-          <a:ln/>
-        </p:spPr>
-        <p:txBody>
-          <a:bodyPr wrap="square" rtlCol="0" anchor="ctr">
-            <a:normAutofit/>
-          </a:bodyPr>
-          <a:lstStyle/>
-          <a:p>
-            <a:pPr indent="0" marL="0">
-              <a:buNone/>
-            </a:pPr>
-            <a:r>
-              <a:rPr lang="en-US" sz="950" b="1" spc="50" kern="0" dirty="0">
-                <a:solidFill>
-                  <a:srgbClr val="0365FE"/>
-                </a:solidFill>
-                <a:latin typeface="Calibri" pitchFamily="34" charset="0"/>
-                <a:ea typeface="Calibri" pitchFamily="34" charset="-122"/>
-                <a:cs typeface="Calibri" pitchFamily="34" charset="-120"/>
-              </a:rPr>
-              <a:t>ECONOMIA GERADA</a:t>
-            </a:r>
-            <a:endParaRPr lang="en-US" sz="950" dirty="0"/>
-          </a:p>
-        </p:txBody>
-      </p:sp>
-      <p:sp>
-        <p:nvSpPr>
-          <p:cNvPr id="11" name="Text 9"/>
-          <p:cNvSpPr/>
-          <p:nvPr/>
-        </p:nvSpPr>
-        <p:spPr>
-          <a:xfrm>
-            <a:off x="4608576" y="2286000"/>
-            <a:ext cx="2971800" cy="310896"/>
-          </a:xfrm>
-          <a:prstGeom prst="rect">
-            <a:avLst/>
-          </a:prstGeom>
-          <a:noFill/>
-          <a:ln/>
-        </p:spPr>
-        <p:txBody>
-          <a:bodyPr wrap="square" rtlCol="0" anchor="ctr">
-            <a:normAutofit/>
-          </a:bodyPr>
-          <a:lstStyle/>
-          <a:p>
-            <a:pPr indent="0" marL="0">
-              <a:buNone/>
-            </a:pPr>
-            <a:r>
-              <a:rPr lang="en-US" sz="1400" b="1" dirty="0">
-                <a:solidFill>
-                  <a:srgbClr val="091426"/>
-                </a:solidFill>
-                <a:latin typeface="Calibri" pitchFamily="34" charset="0"/>
-                <a:ea typeface="Calibri" pitchFamily="34" charset="-122"/>
-                <a:cs typeface="Calibri" pitchFamily="34" charset="-120"/>
-              </a:rPr>
-              <a:t>Horas viram segundos</a:t>
-            </a:r>
-            <a:endParaRPr lang="en-US" sz="1400" dirty="0"/>
-          </a:p>
-        </p:txBody>
-      </p:sp>
-      <p:sp>
-        <p:nvSpPr>
-          <p:cNvPr id="12" name="Text 10"/>
-          <p:cNvSpPr/>
-          <p:nvPr/>
-        </p:nvSpPr>
-        <p:spPr>
-          <a:xfrm>
-            <a:off x="4608576" y="2651760"/>
-            <a:ext cx="2971800" cy="749808"/>
-          </a:xfrm>
-          <a:prstGeom prst="rect">
-            <a:avLst/>
-          </a:prstGeom>
-          <a:noFill/>
-          <a:ln/>
-        </p:spPr>
-        <p:txBody>
-          <a:bodyPr wrap="square" rtlCol="0" anchor="t">
-            <a:normAutofit/>
-          </a:bodyPr>
-          <a:lstStyle/>
-          <a:p>
-            <a:pPr indent="0" marL="0">
-              <a:lnSpc>
-                <a:spcPts val="1500"/>
-              </a:lnSpc>
-              <a:buNone/>
-            </a:pPr>
-            <a:r>
-              <a:rPr lang="en-US" sz="1100" dirty="0">
-                <a:solidFill>
-                  <a:srgbClr val="4A5568"/>
-                </a:solidFill>
-                <a:latin typeface="Calibri" pitchFamily="34" charset="0"/>
-                <a:ea typeface="Calibri" pitchFamily="34" charset="-122"/>
-                <a:cs typeface="Calibri" pitchFamily="34" charset="-120"/>
-              </a:rPr>
-              <a:t>Menos retrabalho operacional, menor custo de captação, menos perda no funil de vendas.</a:t>
-            </a:r>
-            <a:endParaRPr lang="en-US" sz="1100" dirty="0"/>
-          </a:p>
-        </p:txBody>
-      </p:sp>
-      <p:sp>
-        <p:nvSpPr>
-          <p:cNvPr id="13" name="Shape 11"/>
-          <p:cNvSpPr/>
-          <p:nvPr/>
-        </p:nvSpPr>
-        <p:spPr>
-          <a:xfrm>
-            <a:off x="8001000" y="1828800"/>
-            <a:ext cx="3410712" cy="1737360"/>
-          </a:xfrm>
-          <a:prstGeom prst="roundRect">
-            <a:avLst>
-              <a:gd name="adj" fmla="val 1579"/>
-            </a:avLst>
-          </a:prstGeom>
-          <a:solidFill>
-            <a:srgbClr val="F7F9FC"/>
-          </a:solidFill>
-          <a:ln/>
-        </p:spPr>
-      </p:sp>
-      <p:sp>
-        <p:nvSpPr>
-          <p:cNvPr id="14" name="Text 12"/>
-          <p:cNvSpPr/>
-          <p:nvPr/>
-        </p:nvSpPr>
-        <p:spPr>
-          <a:xfrm>
-            <a:off x="8220456" y="2029968"/>
-            <a:ext cx="2971800" cy="201168"/>
-          </a:xfrm>
-          <a:prstGeom prst="rect">
-            <a:avLst/>
-          </a:prstGeom>
-          <a:noFill/>
-          <a:ln/>
-        </p:spPr>
-        <p:txBody>
-          <a:bodyPr wrap="square" rtlCol="0" anchor="ctr">
-            <a:normAutofit/>
-          </a:bodyPr>
-          <a:lstStyle/>
-          <a:p>
-            <a:pPr indent="0" marL="0">
-              <a:buNone/>
-            </a:pPr>
-            <a:r>
-              <a:rPr lang="en-US" sz="950" b="1" spc="50" kern="0" dirty="0">
-                <a:solidFill>
-                  <a:srgbClr val="0365FE"/>
-                </a:solidFill>
-                <a:latin typeface="Calibri" pitchFamily="34" charset="0"/>
-                <a:ea typeface="Calibri" pitchFamily="34" charset="-122"/>
-                <a:cs typeface="Calibri" pitchFamily="34" charset="-120"/>
-              </a:rPr>
-              <a:t>GANHOS ESPERADOS</a:t>
-            </a:r>
-            <a:endParaRPr lang="en-US" sz="950" dirty="0"/>
-          </a:p>
-        </p:txBody>
-      </p:sp>
-      <p:sp>
-        <p:nvSpPr>
-          <p:cNvPr id="15" name="Text 13"/>
-          <p:cNvSpPr/>
-          <p:nvPr/>
-        </p:nvSpPr>
-        <p:spPr>
-          <a:xfrm>
-            <a:off x="8220456" y="2286000"/>
-            <a:ext cx="2971800" cy="310896"/>
-          </a:xfrm>
-          <a:prstGeom prst="rect">
-            <a:avLst/>
-          </a:prstGeom>
-          <a:noFill/>
-          <a:ln/>
-        </p:spPr>
-        <p:txBody>
-          <a:bodyPr wrap="square" rtlCol="0" anchor="ctr">
-            <a:normAutofit/>
-          </a:bodyPr>
-          <a:lstStyle/>
-          <a:p>
-            <a:pPr indent="0" marL="0">
-              <a:buNone/>
-            </a:pPr>
-            <a:r>
-              <a:rPr lang="en-US" sz="1400" b="1" dirty="0">
-                <a:solidFill>
-                  <a:srgbClr val="091426"/>
-                </a:solidFill>
-                <a:latin typeface="Calibri" pitchFamily="34" charset="0"/>
-                <a:ea typeface="Calibri" pitchFamily="34" charset="-122"/>
-                <a:cs typeface="Calibri" pitchFamily="34" charset="-120"/>
-              </a:rPr>
-              <a:t>+8% varejo · +15% leads</a:t>
-            </a:r>
-            <a:endParaRPr lang="en-US" sz="1400" dirty="0"/>
-          </a:p>
-        </p:txBody>
-      </p:sp>
-      <p:sp>
-        <p:nvSpPr>
-          <p:cNvPr id="16" name="Text 14"/>
-          <p:cNvSpPr/>
-          <p:nvPr/>
-        </p:nvSpPr>
-        <p:spPr>
-          <a:xfrm>
-            <a:off x="8220456" y="2651760"/>
-            <a:ext cx="2971800" cy="749808"/>
-          </a:xfrm>
-          <a:prstGeom prst="rect">
-            <a:avLst/>
-          </a:prstGeom>
-          <a:noFill/>
-          <a:ln/>
-        </p:spPr>
-        <p:txBody>
-          <a:bodyPr wrap="square" rtlCol="0" anchor="t">
-            <a:normAutofit/>
-          </a:bodyPr>
-          <a:lstStyle/>
-          <a:p>
-            <a:pPr indent="0" marL="0">
-              <a:lnSpc>
-                <a:spcPts val="1500"/>
-              </a:lnSpc>
-              <a:buNone/>
-            </a:pPr>
-            <a:r>
-              <a:rPr lang="en-US" sz="1100" dirty="0">
-                <a:solidFill>
-                  <a:srgbClr val="4A5568"/>
-                </a:solidFill>
-                <a:latin typeface="Calibri" pitchFamily="34" charset="0"/>
-                <a:ea typeface="Calibri" pitchFamily="34" charset="-122"/>
-                <a:cs typeface="Calibri" pitchFamily="34" charset="-120"/>
-              </a:rPr>
-              <a:t>+10% aprovação financeira · +5 pts NPS e fidelização · escalabilidade nacional.</a:t>
-            </a:r>
-            <a:endParaRPr lang="en-US" sz="1100" dirty="0"/>
-          </a:p>
-        </p:txBody>
-      </p:sp>
-      <p:sp>
-        <p:nvSpPr>
-          <p:cNvPr id="17" name="Shape 15"/>
-          <p:cNvSpPr/>
-          <p:nvPr/>
-        </p:nvSpPr>
-        <p:spPr>
-          <a:xfrm>
-            <a:off x="777240" y="3977640"/>
-            <a:ext cx="10634472" cy="1188720"/>
-          </a:xfrm>
-          <a:prstGeom prst="roundRect">
-            <a:avLst>
-              <a:gd name="adj" fmla="val 2308"/>
-            </a:avLst>
-          </a:prstGeom>
-          <a:solidFill>
-            <a:srgbClr val="E7F6EE"/>
-          </a:solidFill>
-          <a:ln/>
-        </p:spPr>
-      </p:sp>
-      <p:sp>
-        <p:nvSpPr>
-          <p:cNvPr id="18" name="Text 16"/>
-          <p:cNvSpPr/>
-          <p:nvPr/>
-        </p:nvSpPr>
-        <p:spPr>
-          <a:xfrm>
-            <a:off x="1051560" y="4123944"/>
-            <a:ext cx="10085832" cy="274320"/>
-          </a:xfrm>
-          <a:prstGeom prst="rect">
-            <a:avLst/>
-          </a:prstGeom>
-          <a:noFill/>
-          <a:ln/>
-        </p:spPr>
-        <p:txBody>
-          <a:bodyPr wrap="square" rtlCol="0" anchor="ctr">
-            <a:normAutofit/>
-          </a:bodyPr>
-          <a:lstStyle/>
-          <a:p>
-            <a:pPr indent="0" marL="0">
-              <a:buNone/>
-            </a:pPr>
-            <a:r>
-              <a:rPr lang="en-US" sz="1350" b="1" dirty="0">
-                <a:solidFill>
-                  <a:srgbClr val="091426"/>
-                </a:solidFill>
-                <a:latin typeface="Calibri" pitchFamily="34" charset="0"/>
-                <a:ea typeface="Calibri" pitchFamily="34" charset="-122"/>
-                <a:cs typeface="Calibri" pitchFamily="34" charset="-120"/>
-              </a:rPr>
-              <a:t>O piloto já quantificou: cerca de R$ 1,1 milhão por ano em uma única concessionária</a:t>
-            </a:r>
-            <a:endParaRPr lang="en-US" sz="1350" dirty="0"/>
-          </a:p>
-        </p:txBody>
-      </p:sp>
-      <p:sp>
-        <p:nvSpPr>
-          <p:cNvPr id="19" name="Text 17"/>
-          <p:cNvSpPr/>
-          <p:nvPr/>
-        </p:nvSpPr>
-        <p:spPr>
-          <a:xfrm>
-            <a:off x="1051560" y="4434840"/>
-            <a:ext cx="10085832" cy="621792"/>
-          </a:xfrm>
-          <a:prstGeom prst="rect">
-            <a:avLst/>
-          </a:prstGeom>
-          <a:noFill/>
-          <a:ln/>
-        </p:spPr>
-        <p:txBody>
-          <a:bodyPr wrap="square" rtlCol="0" anchor="t">
-            <a:normAutofit/>
-          </a:bodyPr>
-          <a:lstStyle/>
-          <a:p>
-            <a:pPr indent="0" marL="0">
-              <a:lnSpc>
-                <a:spcPts val="1600"/>
-              </a:lnSpc>
-              <a:buNone/>
-            </a:pPr>
-            <a:r>
-              <a:rPr lang="en-US" sz="1150" dirty="0">
-                <a:solidFill>
-                  <a:srgbClr val="4A5568"/>
-                </a:solidFill>
-                <a:latin typeface="Calibri" pitchFamily="34" charset="0"/>
-                <a:ea typeface="Calibri" pitchFamily="34" charset="-122"/>
-                <a:cs typeface="Calibri" pitchFamily="34" charset="-120"/>
-              </a:rPr>
-              <a:t>Prêmios de campanha (~R$ 400 mil) + gap de absorção do K2 (~R$ 490 mil) + Premya, Seguros e Consórcio (~R$ 200 mil). Um único prêmio de campanha capturado paga o ano inteiro de plataforma.</a:t>
-            </a:r>
-            <a:endParaRPr lang="en-US" sz="1150" dirty="0"/>
-          </a:p>
-        </p:txBody>
-      </p:sp>
-      <p:sp>
-        <p:nvSpPr>
-          <p:cNvPr id="20" name="Text 18"/>
-          <p:cNvSpPr/>
-          <p:nvPr/>
-        </p:nvSpPr>
-        <p:spPr>
-          <a:xfrm>
-            <a:off x="777240" y="5440680"/>
-            <a:ext cx="10634472" cy="274320"/>
-          </a:xfrm>
-          <a:prstGeom prst="rect">
-            <a:avLst/>
-          </a:prstGeom>
-          <a:noFill/>
-          <a:ln/>
-        </p:spPr>
-        <p:txBody>
-          <a:bodyPr wrap="square" rtlCol="0" anchor="ctr"/>
-          <a:lstStyle/>
-          <a:p>
-            <a:pPr algn="ctr" indent="0" marL="0">
-              <a:buNone/>
-            </a:pPr>
-            <a:r>
-              <a:rPr lang="en-US" sz="1200" i="1" dirty="0">
-                <a:solidFill>
-                  <a:srgbClr val="8A96A8"/>
-                </a:solidFill>
-                <a:latin typeface="Calibri" pitchFamily="34" charset="0"/>
-                <a:ea typeface="Calibri" pitchFamily="34" charset="-122"/>
-                <a:cs typeface="Calibri" pitchFamily="34" charset="-120"/>
-              </a:rPr>
-              <a:t>Modelo com retorno comprovável e escalável para toda a rede Yamaha.</a:t>
-            </a:r>
-            <a:endParaRPr lang="en-US" sz="1200" dirty="0"/>
-          </a:p>
-        </p:txBody>
-      </p:sp>
-    </p:spTree>
-  </p:cSld>
-  <p:clrMapOvr>
-    <a:masterClrMapping/>
-  </p:clrMapOvr>
-</p:sld>
-</file>
-
-<file path=ppt/slides/slide19.xml><?xml version="1.0" encoding="utf-8"?>
-<p:sld xmlns:a="http://schemas.openxmlformats.org/drawingml/2006/main" xmlns:r="http://schemas.openxmlformats.org/officeDocument/2006/relationships" xmlns:p="http://schemas.openxmlformats.org/presentationml/2006/main">
-  <p:cSld name="Slide 19">
     <p:bg>
       <p:bgPr>
         <a:solidFill>
@@ -16211,7 +15029,7 @@
                 <a:ea typeface="Calibri" pitchFamily="34" charset="-122"/>
                 <a:cs typeface="Calibri" pitchFamily="34" charset="-120"/>
               </a:rPr>
-              <a:t>PREMYA</a:t>
+              <a:t>CIRCULARES</a:t>
             </a:r>
             <a:endParaRPr lang="en-US" sz="1050" dirty="0"/>
           </a:p>
@@ -16274,7 +15092,7 @@
                 <a:ea typeface="Calibri" pitchFamily="34" charset="-122"/>
                 <a:cs typeface="Calibri" pitchFamily="34" charset="-120"/>
               </a:rPr>
-              <a:t>CIRCULARES</a:t>
+              <a:t>TREINAMENTO</a:t>
             </a:r>
             <a:endParaRPr lang="en-US" sz="1050" dirty="0"/>
           </a:p>
@@ -16283,69 +15101,6 @@
       <p:sp>
         <p:nvSpPr>
           <p:cNvPr id="40" name="Shape 38"/>
-          <p:cNvSpPr/>
-          <p:nvPr/>
-        </p:nvSpPr>
-        <p:spPr>
-          <a:xfrm>
-            <a:off x="9822180" y="3657600"/>
-            <a:ext cx="1589532" cy="566928"/>
-          </a:xfrm>
-          <a:prstGeom prst="roundRect">
-            <a:avLst>
-              <a:gd name="adj" fmla="val 50000"/>
-            </a:avLst>
-          </a:prstGeom>
-          <a:solidFill>
-            <a:srgbClr val="F7F9FC"/>
-          </a:solidFill>
-          <a:ln/>
-        </p:spPr>
-      </p:sp>
-      <p:sp>
-        <p:nvSpPr>
-          <p:cNvPr id="41" name="Text 39"/>
-          <p:cNvSpPr/>
-          <p:nvPr/>
-        </p:nvSpPr>
-        <p:spPr>
-          <a:xfrm>
-            <a:off x="9822180" y="3657600"/>
-            <a:ext cx="1589532" cy="566928"/>
-          </a:xfrm>
-          <a:prstGeom prst="rect">
-            <a:avLst/>
-          </a:prstGeom>
-          <a:noFill/>
-          <a:ln/>
-        </p:spPr>
-        <p:txBody>
-          <a:bodyPr wrap="square" rtlCol="0" anchor="ctr">
-            <a:normAutofit/>
-          </a:bodyPr>
-          <a:lstStyle/>
-          <a:p>
-            <a:pPr algn="ctr" indent="0" marL="0">
-              <a:buNone/>
-            </a:pPr>
-            <a:r>
-              <a:rPr lang="en-US" sz="1050" b="1" spc="50" kern="0" dirty="0">
-                <a:solidFill>
-                  <a:srgbClr val="4A5568"/>
-                </a:solidFill>
-                <a:latin typeface="Calibri" pitchFamily="34" charset="0"/>
-                <a:ea typeface="Calibri" pitchFamily="34" charset="-122"/>
-                <a:cs typeface="Calibri" pitchFamily="34" charset="-120"/>
-              </a:rPr>
-              <a:t>TREINAMENTO</a:t>
-            </a:r>
-            <a:endParaRPr lang="en-US" sz="1050" dirty="0"/>
-          </a:p>
-        </p:txBody>
-      </p:sp>
-      <p:sp>
-        <p:nvSpPr>
-          <p:cNvPr id="42" name="Shape 40"/>
           <p:cNvSpPr/>
           <p:nvPr/>
         </p:nvSpPr>
@@ -16367,7 +15122,7 @@
       </p:sp>
       <p:sp>
         <p:nvSpPr>
-          <p:cNvPr id="43" name="Text 41"/>
+          <p:cNvPr id="41" name="Text 39"/>
           <p:cNvSpPr/>
           <p:nvPr/>
         </p:nvSpPr>
@@ -16408,7 +15163,7 @@
       </p:sp>
       <p:sp>
         <p:nvSpPr>
-          <p:cNvPr id="44" name="Text 42"/>
+          <p:cNvPr id="42" name="Text 40"/>
           <p:cNvSpPr/>
           <p:nvPr/>
         </p:nvSpPr>
